--- a/assets/finance/D12_Equity_II_Analysis_Valuation.pptx
+++ b/assets/finance/D12_Equity_II_Analysis_Valuation.pptx
@@ -532,7 +532,11 @@
           <a:p>
             <a:r>
               <a:rPr lang="en-US" dirty="0"/>
-              <a:t/>
+              <a:t>ANGLE — Four modules, one arc: understand the business, understand the industry, forecast it, then put a number on it. The number is the easy part.
+•  Two hours. Roughly 25 min on §1, 35 on §2, 25 on §3, 45 on §4 — the valuation block is the payload.
+•  Say it up front: every figure in this deck is from the 2025 curriculum and they can check the page.
+•  Flag that §4 is the exam-heavy block and the one closest to what an IB analyst does daily.
+NEXT — Straight to the agenda — do not linger on the cover.</a:t>
             </a:r>
             <a:endParaRPr lang="en-US" dirty="0"/>
           </a:p>
@@ -620,7 +624,15 @@
           <a:p>
             <a:r>
               <a:rPr lang="en-US" dirty="0"/>
-              <a:t/>
+              <a:t>ANGLE — Give them the mental model: the industry sets the ceiling, the company decides how close it gets. Nothing in §2 makes sense without that.
+•  Walk the five steps left to right — this strip is the map for the next five slides.
+•  Steps 3 and 4 are the two named frameworks: Porter (structure) and PESTLE (external).
+•  McGahan &amp; Porter: industry matters most for how LONG excess returns last, not whether they appear.
+•  Ceiling, not floor — a bad operator in a good industry still underperforms.
+•  Second use, often forgotten: industry work generates ideas the company screen never surfaces.
+FROM THE DESK — Sector coverage exists because of this slide. Nobody staffs a "great companies" desk — they staff chemicals, healthcare, TMT. The base rate lives in the sector head's memory, and the fastest way to be wrong on a name is to model it without knowing what the sector has historically earned.
+ASK THE ROOM — Would you rather own the best airline or an average software company? Why?
+NEXT — Step one of five: define the industry. That is harder than it sounds.</a:t>
             </a:r>
             <a:endParaRPr lang="en-US" dirty="0"/>
           </a:p>
@@ -708,7 +720,15 @@
           <a:p>
             <a:r>
               <a:rPr lang="en-US" dirty="0"/>
-              <a:t/>
+              <a:t>ANGLE — Classification schemes are a starting point, never an answer. The comp set you defend in a pitch is one you built, not one you downloaded.
+•  Strict taxonomy = one company, one bucket at the lowest tier. Like species → genus → family.
+•  Numbers are worth memorising for GICS: 11 / 25 / 74 / 163.
+•  TRBC has 14 top-tier sectors, not 11 — the extra three are government, academia, and institutions.
+•  Amazon is the killer example: classified as a retailer, but the profit engine is cloud.
+•  Limitation 4 is the sneaky one — restate history to current groupings or your base rates are junk.
+FROM THE DESK — Nobody in a live process picks comps off a GICS screen. You choose the set that supports the argument, then defend it on growth, margin and capital intensity — and you keep the rejected names in an appendix because the other side will ask. A comp set is an argument, not a lookup.
+ASK THE ROOM — Is Amazon a retailer or a cloud company? Which comp set would you defend in front of a board?
+NEXT — Industry defined. Now score its structure — the five forces.</a:t>
             </a:r>
             <a:endParaRPr lang="en-US" dirty="0"/>
           </a:p>
@@ -796,7 +816,15 @@
           <a:p>
             <a:r>
               <a:rPr lang="en-US" dirty="0"/>
-              <a:t/>
+              <a:t>ANGLE — This is the reference scoring in the curriculum. Make them read it as a diagnosis, not a table: three hostile forces, two friendly, and that is why retail is hard.
+•  Go force by force and make them justify the rating before you show the driver column.
+•  40,000 new retail firm formations a MONTH in the US — that is what "very high entry" means.
+•  Substitutes LOW: services can replace some spending, but you cannot eat a streaming subscription.
+•  Supplier power LOW to MODERATE — the split is branded vs commodity goods. Luxury brands choose their retailers.
+•  Close on the verdict: three hostile forces is a structural cap, not a management failure.
+FROM THE DESK — Five Forces is where sell-side initiations go to die — three pages of it, then a DCF that ignores every word. If the structure says the industry caps ROIC, the model has to show margins converging, not the CEO's 2030 target. When the qualitative section and the terminal margin disagree, the terminal margin is wrong.
+ASK THE ROOM — Which single force would you have to change to make retail attractive?
+NEXT — Five scores is a description. An analyst has to say which ones actually matter.</a:t>
             </a:r>
             <a:endParaRPr lang="en-US" dirty="0"/>
           </a:p>
@@ -884,7 +912,15 @@
           <a:p>
             <a:r>
               <a:rPr lang="en-US" dirty="0"/>
-              <a:t/>
+              <a:t>ANGLE — Scoring all five is homework. Naming the one or two that decide the industry is the job — those are what you monitor every quarter.
+•  There is no quantitative test for "which force dominates". It is judgement, and it is defensible or it is not.
+•  The CFA's own trick question: "what if X raised prices 10% tomorrow?" The answer names the force.
+•  Note the pattern: four of six cards are entry or buyer power. Rivalry gets the headlines; barriers earn the money.
+•  Aircraft is the instructive one — every force benign except rivalry, and rivalry alone ruins the economics.
+•  Generic pharma is the number to remember: nine competitors instead of one cuts price roughly sixfold.
+FROM THE DESK — Ranking the forces is also how you sanity-check a management team. Ask them which force worries them most. A CEO who says "competition" has not thought about it; one who says "our top three distributors" has.
+ASK THE ROOM — Take an industry you know. Which force would you put on the front page of the report?
+NEXT — Porter looks inside the industry. Now look outside it.</a:t>
             </a:r>
             <a:endParaRPr lang="en-US" dirty="0"/>
           </a:p>
@@ -972,7 +1008,15 @@
           <a:p>
             <a:r>
               <a:rPr lang="en-US" dirty="0"/>
-              <a:t/>
+              <a:t>ANGLE — PESTLE is not "Porter, extended". It answers a different question — how fast does this industry grow and who gains share — and the exam tests whether students can tell them apart.
+•  Say the split once, hard: Porter = profitability. PESTLE = growth rate and share dynamics.
+•  Run the table quickly; the six letters are memorisation, the examples are the teaching.
+•  Then stop on the callout and run it as a live sorting exercise before you reveal.
+•  The discriminator: is the actor inside the industry (Porter) or outside it (PESTLE)?
+•  Useful aside: PESTLE moves slowly. You do not redo it every quarter — but you do monitor the metric.
+FROM THE DESK — PESTLE is where thematic money is raised and where it is lost. "Ageing demographics" or "energy transition" is a real tailwind and a terrible investment case on its own — the theme tells you the industry grows, not that anyone in it earns a return. You still need Porter to say who captures it.
+ASK THE ROOM — A competitor buys its own delivery fleet. PESTLE or Porter?
+NEXT — Structure and external tides set the field. Now the company has to choose how to play.</a:t>
             </a:r>
             <a:endParaRPr lang="en-US" dirty="0"/>
           </a:p>
@@ -1060,7 +1104,15 @@
           <a:p>
             <a:r>
               <a:rPr lang="en-US" dirty="0"/>
-              <a:t/>
+              <a:t>ANGLE — Three strategies is a small number for a big claim — but it holds. What matters is that a strategy must be a CHOICE, and the middle is not one of the three.
+•  Open on the distinction the curriculum makes: intentional strategy vs unintentional drift.
+•  Cost leadership is a cost POSITION, not low prices. Costco charges low prices because its costs allow it.
+•  Differentiation = uniqueness customers pay for. The test is the price premium, not the marketing budget.
+•  Focus can borrow from either — but only inside the niche. Ferrari is focus, not differentiation.
+•  The three-part test in the kicker is examinable: five forces · PESTLE · resources and capabilities.
+FROM THE DESK — "Stuck in the middle" is where most mid-cap industrials actually live, and it is the single most common reason a sponsor process ends without a deal. The company is not cheap enough to be a cost story and not special enough to be a growth story, so nobody will pay for either narrative.
+ASK THE ROOM — Name a company you think is stuck in the middle. What would it have to give up to escape?
+NEXT — That closes the qualitative work. Now turn all of it into numbers.</a:t>
             </a:r>
             <a:endParaRPr lang="en-US" dirty="0"/>
           </a:p>
@@ -1148,7 +1200,10 @@
           <a:p>
             <a:r>
               <a:rPr lang="en-US" dirty="0"/>
-              <a:t/>
+              <a:t>ANGLE — The hinge of the deck: everything qualitative from §1 and §2 now has to become a number someone can disagree with.
+•  Four slides, about 25 minutes.
+•  One framing line: "a forecast is a view with a decimal point on it."
+•  Take the break AFTER this section, before valuation. Say it now.</a:t>
             </a:r>
             <a:endParaRPr lang="en-US" dirty="0"/>
           </a:p>
@@ -1236,7 +1291,16 @@
           <a:p>
             <a:r>
               <a:rPr lang="en-US" dirty="0"/>
-              <a:t/>
+              <a:t>ANGLE — Two four-item lists, and students conflate them. WHAT you forecast (object) is a different choice from HOW you forecast it (approach).
+•  Draw the grid on the board if needed: four objects × four approaches. Any cell is legal.
+•  Objects: drivers → lines → summary measures → ad hoc. Explanatory power falls, efficiency rises.
+•  Approaches: history · base-rate convergence · guidance · discretion.
+•  The base-rate trap is worth a beat — Alphabet and Meta ARE the digital-ad base rate.
+•  Verifiability rule at the bottom of the callout is the one professionals actually live by.
+•  Footnote: read the guidance range from the top down, not the midpoint.
+FROM THE DESK — Management guidance is an anchor, not an input. Standard practice is to take the guide, haircut it — a few points off revenue, more off margin — and then check what the buy-side is carrying, because the number that moves the stock is the whisper, not the guide. Guidance for objects management controls (capex, opex) is worth far more than guidance for anything macro.
+ASK THE ROOM — Guidance says "sales growth 2%–4%". What number goes in your model, and why not 3%?
+NEXT — Take the revenue line specifically. Two routes to it, and you should walk both.</a:t>
             </a:r>
             <a:endParaRPr lang="en-US" dirty="0"/>
           </a:p>
@@ -1324,7 +1388,15 @@
           <a:p>
             <a:r>
               <a:rPr lang="en-US" dirty="0"/>
-              <a:t/>
+              <a:t>ANGLE — Two routes to the same line. Neither is more correct — but running only one hides an assumption you are making anyway.
+•  Top-down: market × share. Bottom-up: units × unit economics. Both end at revenue.
+•  Be precise on the CFA numbers: net sales PER STORE grew 3.8%, which is not the same as same-store sales.
+•  Share was 70 bps and rising ~2 bps a year. Two basis points sounds trivial — on a market that size it is not.
+•  Key move: if bottom-up gives more than top-down, you are implicitly forecasting a share gain. Say it out loud.
+•  Any of the four approaches from the last slide can drive either route — Exhibit 2 crosses them.
+FROM THE DESK — The reconciliation is the whole exercise. A bottom-up build that quietly implies a company takes 300 bps of share in five years is the number a client will hand back to you — so put the implied share on its own line in the model, where everyone can see it and argue about it.
+ASK THE ROOM — Bottom-up says +8%, top-down says +5%. What have you just assumed?
+NEXT — One number is a guess. Three numbers with probabilities is a forecast.</a:t>
             </a:r>
             <a:endParaRPr lang="en-US" dirty="0"/>
           </a:p>
@@ -1412,7 +1484,16 @@
           <a:p>
             <a:r>
               <a:rPr lang="en-US" dirty="0"/>
-              <a:t/>
+              <a:t>ANGLE — Three scenarios is not three guesses. It is the Porter and PESTLE risk list, priced.
+•  Work the base case live. Top-down and bottom-up, then stop on the 135 m gap before averaging.
+•  Name the gap: bottom-up above top-down means you have assumed a share gain. Make them say it.
+•  Then the table — same method, three sets of inputs. Let them verify one row themselves.
+•  Probability-weighted: 0.2 × 11,510 + 0.6 × 12,085 + 0.2 × 12,315 = 12,016. Check it on the board.
+•  Point out the asymmetry: bear is −4.8% from base, bull only +1.9%. Downside is fatter. Say why.
+•  Flag clearly: these numbers are illustrative. The CFA scenario case is the next slide.
+FROM THE DESK — Bear cases are written to be survivable, not to be bad. Ask what the revenue line looks like if the thing management says cannot happen, happens — that is the number the credit committee wants, and it is almost never in the deck. A bear case that still clears covenants is marketing.
+ASK THE ROOM — Your bear case is 5% below base. Is that a recession, or a rounding error?
+NEXT — Now the CFA's own scenario case — a real technological threat, sized.</a:t>
             </a:r>
             <a:endParaRPr lang="en-US" dirty="0"/>
           </a:p>
@@ -1500,7 +1581,12 @@
           <a:p>
             <a:r>
               <a:rPr lang="en-US" dirty="0"/>
-              <a:t/>
+              <a:t>ANGLE — Set the shape so nobody is surprised when the qualitative frameworks stop and the arithmetic starts.
+•  §1 and §2 are qualitative — frameworks, checklists, judgement. They feel soft; they set every input in §4.
+•  §3 is the hinge: it turns judgement into numbers.
+•  §4 is the maths — DDM, FCFE, multiples, EV, asset-based. Four named CFA cases.
+•  Break after §2. Say it now so they pace themselves.
+NEXT — Objectives — read them fast, they are the exam contract.</a:t>
             </a:r>
             <a:endParaRPr lang="en-US" dirty="0"/>
           </a:p>
@@ -1588,7 +1674,16 @@
           <a:p>
             <a:r>
               <a:rPr lang="en-US" dirty="0"/>
-              <a:t/>
+              <a:t>ANGLE — A disruption story turned into four numbers. This is what "quantify the risk" actually looks like, and it is the CFA's own worked case.
+•  Walk the chain out loud: tablets shipped → split consumer / non-consumer → cannibalisation factor → PCs lost → × ASP.
+•  The two ASPs are the trick: USD 85 consumer, USD 155 non-consumer, because ~80% of Office goes to institutions.
+•  Check one cell with them: FY12 consumer = 90,000 × 92% × 30% = 24,840; × USD 85 ≈ USD 2.1 bn.
+•  Then the operating-leverage kicker — 70% fixed costs turn a 4.2 bn revenue hit into 2.6 bn of EBIT.
+•  Sensitivity: 40% / 15% instead of 30% / 10% moves FY12 from 2.2 to 3.0 bn. One assumption, USD 0.8 bn.
+•  Tie it back to slide 8 — this is DOL doing the damage, not the revenue line alone.
+FROM THE DESK — Every assumption on this slide is contestable and none of them is the model's fault. That is the honest version of scenario work: you are not predicting, you are bounding. The number that matters in a meeting is not the base case — it is how far the assumption has to move before the recommendation flips.
+ASK THE ROOM — Which single input here would you fight hardest about — the cannibalisation factor or the ASP?
+NEXT — Forecast built, risks bounded. Time to turn it into a value.</a:t>
             </a:r>
             <a:endParaRPr lang="en-US" dirty="0"/>
           </a:p>
@@ -1676,7 +1771,10 @@
           <a:p>
             <a:r>
               <a:rPr lang="en-US" dirty="0"/>
-              <a:t/>
+              <a:t>ANGLE — The payload. Nine slides, five tools, four named CFA cases — and one rule that runs through all of it: keep the cash flow and the discount rate on the same claim.
+•  About 45 minutes. Do not start this after a break of less than five minutes — they need to be sharp.
+•  One framing line: "the model is arithmetic; the argument is the assumptions."
+•  Tell them now that the exam loves two things here: D₁ vs D₀, and equity-level vs enterprise-level multiples.</a:t>
             </a:r>
             <a:endParaRPr lang="en-US" dirty="0"/>
           </a:p>
@@ -1764,7 +1862,15 @@
           <a:p>
             <a:r>
               <a:rPr lang="en-US" dirty="0"/>
-              <a:t/>
+              <a:t>ANGLE — Three families, and the point of the slide is that they are complements, not competitors. You run at least two and see whether they agree.
+•  Present value = what the business generates. Multiples = what the market pays others. Assets = what the pieces fetch.
+•  The decision rule is one line: price &lt; value → undervalued. But say "with a confidence band" every time.
+•  Middle column: flag NOW that P/E is equity-level and EV/EBITDA is enterprise-level. Land it on slide 29.
+•  Also flag trailing vs forward — either is acceptable, mixing them across a comp set is not.
+•  CFA's own worked point: a one-year-old company is the worst case for a present-value model and the best for multiples.
+FROM THE DESK — Every valuation deck you will ever see is a football field — DCF, trading comps, transaction comps, LBO, 52-week range — and the ranges are tuned until they overlap where the banker wants them. The honest question is not "what is the number", it is "which of these five bars would you actually defend to a board".
+ASK THE ROOM — A firm with one year of financials and no dividend. Which family do you reach for, and which do you refuse?
+NEXT — Start with the present-value family — and the simplest cash flow of all: the dividend.</a:t>
             </a:r>
             <a:endParaRPr lang="en-US" dirty="0"/>
           </a:p>
@@ -1852,7 +1958,15 @@
           <a:p>
             <a:r>
               <a:rPr lang="en-US" dirty="0"/>
-              <a:t/>
+              <a:t>ANGLE — One idea, two cash flows. Dividends are what management chose to pay; FCFE is what it could have paid. Everything else is identical.
+•  Say the definition precisely: FCFE is dividend-paying CAPACITY, not dividends.
+•  Both discount at the cost of equity. Both produce an equity value directly. Repeat that — it is the exam line.
+•  The DDM's failure mode is a zero-dividend firm: you must guess when payments start and how they grow.
+•  FCFE swaps one hard guess for four forecastable line items. That is usually a good trade.
+•  Buybacks are the modern complication — a firm returning cash entirely via repurchase has a DDM of nearly zero.
+FROM THE DESK — On the desk nobody runs a DDM outside financials and utilities. FCFE and FCFF are the working tools, and the reason FCFE is less popular still is that net borrowing forces you to forecast the capital structure — which is precisely the thing under negotiation in most mandates.
+ASK THE ROOM — A company pays no dividend but bought back 4% of its shares. What is the DDM worth here?
+NEXT — Take the DDM to its simplest form: one dividend, growing forever.</a:t>
             </a:r>
             <a:endParaRPr lang="en-US" dirty="0"/>
           </a:p>
@@ -1940,7 +2054,16 @@
           <a:p>
             <a:r>
               <a:rPr lang="en-US" dirty="0"/>
-              <a:t/>
+              <a:t>ANGLE — Two formulas, one number — and a table that shows the number is almost entirely an artefact of two assumptions.
+•  Write both forms side by side: D₀(1+g)/(r−g) and D₁/(r−g). Same thing. Ask which one they were given.
+•  Compute it with them: 3.70 × 1.054 = 3.90, over 0.021, = 185.70. Market was 119.20.
+•  Now the honest part — 3.90 over a 2.1% spread. The denominator is doing all the work.
+•  Read the table across ONE row: r = 8%, g from 3.5% to 5.5% takes the value from 85 to 156.
+•  Then the b × ROE check: implied sustainable g is 8.5%, above r. That should make them uncomfortable.
+•  Close on the constraint: r must exceed g, and g must be plausible against long-run nominal GDP.
+FROM THE DESK — A model this sensitive is not a valuation, it is an opinion with three decimal places. In practice Gordon is used backwards — plug in the market price and see what growth the market is paying for. If that implied g is above nominal GDP forever, you have found the argument, not the answer.
+ASK THE ROOM — Siemens says undervalued at 185.70 versus 119.20. Would you buy on this slide alone?
+NEXT — One growth rate forever is rarely true. Bolt an explicit phase in front of it.</a:t>
             </a:r>
             <a:endParaRPr lang="en-US" dirty="0"/>
           </a:p>
@@ -2028,7 +2151,16 @@
           <a:p>
             <a:r>
               <a:rPr lang="en-US" dirty="0"/>
-              <a:t/>
+              <a:t>ANGLE — The workhorse model, and the one place students reliably lose a mark: how many periods you discount the terminal value.
+•  Set it up: one year of 5% growth, then 2.33% forever. r = 2.0% + 0.95 × 5.0% = 6.75%.
+•  The curriculum carries TWO explicit dividends — D₂₀₁₉ and D₂₀₂₀ — so n = 2 in Equation 11.
+•  The terminal value takes D₂₀₂₁ on top, which dates V at the END of 2020, i.e. t = n = 2.
+•  Write the off-by-one on the board: 154.477 / 1.0675², not / 1.0675³. Three years is the classic dropped mark.
+•  Total 147.52 against a market price of 148.56 — fairly valued. Note how rarely that happens.
+•  Point at the split: the terminal value alone is 135.56 of the 147.52. Ninety-two percent.
+FROM THE DESK — That 92% is not an artefact of a short stage 1 — a five-year DCF still puts 60–80% of value in the terminal. Which means the debate that decides the price is never the explicit forecast everyone spent three weeks building; it is g_L and the exit multiple, argued in 25 bp steps in the last hour before the pitch.
+ASK THE ROOM — If you discounted the terminal value three years instead of two, does the value rise or fall — and by roughly how much?
+NEXT — Dividends are a choice. Now value the cash the firm could have paid.</a:t>
             </a:r>
             <a:endParaRPr lang="en-US" dirty="0"/>
           </a:p>
@@ -2116,7 +2248,15 @@
           <a:p>
             <a:r>
               <a:rPr lang="en-US" dirty="0"/>
-              <a:t/>
+              <a:t>ANGLE — Five lines, one number — and the whole slide exists so they never discount FCFE at WACC.
+•  Build it live down the column: 1,000 + 400 − 50 − 600 + 200 = 950.
+•  The line students fight: why does NEW BORROWING add? Because it is cash the equity holder can be paid with.
+•  Then the discipline point: FCFE 950 vs dividends 300. The gap is a management choice, not a modelling one.
+•  Land the footnote hard. FCFE → cost of equity → equity value. FCFF → WACC → enterprise value, then subtract net debt.
+•  Two ways to get it wrong, and both give you the same wrong answer: mismatched rate, or subtracting debt twice.
+FROM THE DESK — FCFE is fragile precisely because net borrowing is an input. Lever the company up in the forecast and FCFE rises, so the equity looks more valuable — which is nonsense, and it is why most shops model FCFF and bridge to equity at the end. If you see FCFE in a pitch, check what the debt schedule is doing.
+ASK THE ROOM — A firm draws USD 500 m on a revolver. FCFE goes up. Is the equity worth more?
+NEXT — That is the present-value family. Now the shortcut everyone actually quotes: multiples.</a:t>
             </a:r>
             <a:endParaRPr lang="en-US" dirty="0"/>
           </a:p>
@@ -2204,7 +2344,16 @@
           <a:p>
             <a:r>
               <a:rPr lang="en-US" dirty="0"/>
-              <a:t/>
+              <a:t>ANGLE — The bridge between the DCF world and the multiples world. A P/E is not a market opinion — it is a DCF in disguise.
+•  Derive it verbally: divide the Gordon formula through by E₁ and the payout ratio appears on top.
+•  Then the three levers, and only three: payout, r, g. High-quality, low-risk, growing firms print high P/Es.
+•  Nestlé: 0.68 / 0.021 = 32.4×. Then say the uncomfortable part — the street was at 19 to 26.
+•  That gap is the lesson. 32.4× is not a target price, it is a statement about ROE and r.
+•  Footnote 2 shows why: r 9% → 9.5% takes it to 26.2×. Fifty basis points, six turns.
+•  Kicker trap: raising payout raises the numerator but cuts g. The two effects fight.
+FROM THE DESK — This is the cleanest way to challenge a comp-based value. If a peer trades at 25× and your justified multiple says 15×, the peer is not a benchmark — it is a bet on ROE or r that you can now name out loud. Multiples do not free you from assumptions; they hide them.
+ASK THE ROOM — Payout goes from 68% to 80%. Does the justified P/E rise or fall?
+NEXT — That was one company from the inside. Now rank a whole industry from the outside.</a:t>
             </a:r>
             <a:endParaRPr lang="en-US" dirty="0"/>
           </a:p>
@@ -2292,7 +2441,16 @@
           <a:p>
             <a:r>
               <a:rPr lang="en-US" dirty="0"/>
-              <a:t/>
+              <a:t>ANGLE — Nine names, one ratio, one line of ranking — and the whole point is that the ranking is a question, not an answer.
+•  Why P/S and not P/E here? Sales fall less than earnings in a downturn — operating and financial leverage.
+•  The CFA answer is that Peugeot "offers the best value". Read that carefully: it says the SCREEN flags Peugeot.
+•  Then flip it: 0.28 vs 0.80 is a 3× spread inside one industry. That is not mispricing, that is margin.
+•  Make them do the arithmetic — P/S is only meaningful next to net margin. P/S ÷ margin ≈ P/E.
+•  P/S has one real virtue: sales are harder to manipulate than earnings. That is why it survives.
+•  Right column is my commentary, not the curriculum. Say so.
+FROM THE DESK — A one-line screen like this is where a pitch starts, never where it ends. The first question in any comps discussion is what the low multiple is telling you that you have not modelled yet — and nine times out of ten it is margin, leverage, or a business inside the business that the ratio cannot see.
+ASK THE ROOM — Peugeot at 0.28 and Toyota at 0.80. Which is mispriced — and what would you need to know to answer?
+NEXT — P/S and P/E are equity-level. Some comparisons need the whole capital stack.</a:t>
             </a:r>
             <a:endParaRPr lang="en-US" dirty="0"/>
           </a:p>
@@ -2380,7 +2538,16 @@
           <a:p>
             <a:r>
               <a:rPr lang="en-US" dirty="0"/>
-              <a:t/>
+              <a:t>ANGLE — The metric an acquirer actually uses — and the slide where the numerator/denominator rule finally has to land.
+•  Build EV out loud: equity, plus preferred, plus debt, minus cash. Ask why cash comes off before you say it.
+•  Note the market-vs-book debt point: 1,905 book becomes 1,480 at market. That is 425 of EV, not a rounding.
+•  Then 7,487 / 606 = 12.4×. Simple arithmetic; the work was all in the numerator.
+•  Now the right-hand box — say it twice: EV goes with pre-interest measures, price goes with post-interest ones.
+•  EV/EPS and P/EBITDA are both nonsense. Make them tell you why before you explain it.
+•  EBITDA caveat: it adds back D&amp;A, so in capital-heavy sectors it flatters cash generation badly.
+FROM THE DESK — EV/EBITDA dominates because it is the only multiple that survives a leveraged buyout — the sponsor changes the capital structure entirely, so anything post-interest is meaningless. Which is also its weakness: for a business that must spend its D&amp;A back every year just to stand still, EBITDA is a number nobody ever receives.
+ASK THE ROOM — Two identical businesses, one debt-free and one at 4× leverage. Which multiple compares them, and which one lies?
+NEXT — All of this assumes a going concern. What if there is not one?</a:t>
             </a:r>
             <a:endParaRPr lang="en-US" dirty="0"/>
           </a:p>
@@ -2468,7 +2635,12 @@
           <a:p>
             <a:r>
               <a:rPr lang="en-US" dirty="0"/>
-              <a:t/>
+              <a:t>ANGLE — Five objectives; four of them are things they will be asked to DO, not describe. Say which.
+•  Objectives 1–2 are describe/analyze — frameworks and vocabulary.
+•  Objectives 3–5 are calculate. That is where the marks and the job are.
+•  Point at objective 5's clause on numerator/denominator — flag it now, land it on the EV slide.
+•  Thirty seconds. Do not read all five aloud word for word.
+NEXT — Section 1 — start where every research report starts: the company itself.</a:t>
             </a:r>
             <a:endParaRPr lang="en-US" dirty="0"/>
           </a:p>
@@ -2556,7 +2728,16 @@
           <a:p>
             <a:r>
               <a:rPr lang="en-US" dirty="0"/>
-              <a:t/>
+              <a:t>ANGLE — Three cases, one message: asset-based valuation almost never gives you the answer, but it very often gives you the floor — and occasionally it is the only lens that works.
+•  Run them left to right; the pattern is how much of the value is intangible.
+•  Laundry: mostly tangible, so it is tractable — but CFA still calls the result inaccurate. Say that, do not soften it.
+•  Restaurant: the asset is the owner, and he is leaving. Baseline only.
+•  Airline: the going concern is worth less than nothing, yet slots and aircraft are worth plenty to a rival.
+•  Generalise: use it for financials, natural resources, and businesses being wound up.
+•  Footnote: it is hardest exactly where you need it — heavy PP&amp;E with no observable price.
+FROM THE DESK — In restructuring this is not a supplementary method, it is the whole negotiation. Every creditor class is arguing about liquidation value versus going-concern value, and the gap between the two is what determines who gets equity in the new company. The asset floor is where the fight starts.
+ASK THE ROOM — Where would you rather be a creditor — the restaurant or the airline?
+NEXT — Five tools, four cases. Pull it together.</a:t>
             </a:r>
             <a:endParaRPr lang="en-US" dirty="0"/>
           </a:p>
@@ -2644,7 +2825,13 @@
           <a:p>
             <a:r>
               <a:rPr lang="en-US" dirty="0"/>
-              <a:t/>
+              <a:t>ANGLE — Eight cards, and only three of them are arithmetic. Say that out loud — it is the honest summary of the session.
+•  Do not read all eight. Pick three: the five business-model questions, D₁ not D₀, and the consistency rule.
+•  Ask the room which of the five valuation tools they would reach for first, and make someone defend it.
+•  Remind them the four named cases — Siemens, IBM, Nestlé, Cameco — are all in the curriculum and worth re-deriving.
+•  Last line to leave them with: the model is arithmetic, the argument is the assumptions.
+•  Five minutes for questions. Do not start a new topic.
+FROM THE DESK — What separates a good analyst from a fast one is not the model — everyone builds the same model. It is being able to say, in one sentence, which assumption the whole valuation hangs on, and what would have to be true for it to break.</a:t>
             </a:r>
             <a:endParaRPr lang="en-US" dirty="0"/>
           </a:p>
@@ -2732,7 +2919,10 @@
           <a:p>
             <a:r>
               <a:rPr lang="en-US" dirty="0"/>
-              <a:t/>
+              <a:t>ANGLE — Before anyone forecasts anything, they have to be able to say what the company actually does and how it makes money.
+•  Four slides, about 25 minutes.
+•  One framing line: "you cannot forecast a business you cannot describe in four sentences."
+•  Do not preview the content — slide 5 does it.</a:t>
             </a:r>
             <a:endParaRPr lang="en-US" dirty="0"/>
           </a:p>
@@ -2820,7 +3010,15 @@
           <a:p>
             <a:r>
               <a:rPr lang="en-US" dirty="0"/>
-              <a:t/>
+              <a:t>ANGLE — The whole deck in one picture: three analytical blocks stacked, valuation sitting on top of all three. Everything after this is a zoom into one block.
+•  Build it bottom-up: you cannot do industry work without knowing the business model, or forecast without both.
+•  Left = the analysis. Right = the artefact it gets written into. Same content, different order.
+•  Eight elements — count them out loud, it is an exam-friendly list.
+•  Point out that valuation is element 6 of 8. The maths is a minority of the report.
+•  Subsequent reports are shorter: they update what changed, not the whole edifice.
+FROM THE DESK — The order on the page is not the order of work. In practice you build the model first, get a number, then write the narrative that supports it — which is exactly why an initiation reads so confident. The discipline is to let a bad number kill the story rather than the other way round.
+ASK THE ROOM — Which of these eight would you write LAST, and why?
+NEXT — Start at the foundation — block one, and its first step: the business model.</a:t>
             </a:r>
             <a:endParaRPr lang="en-US" dirty="0"/>
           </a:p>
@@ -2908,7 +3106,15 @@
           <a:p>
             <a:r>
               <a:rPr lang="en-US" dirty="0"/>
-              <a:t/>
+              <a:t>ANGLE — Five questions, and a student who can answer all five out loud can already build a revenue driver tree. One who cannot is guessing.
+•  Make them count: FIVE elements, not four. Sell · to whom · channel · price · buy.
+•  Channel and supplier are the two students always drop — and they are where the margin lives.
+•  Warehouse Club Inc.: single line of business, so classification and modelling are easy. Say why that is unusual.
+•  Footnote matters: strategy is not part of the business model. That comes in §2.
+•  Sources ladder: issuer → public third party → proprietary third party → your own primary research.
+FROM THE DESK — The fastest read on a business you have never seen: find the channel and the payment terms. Who takes the order and who holds the receivable tells you more about the economics than the product description does. It is also the first thing that breaks in diligence.
+ASK THE ROOM — Pick a company you shop at. Answer all five in thirty seconds — where do you stall?
+NEXT — Once you know what is sold and at what price, the revenue line decomposes on its own.</a:t>
             </a:r>
             <a:endParaRPr lang="en-US" dirty="0"/>
           </a:p>
@@ -2996,7 +3202,15 @@
           <a:p>
             <a:r>
               <a:rPr lang="en-US" dirty="0"/>
-              <a:t/>
+              <a:t>ANGLE — Revenue is never one number. It is volume, price, mix and FX — and only one of those four is a real pricing decision.
+•  Put the question up and let them compute before you reveal: 2m cases at USD 20, then 3m at +5% ASP.
+•  The trap is answering 55% — adding +50% volume and +5% price. The interaction term is +2.5%.
+•  Land the decomposition on the answer bar: 50 + 5 + 2.5 = 57.5, rounded to 58%.
+•  Then the real point: which of the four is management actually choosing? Only price.
+•  Pricing power = industry structure + competitive strategy. Not a management aspiration.
+FROM THE DESK — A pricing-power claim survives exactly one recession. When you underwrite a business on "they take 2% price every year", check whether they took it in the last downturn — and whether volume held when they did. Price you cannot hold in a bad year is a discount you have not booked yet.
+ASK THE ROOM — Volume +50% and price +5%. Why is the answer not 55%?
+NEXT — Revenue moves. What that does to profit depends on the cost structure underneath.</a:t>
             </a:r>
             <a:endParaRPr lang="en-US" dirty="0"/>
           </a:p>
@@ -3084,7 +3298,15 @@
           <a:p>
             <a:r>
               <a:rPr lang="en-US" dirty="0"/>
-              <a:t/>
+              <a:t>ANGLE — Two multipliers in series. Operating leverage amplifies sales into EBIT; financial leverage amplifies EBIT into net income. Shareholders feel the product.
+•  Rebuild operating income from the P&amp;L first — 9,707 − 4,850 − 993 − 1,700 − 491 = 1,673. Interest is NOT deducted.
+•  That exclusion is the whole exam trap: use pre-tax income instead of EBIT and you get 1.08.
+•  Then DOL = 9.56% / 4.87% = 1.96×. Say it as "a 1% sales move becomes a 2% EBIT move".
+•  DOL comes from fixed COSTS. DFL comes from fixed INTEREST. Different balance-sheet causes.
+•  Q8 is the judgement call: a firm already running high DOL should be cautious adding DFL.
+FROM THE DESK — This is the single most useful ratio in rating advisory. A high-DOL issuer asking for more leverage is asking you to sell a credit that looks fine at mid-cycle and breaches at trough. Agencies model the trough; sponsors model the base case. The gap between those two is the whole conversation.
+ASK THE ROOM — Two firms, same EBIT margin. One is 80% fixed cost, one 80% variable. Which one do you lend to?
+NEXT — The cost structure is the company's. But the ceiling on its returns is set by the industry.</a:t>
             </a:r>
             <a:endParaRPr lang="en-US" dirty="0"/>
           </a:p>
@@ -3172,7 +3394,10 @@
           <a:p>
             <a:r>
               <a:rPr lang="en-US" dirty="0"/>
-              <a:t/>
+              <a:t>ANGLE — Zoom out. The company sets how close it gets to the ceiling; the industry sets where the ceiling is.
+•  Six slides, about 35 minutes. The densest qualitative block.
+•  One framing line: "the second-best firm in a great industry beats the best firm in a broken one."
+•  Warn them Porter and PESTLE are examinable as a PAIR — the classic question is which one a given fact belongs to.</a:t>
             </a:r>
             <a:endParaRPr lang="en-US" dirty="0"/>
           </a:p>
@@ -4007,7 +4232,7 @@
                 <a:ea typeface="Calibri" pitchFamily="34" charset="-122"/>
                 <a:cs typeface="Calibri" pitchFamily="34" charset="-120"/>
               </a:rPr>
-              <a:t>¹ McGahan &amp; Porter (1997) found industry effects matter most for the sustainability of economic profits; company-specific effects explain more variance for laggards than for leaders.
+              <a:t>¹ McGahan &amp; Porter (1997): industry mattered most for the SUSTAINABILITY of economic profits — the forces act as a ceiling, not a floor.
 </a:t>
             </a:r>
             <a:endParaRPr lang="en-US" sz="1000" dirty="0"/>
@@ -4050,7 +4275,7 @@
                 <a:ea typeface="Calibri" pitchFamily="34" charset="-122"/>
                 <a:cs typeface="Calibri" pitchFamily="34" charset="-120"/>
               </a:rPr>
-              <a:t>Source: CFA Institute, Curriculum Vol 5, Learning Module 6, §2 "Uses of Industry Analysis", pp. 249–251. McGahan &amp; Porter (1997).</a:t>
+              <a:t>Source: CFA Institute, Curriculum Vol 5, Learning Module 6, §2 "Uses of Industry Analysis", Exhibit 2, pp. 248–250. McGahan &amp; Porter (1997).</a:t>
             </a:r>
             <a:endParaRPr lang="en-US" sz="750" dirty="0"/>
           </a:p>
@@ -5299,6 +5524,46 @@
         </p:nvSpPr>
         <p:spPr>
           <a:xfrm>
+            <a:off x="320040" y="4471416"/>
+            <a:ext cx="8503920" cy="192024"/>
+          </a:xfrm>
+          <a:prstGeom prst="rect">
+            <a:avLst/>
+          </a:prstGeom>
+          <a:noFill/>
+          <a:ln/>
+        </p:spPr>
+        <p:txBody>
+          <a:bodyPr wrap="square" lIns="254" tIns="254" rIns="254" bIns="254" rtlCol="0" anchor="t"/>
+          <a:lstStyle/>
+          <a:p>
+            <a:pPr indent="0" marL="0">
+              <a:buNone/>
+            </a:pPr>
+            <a:r>
+              <a:rPr lang="en-US" sz="1000" dirty="0">
+                <a:solidFill>
+                  <a:srgbClr val="6B7A8D"/>
+                </a:solidFill>
+                <a:latin typeface="Calibri" pitchFamily="34" charset="0"/>
+                <a:ea typeface="Calibri" pitchFamily="34" charset="-122"/>
+                <a:cs typeface="Calibri" pitchFamily="34" charset="-120"/>
+              </a:rPr>
+              <a:t>¹ Multi-segment firms: classify on the segment with &gt;50% of revenue, profits or assets; failing that, ≥60% of revenue; failing that, discretion.
+</a:t>
+            </a:r>
+            <a:endParaRPr lang="en-US" sz="1000" dirty="0"/>
+          </a:p>
+        </p:txBody>
+      </p:sp>
+      <p:sp>
+        <p:nvSpPr>
+          <p:cNvPr id="8" name="Text 6"/>
+          <p:cNvSpPr txBox="1"/>
+          <p:nvPr/>
+        </p:nvSpPr>
+        <p:spPr>
+          <a:xfrm>
             <a:off x="320040" y="4663440"/>
             <a:ext cx="8503920" cy="201168"/>
           </a:xfrm>
@@ -5327,7 +5592,7 @@
                 <a:ea typeface="Calibri" pitchFamily="34" charset="-122"/>
                 <a:cs typeface="Calibri" pitchFamily="34" charset="-120"/>
               </a:rPr>
-              <a:t>Source: CFA Institute, Curriculum Vol 5, Learning Module 6, §3 "Industry Classification", pp. 251–258.</a:t>
+              <a:t>Source: CFA Institute, Curriculum Vol 5, Learning Module 6, §3 "Industry Classification", Exhibits 3–4, pp. 251–257.</a:t>
             </a:r>
             <a:endParaRPr lang="en-US" sz="750" dirty="0"/>
           </a:p>
@@ -5335,7 +5600,7 @@
       </p:sp>
       <p:sp>
         <p:nvSpPr>
-          <p:cNvPr id="8" name="Text 6"/>
+          <p:cNvPr id="9" name="Text 7"/>
           <p:cNvSpPr txBox="1"/>
           <p:nvPr/>
         </p:nvSpPr>
@@ -5369,7 +5634,7 @@
                 <a:ea typeface="Calibri" pitchFamily="34" charset="-122"/>
                 <a:cs typeface="Calibri" pitchFamily="34" charset="-120"/>
               </a:rPr>
-              <a:t>A "demand" grouping (similar products from the customer's perspective) has largely replaced legacy "supply" groupings like SIC/NACE/ISIC.</a:t>
+              <a:t>A "demand" grouping — similar products from the customer's perspective — has largely replaced legacy "supply" schemes like SIC / NACE / ISIC.</a:t>
             </a:r>
             <a:endParaRPr lang="en-US" sz="1300" dirty="0"/>
           </a:p>
@@ -5398,10 +5663,10 @@
             <a:tbl>
               <a:tblPr/>
               <a:tblGrid>
-                <a:gridCol w="1554480"/>
-                <a:gridCol w="2103120"/>
-                <a:gridCol w="3657600"/>
-                <a:gridCol w="1188720"/>
+                <a:gridCol w="1417320"/>
+                <a:gridCol w="1508760"/>
+                <a:gridCol w="3886200"/>
+                <a:gridCol w="1691640"/>
               </a:tblGrid>
               <a:tr h="274320">
                 <a:tc>
@@ -5571,7 +5836,7 @@
                           <a:ea typeface="Trebuchet MS" pitchFamily="34" charset="-122"/>
                           <a:cs typeface="Trebuchet MS" pitchFamily="34" charset="-120"/>
                         </a:rPr>
-                        <a:t># Sectors</a:t>
+                        <a:t>Groups per tier</a:t>
                       </a:r>
                       <a:endParaRPr lang="en-US" sz="1100" dirty="0">
                         <a:latin typeface="Trebuchet MS" charset="0"/>
@@ -5673,7 +5938,7 @@
                           <a:ea typeface="Consolas" pitchFamily="34" charset="-122"/>
                           <a:cs typeface="Consolas" pitchFamily="34" charset="-120"/>
                         </a:rPr>
-                        <a:t>MSCI + S&amp;P Dow Jones</a:t>
+                        <a:t>MSCI+S&amp;P DJI</a:t>
                       </a:r>
                       <a:endParaRPr lang="en-US" sz="1100" dirty="0">
                         <a:latin typeface="Consolas" charset="0"/>
@@ -5723,7 +5988,7 @@
                           <a:ea typeface="Consolas" pitchFamily="34" charset="-122"/>
                           <a:cs typeface="Consolas" pitchFamily="34" charset="-120"/>
                         </a:rPr>
-                        <a:t>Sector → Industry Group → Industry → Sub-Industry</a:t>
+                        <a:t>Sector → Ind. Group → Industry → Sub-Industry</a:t>
                       </a:r>
                       <a:endParaRPr lang="en-US" sz="1100" dirty="0">
                         <a:latin typeface="Consolas" charset="0"/>
@@ -6127,7 +6392,7 @@
                           <a:ea typeface="Consolas" pitchFamily="34" charset="-122"/>
                           <a:cs typeface="Consolas" pitchFamily="34" charset="-120"/>
                         </a:rPr>
-                        <a:t>Econ. Sector → Business → Industry Group → …</a:t>
+                        <a:t>Econ. Sector → Business → Ind. Group → …</a:t>
                       </a:r>
                       <a:endParaRPr lang="en-US" sz="1100" dirty="0">
                         <a:latin typeface="Consolas" charset="0"/>
@@ -6279,7 +6544,7 @@
                           <a:ea typeface="Consolas" pitchFamily="34" charset="-122"/>
                           <a:cs typeface="Consolas" pitchFamily="34" charset="-120"/>
                         </a:rPr>
-                        <a:t>Government (US / EU / UN)</a:t>
+                        <a:t>Governments</a:t>
                       </a:r>
                       <a:endParaRPr lang="en-US" sz="1100" dirty="0">
                         <a:latin typeface="Consolas" charset="0"/>
@@ -6419,7 +6684,7 @@
       </p:graphicFrame>
       <p:sp>
         <p:nvSpPr>
-          <p:cNvPr id="10" name="Shape 7"/>
+          <p:cNvPr id="11" name="Shape 8"/>
           <p:cNvSpPr/>
           <p:nvPr/>
         </p:nvSpPr>
@@ -6439,7 +6704,7 @@
       </p:sp>
       <p:sp>
         <p:nvSpPr>
-          <p:cNvPr id="11" name="Shape 8"/>
+          <p:cNvPr id="12" name="Shape 9"/>
           <p:cNvSpPr/>
           <p:nvPr/>
         </p:nvSpPr>
@@ -6459,7 +6724,7 @@
       </p:sp>
       <p:sp>
         <p:nvSpPr>
-          <p:cNvPr id="12" name="Text 9"/>
+          <p:cNvPr id="13" name="Text 10"/>
           <p:cNvSpPr txBox="1"/>
           <p:nvPr/>
         </p:nvSpPr>
@@ -6501,7 +6766,7 @@
       </p:sp>
       <p:sp>
         <p:nvSpPr>
-          <p:cNvPr id="13" name="Text 10"/>
+          <p:cNvPr id="14" name="Text 11"/>
           <p:cNvSpPr txBox="1"/>
           <p:nvPr/>
         </p:nvSpPr>
@@ -6535,7 +6800,7 @@
                 <a:ea typeface="Calibri" pitchFamily="34" charset="-122"/>
                 <a:cs typeface="Calibri" pitchFamily="34" charset="-120"/>
               </a:rPr>
-              <a:t>1. Overly narrow or broad groups (Shopify grouped with Check Point in "Application Software")  ·  2. Multi-product firms force a single bucket (Amazon in Consumer Discretionary despite AWS dominance)  ·  3. Global schemes miss local industries (healthcare services, regulated utilities)  ·  4. Groupings change — affects historical comparability (creation of Real Estate sector in 2016).</a:t>
+              <a:t>1. Groups too narrow or too broad (Shopify sits with Check Point in "Application Software")  ·  2. Multi-product firms get a single bucket (Amazon is Consumer Discretionary although most operating profit is AWS)  ·  3. Global schemes miss local industries (healthcare services, where geography and licensing bind)  ·  4. Groupings change over time, breaking prior-period comparability (the Real Estate sector was carved out of Financials).</a:t>
             </a:r>
             <a:endParaRPr lang="en-US" sz="1200" dirty="0"/>
           </a:p>
@@ -6746,7 +7011,7 @@
                 <a:ea typeface="Calibri" pitchFamily="34" charset="-122"/>
                 <a:cs typeface="Calibri" pitchFamily="34" charset="-120"/>
               </a:rPr>
-              <a:t>Source: CFA Institute, Curriculum Vol 5, Learning Module 6, §5 Case Study "US Retail (ex autos)", pp. 270–271.</a:t>
+              <a:t>Source: CFA Institute, Curriculum Vol 5, Learning Module 6, §5 Case Study "Porter's Five Forces for US Retail (ex autos)", pp. 270–271. Costco/Home Depot margins: presenter commentary.</a:t>
             </a:r>
             <a:endParaRPr lang="en-US" sz="750" dirty="0"/>
           </a:p>
@@ -6817,9 +7082,9 @@
             <a:tbl>
               <a:tblPr/>
               <a:tblGrid>
-                <a:gridCol w="2468880"/>
-                <a:gridCol w="1645920"/>
-                <a:gridCol w="4389120"/>
+                <a:gridCol w="2331720"/>
+                <a:gridCol w="1325880"/>
+                <a:gridCol w="4846320"/>
               </a:tblGrid>
               <a:tr h="274320">
                 <a:tc>
@@ -6889,7 +7154,7 @@
                           <a:ea typeface="Trebuchet MS" pitchFamily="34" charset="-122"/>
                           <a:cs typeface="Trebuchet MS" pitchFamily="34" charset="-120"/>
                         </a:rPr>
-                        <a:t>US Retail score</a:t>
+                        <a:t>Score</a:t>
                       </a:r>
                       <a:endParaRPr lang="en-US" sz="1100" dirty="0">
                         <a:latin typeface="Trebuchet MS" charset="0"/>
@@ -7091,7 +7356,7 @@
                           <a:ea typeface="Consolas" pitchFamily="34" charset="-122"/>
                           <a:cs typeface="Consolas" pitchFamily="34" charset="-120"/>
                         </a:rPr>
-                        <a:t>&gt;40,000 new retail firm formations per month in the US; minimal licensing and patents</a:t>
+                        <a:t>&gt;40,000 new US retail firm formations per month</a:t>
                       </a:r>
                       <a:endParaRPr lang="en-US" sz="1100" dirty="0">
                         <a:latin typeface="Consolas" charset="0"/>
@@ -7243,7 +7508,7 @@
                           <a:ea typeface="Consolas" pitchFamily="34" charset="-122"/>
                           <a:cs typeface="Consolas" pitchFamily="34" charset="-120"/>
                         </a:rPr>
-                        <a:t>Services (restaurants, travel) are only a partial substitute; most goods cannot be replaced by services</a:t>
+                        <a:t>Services replace some spending, but not most goods</a:t>
                       </a:r>
                       <a:endParaRPr lang="en-US" sz="1100" dirty="0">
                         <a:latin typeface="Consolas" charset="0"/>
@@ -7395,7 +7660,7 @@
                           <a:ea typeface="Consolas" pitchFamily="34" charset="-122"/>
                           <a:cs typeface="Consolas" pitchFamily="34" charset="-120"/>
                         </a:rPr>
-                        <a:t>Fragmented consumers, but internet comparison-shopping drives price sensitivity on identical SKUs</a:t>
+                        <a:t>Fragmented buyers, but the internet made SKUs comparable</a:t>
                       </a:r>
                       <a:endParaRPr lang="en-US" sz="1100" dirty="0">
                         <a:latin typeface="Consolas" charset="0"/>
@@ -7497,7 +7762,7 @@
                           <a:ea typeface="Consolas" pitchFamily="34" charset="-122"/>
                           <a:cs typeface="Consolas" pitchFamily="34" charset="-120"/>
                         </a:rPr>
-                        <a:t>LOW to MODERATE</a:t>
+                        <a:t>LOW–MODERATE</a:t>
                       </a:r>
                       <a:endParaRPr lang="en-US" sz="1100" dirty="0">
                         <a:latin typeface="Consolas" charset="0"/>
@@ -7547,7 +7812,7 @@
                           <a:ea typeface="Consolas" pitchFamily="34" charset="-122"/>
                           <a:cs typeface="Consolas" pitchFamily="34" charset="-120"/>
                         </a:rPr>
-                        <a:t>Many manufacturers; branded goods with sole sources (luxury) exert more power than commodities</a:t>
+                        <a:t>Many manufacturers; branded and luxury are the exception</a:t>
                       </a:r>
                       <a:endParaRPr lang="en-US" sz="1100" dirty="0">
                         <a:latin typeface="Consolas" charset="0"/>
@@ -7599,7 +7864,7 @@
                           <a:ea typeface="Calibri" pitchFamily="34" charset="-122"/>
                           <a:cs typeface="Calibri" pitchFamily="34" charset="-120"/>
                         </a:rPr>
-                        <a:t>Rivalry among existing competitors</a:t>
+                        <a:t>Rivalry among competitors</a:t>
                       </a:r>
                       <a:endParaRPr lang="en-US" sz="1100" dirty="0">
                         <a:latin typeface="Calibri" charset="0"/>
@@ -7699,7 +7964,7 @@
                           <a:ea typeface="Consolas" pitchFamily="34" charset="-122"/>
                           <a:cs typeface="Consolas" pitchFamily="34" charset="-120"/>
                         </a:rPr>
-                        <a:t>Many similarly-sized firms selling similar SKUs — price and promotion are the main weapons</a:t>
+                        <a:t>Many similar firms, similar SKUs — price is the weapon</a:t>
                       </a:r>
                       <a:endParaRPr lang="en-US" sz="1100" dirty="0">
                         <a:latin typeface="Consolas" charset="0"/>
@@ -7813,7 +8078,7 @@
                 <a:ea typeface="Trebuchet MS" pitchFamily="34" charset="-122"/>
                 <a:cs typeface="Trebuchet MS" pitchFamily="34" charset="-120"/>
               </a:rPr>
-              <a:t>VERDICT</a:t>
+              <a:t>VERDICT — THREE OF FIVE FORCES ARE HOSTILE</a:t>
             </a:r>
             <a:endParaRPr lang="en-US" sz="1100" dirty="0"/>
           </a:p>
@@ -7855,7 +8120,7 @@
                 <a:ea typeface="Calibri" pitchFamily="34" charset="-122"/>
                 <a:cs typeface="Calibri" pitchFamily="34" charset="-120"/>
               </a:rPr>
-              <a:t>Retail is a high-rivalry, high-entry industry with moderate customer power — the median operator earns thin operating margins (~3–5%). Scale, scope, and brand loyalty separate leaders (Costco, Home Depot ~14%) from the pack. Amazon disrupted retail not by changing the forces but by changing the fundamental cost of serving a customer.</a:t>
+              <a:t>Very high entry threat, high rivalry, moderate customer power — structurally, retail caps returns on invested capital for the median operator. The escape routes are scale, scope and brand, and they run in opposite directions: Costco clears a low-single-digit operating margin on volume plus membership fees; a category specialist like Home Depot runs a double-digit one. Same forces, two answers.</a:t>
             </a:r>
             <a:endParaRPr lang="en-US" sz="1200" dirty="0"/>
           </a:p>
@@ -8038,6 +8303,46 @@
         </p:nvSpPr>
         <p:spPr>
           <a:xfrm>
+            <a:off x="320040" y="4471416"/>
+            <a:ext cx="8503920" cy="192024"/>
+          </a:xfrm>
+          <a:prstGeom prst="rect">
+            <a:avLst/>
+          </a:prstGeom>
+          <a:noFill/>
+          <a:ln/>
+        </p:spPr>
+        <p:txBody>
+          <a:bodyPr wrap="square" lIns="254" tIns="254" rIns="254" bIns="254" rtlCol="0" anchor="t"/>
+          <a:lstStyle/>
+          <a:p>
+            <a:pPr indent="0" marL="0">
+              <a:buNone/>
+            </a:pPr>
+            <a:r>
+              <a:rPr lang="en-US" sz="1000" dirty="0">
+                <a:solidFill>
+                  <a:srgbClr val="6B7A8D"/>
+                </a:solidFill>
+                <a:latin typeface="Calibri" pitchFamily="34" charset="0"/>
+                <a:ea typeface="Calibri" pitchFamily="34" charset="-122"/>
+                <a:cs typeface="Calibri" pitchFamily="34" charset="-120"/>
+              </a:rPr>
+              <a:t>¹ Each label names one of the five forces; the phrase after it is the DRIVER that makes the force intense or benign there.
+</a:t>
+            </a:r>
+            <a:endParaRPr lang="en-US" sz="1000" dirty="0"/>
+          </a:p>
+        </p:txBody>
+      </p:sp>
+      <p:sp>
+        <p:nvSpPr>
+          <p:cNvPr id="8" name="Text 6"/>
+          <p:cNvSpPr txBox="1"/>
+          <p:nvPr/>
+        </p:nvSpPr>
+        <p:spPr>
+          <a:xfrm>
             <a:off x="320040" y="4663440"/>
             <a:ext cx="8503920" cy="201168"/>
           </a:xfrm>
@@ -8066,7 +8371,7 @@
                 <a:ea typeface="Calibri" pitchFamily="34" charset="-122"/>
                 <a:cs typeface="Calibri" pitchFamily="34" charset="-120"/>
               </a:rPr>
-              <a:t>Source: CFA Institute, Curriculum Vol 5, Learning Module 6, §5 "Industry Structure", pp. 265–271.</a:t>
+              <a:t>Source: CFA Institute, Curriculum Vol 5, Learning Module 6, §5 "Industry Structure", checklist and ranking guidance, pp. 265–270.</a:t>
             </a:r>
             <a:endParaRPr lang="en-US" sz="750" dirty="0"/>
           </a:p>
@@ -8074,7 +8379,7 @@
       </p:sp>
       <p:sp>
         <p:nvSpPr>
-          <p:cNvPr id="8" name="Text 6"/>
+          <p:cNvPr id="9" name="Text 7"/>
           <p:cNvSpPr txBox="1"/>
           <p:nvPr/>
         </p:nvSpPr>
@@ -8108,7 +8413,7 @@
                 <a:ea typeface="Calibri" pitchFamily="34" charset="-122"/>
                 <a:cs typeface="Calibri" pitchFamily="34" charset="-120"/>
               </a:rPr>
-              <a:t>"What happens if company X raises prices by 10% tomorrow?" If customers switch easily or substitutes exist, buyer power and substitutes are the forces to watch.</a:t>
+              <a:t>"What would happen if company X raised prices by 10% tomorrow?" If a large share of customers would switch, buyer power and substitutes are the forces to watch.</a:t>
             </a:r>
             <a:endParaRPr lang="en-US" sz="1300" dirty="0"/>
           </a:p>
@@ -8116,7 +8421,7 @@
       </p:sp>
       <p:sp>
         <p:nvSpPr>
-          <p:cNvPr id="9" name="Shape 7"/>
+          <p:cNvPr id="10" name="Shape 8"/>
           <p:cNvSpPr/>
           <p:nvPr/>
         </p:nvSpPr>
@@ -8136,7 +8441,7 @@
       </p:sp>
       <p:sp>
         <p:nvSpPr>
-          <p:cNvPr id="10" name="Shape 8"/>
+          <p:cNvPr id="11" name="Shape 9"/>
           <p:cNvSpPr/>
           <p:nvPr/>
         </p:nvSpPr>
@@ -8156,7 +8461,7 @@
       </p:sp>
       <p:sp>
         <p:nvSpPr>
-          <p:cNvPr id="11" name="Text 9"/>
+          <p:cNvPr id="12" name="Text 10"/>
           <p:cNvSpPr txBox="1"/>
           <p:nvPr/>
         </p:nvSpPr>
@@ -8198,7 +8503,7 @@
       </p:sp>
       <p:sp>
         <p:nvSpPr>
-          <p:cNvPr id="12" name="Text 10"/>
+          <p:cNvPr id="13" name="Text 11"/>
           <p:cNvSpPr txBox="1"/>
           <p:nvPr/>
         </p:nvSpPr>
@@ -8232,7 +8537,7 @@
                 <a:ea typeface="Trebuchet MS" pitchFamily="34" charset="-122"/>
                 <a:cs typeface="Trebuchet MS" pitchFamily="34" charset="-120"/>
               </a:rPr>
-              <a:t>Dominant force: Supplier power</a:t>
+              <a:t>Dominant: New entrants — LOW</a:t>
             </a:r>
             <a:endParaRPr lang="en-US" sz="1000" dirty="0"/>
           </a:p>
@@ -8240,7 +8545,7 @@
       </p:sp>
       <p:sp>
         <p:nvSpPr>
-          <p:cNvPr id="13" name="Text 11"/>
+          <p:cNvPr id="14" name="Text 12"/>
           <p:cNvSpPr txBox="1"/>
           <p:nvPr/>
         </p:nvSpPr>
@@ -8274,7 +8579,7 @@
                 <a:ea typeface="Calibri" pitchFamily="34" charset="-122"/>
                 <a:cs typeface="Calibri" pitchFamily="34" charset="-120"/>
               </a:rPr>
-              <a:t>Concentrated bottler-distributor networks with exclusive shelf arrangements; few substitutes for brand equity. Coke and Pepsi extract the rents.</a:t>
+              <a:t>Incumbents hold shelf-space arrangements with retailers, own distribution, and lock up on-trade accounts. A new brand cannot reach the customer.</a:t>
             </a:r>
             <a:endParaRPr lang="en-US" sz="1100" dirty="0"/>
           </a:p>
@@ -8282,7 +8587,7 @@
       </p:sp>
       <p:sp>
         <p:nvSpPr>
-          <p:cNvPr id="14" name="Shape 12"/>
+          <p:cNvPr id="15" name="Shape 13"/>
           <p:cNvSpPr/>
           <p:nvPr/>
         </p:nvSpPr>
@@ -8302,7 +8607,7 @@
       </p:sp>
       <p:sp>
         <p:nvSpPr>
-          <p:cNvPr id="15" name="Shape 13"/>
+          <p:cNvPr id="16" name="Shape 14"/>
           <p:cNvSpPr/>
           <p:nvPr/>
         </p:nvSpPr>
@@ -8322,7 +8627,7 @@
       </p:sp>
       <p:sp>
         <p:nvSpPr>
-          <p:cNvPr id="16" name="Text 14"/>
+          <p:cNvPr id="17" name="Text 15"/>
           <p:cNvSpPr txBox="1"/>
           <p:nvPr/>
         </p:nvSpPr>
@@ -8364,7 +8669,7 @@
       </p:sp>
       <p:sp>
         <p:nvSpPr>
-          <p:cNvPr id="17" name="Text 15"/>
+          <p:cNvPr id="18" name="Text 16"/>
           <p:cNvSpPr txBox="1"/>
           <p:nvPr/>
         </p:nvSpPr>
@@ -8398,7 +8703,7 @@
                 <a:ea typeface="Trebuchet MS" pitchFamily="34" charset="-122"/>
                 <a:cs typeface="Trebuchet MS" pitchFamily="34" charset="-120"/>
               </a:rPr>
-              <a:t>Dominant force: Scale barriers</a:t>
+              <a:t>Dominant: New entrants — LOW</a:t>
             </a:r>
             <a:endParaRPr lang="en-US" sz="1000" dirty="0"/>
           </a:p>
@@ -8406,7 +8711,7 @@
       </p:sp>
       <p:sp>
         <p:nvSpPr>
-          <p:cNvPr id="18" name="Text 16"/>
+          <p:cNvPr id="19" name="Text 17"/>
           <p:cNvSpPr txBox="1"/>
           <p:nvPr/>
         </p:nvSpPr>
@@ -8440,7 +8745,7 @@
                 <a:ea typeface="Calibri" pitchFamily="34" charset="-122"/>
                 <a:cs typeface="Calibri" pitchFamily="34" charset="-120"/>
               </a:rPr>
-              <a:t>Massive fixed costs (server fleets, networks) and economies of scope with adjacent businesses deter new entrants. AWS / Azure / GCP lock in long-run margin.</a:t>
+              <a:t>Enormous fixed assets in servers and networking, near-zero variable cost, and economies of scope with adjacent businesses. Incumbents cut unit prices as they scale.</a:t>
             </a:r>
             <a:endParaRPr lang="en-US" sz="1100" dirty="0"/>
           </a:p>
@@ -8448,7 +8753,7 @@
       </p:sp>
       <p:sp>
         <p:nvSpPr>
-          <p:cNvPr id="19" name="Shape 17"/>
+          <p:cNvPr id="20" name="Shape 18"/>
           <p:cNvSpPr/>
           <p:nvPr/>
         </p:nvSpPr>
@@ -8468,7 +8773,7 @@
       </p:sp>
       <p:sp>
         <p:nvSpPr>
-          <p:cNvPr id="20" name="Shape 18"/>
+          <p:cNvPr id="21" name="Shape 19"/>
           <p:cNvSpPr/>
           <p:nvPr/>
         </p:nvSpPr>
@@ -8488,7 +8793,7 @@
       </p:sp>
       <p:sp>
         <p:nvSpPr>
-          <p:cNvPr id="21" name="Text 19"/>
+          <p:cNvPr id="22" name="Text 20"/>
           <p:cNvSpPr txBox="1"/>
           <p:nvPr/>
         </p:nvSpPr>
@@ -8530,7 +8835,7 @@
       </p:sp>
       <p:sp>
         <p:nvSpPr>
-          <p:cNvPr id="22" name="Text 20"/>
+          <p:cNvPr id="23" name="Text 21"/>
           <p:cNvSpPr txBox="1"/>
           <p:nvPr/>
         </p:nvSpPr>
@@ -8564,7 +8869,7 @@
                 <a:ea typeface="Trebuchet MS" pitchFamily="34" charset="-122"/>
                 <a:cs typeface="Trebuchet MS" pitchFamily="34" charset="-120"/>
               </a:rPr>
-              <a:t>Dominant force: Rivalry</a:t>
+              <a:t>Dominant: Rivalry — VERY HIGH</a:t>
             </a:r>
             <a:endParaRPr lang="en-US" sz="1000" dirty="0"/>
           </a:p>
@@ -8572,7 +8877,7 @@
       </p:sp>
       <p:sp>
         <p:nvSpPr>
-          <p:cNvPr id="23" name="Text 21"/>
+          <p:cNvPr id="24" name="Text 22"/>
           <p:cNvSpPr txBox="1"/>
           <p:nvPr/>
         </p:nvSpPr>
@@ -8606,7 +8911,7 @@
                 <a:ea typeface="Calibri" pitchFamily="34" charset="-122"/>
                 <a:cs typeface="Calibri" pitchFamily="34" charset="-120"/>
               </a:rPr>
-              <a:t>Chemically-equivalent products approved by regulators; pharmacies indifferent between suppliers. Price competition collapses margins to near marginal cost.</a:t>
+              <a:t>Regulators certify chemical equivalence, so pharmacies are indifferent. One generic competitor vs nine moves price by roughly 6× (Dave et al., 2017).</a:t>
             </a:r>
             <a:endParaRPr lang="en-US" sz="1100" dirty="0"/>
           </a:p>
@@ -8614,7 +8919,7 @@
       </p:sp>
       <p:sp>
         <p:nvSpPr>
-          <p:cNvPr id="24" name="Shape 22"/>
+          <p:cNvPr id="25" name="Shape 23"/>
           <p:cNvSpPr/>
           <p:nvPr/>
         </p:nvSpPr>
@@ -8634,7 +8939,7 @@
       </p:sp>
       <p:sp>
         <p:nvSpPr>
-          <p:cNvPr id="25" name="Shape 23"/>
+          <p:cNvPr id="26" name="Shape 24"/>
           <p:cNvSpPr/>
           <p:nvPr/>
         </p:nvSpPr>
@@ -8654,7 +8959,7 @@
       </p:sp>
       <p:sp>
         <p:nvSpPr>
-          <p:cNvPr id="26" name="Text 24"/>
+          <p:cNvPr id="27" name="Text 25"/>
           <p:cNvSpPr txBox="1"/>
           <p:nvPr/>
         </p:nvSpPr>
@@ -8688,7 +8993,7 @@
                 <a:ea typeface="Trebuchet MS" pitchFamily="34" charset="-122"/>
                 <a:cs typeface="Trebuchet MS" pitchFamily="34" charset="-120"/>
               </a:rPr>
-              <a:t>RETAIL BANKS (USA)</a:t>
+              <a:t>US COMMERCIAL BANKS</a:t>
             </a:r>
             <a:endParaRPr lang="en-US" sz="1000" dirty="0"/>
           </a:p>
@@ -8696,7 +9001,7 @@
       </p:sp>
       <p:sp>
         <p:nvSpPr>
-          <p:cNvPr id="27" name="Text 25"/>
+          <p:cNvPr id="28" name="Text 26"/>
           <p:cNvSpPr txBox="1"/>
           <p:nvPr/>
         </p:nvSpPr>
@@ -8730,7 +9035,7 @@
                 <a:ea typeface="Trebuchet MS" pitchFamily="34" charset="-122"/>
                 <a:cs typeface="Trebuchet MS" pitchFamily="34" charset="-120"/>
               </a:rPr>
-              <a:t>Dominant force: Entry barriers</a:t>
+              <a:t>Dominant: New entrants — VERY LOW</a:t>
             </a:r>
             <a:endParaRPr lang="en-US" sz="1000" dirty="0"/>
           </a:p>
@@ -8738,7 +9043,7 @@
       </p:sp>
       <p:sp>
         <p:nvSpPr>
-          <p:cNvPr id="28" name="Text 26"/>
+          <p:cNvPr id="29" name="Text 27"/>
           <p:cNvSpPr txBox="1"/>
           <p:nvPr/>
         </p:nvSpPr>
@@ -8772,7 +9077,7 @@
                 <a:ea typeface="Calibri" pitchFamily="34" charset="-122"/>
                 <a:cs typeface="Calibri" pitchFamily="34" charset="-120"/>
               </a:rPr>
-              <a:t>&lt;3 new commercial bank charters issued per year 2010–2021. Regulatory capital, deposit insurance, and licensing make de novo entry almost impossible.</a:t>
+              <a:t>Fewer than three new commercial bank charters per year over 2010–2021. Regulatory capital, deposit insurance and licensing make de novo entry near-impossible.</a:t>
             </a:r>
             <a:endParaRPr lang="en-US" sz="1100" dirty="0"/>
           </a:p>
@@ -8780,7 +9085,7 @@
       </p:sp>
       <p:sp>
         <p:nvSpPr>
-          <p:cNvPr id="29" name="Shape 27"/>
+          <p:cNvPr id="30" name="Shape 28"/>
           <p:cNvSpPr/>
           <p:nvPr/>
         </p:nvSpPr>
@@ -8800,7 +9105,7 @@
       </p:sp>
       <p:sp>
         <p:nvSpPr>
-          <p:cNvPr id="30" name="Shape 28"/>
+          <p:cNvPr id="31" name="Shape 29"/>
           <p:cNvSpPr/>
           <p:nvPr/>
         </p:nvSpPr>
@@ -8820,7 +9125,7 @@
       </p:sp>
       <p:sp>
         <p:nvSpPr>
-          <p:cNvPr id="31" name="Text 29"/>
+          <p:cNvPr id="32" name="Text 30"/>
           <p:cNvSpPr txBox="1"/>
           <p:nvPr/>
         </p:nvSpPr>
@@ -8862,7 +9167,7 @@
       </p:sp>
       <p:sp>
         <p:nvSpPr>
-          <p:cNvPr id="32" name="Text 30"/>
+          <p:cNvPr id="33" name="Text 31"/>
           <p:cNvSpPr txBox="1"/>
           <p:nvPr/>
         </p:nvSpPr>
@@ -8896,7 +9201,7 @@
                 <a:ea typeface="Trebuchet MS" pitchFamily="34" charset="-122"/>
                 <a:cs typeface="Trebuchet MS" pitchFamily="34" charset="-120"/>
               </a:rPr>
-              <a:t>Dominant force: Rivalry</a:t>
+              <a:t>Dominant: Rivalry — HIGH</a:t>
             </a:r>
             <a:endParaRPr lang="en-US" sz="1000" dirty="0"/>
           </a:p>
@@ -8904,7 +9209,7 @@
       </p:sp>
       <p:sp>
         <p:nvSpPr>
-          <p:cNvPr id="33" name="Text 31"/>
+          <p:cNvPr id="34" name="Text 32"/>
           <p:cNvSpPr txBox="1"/>
           <p:nvPr/>
         </p:nvSpPr>
@@ -8938,7 +9243,7 @@
                 <a:ea typeface="Calibri" pitchFamily="34" charset="-122"/>
                 <a:cs typeface="Calibri" pitchFamily="34" charset="-120"/>
               </a:rPr>
-              <a:t>Duopoly (Airbus, Boeing) but fierce price / financing competition per sale. High exit barriers (specialized assets) keep weak players in.</a:t>
+              <a:t>A duopoly, yet every other force is benign and they still fight on price, financing and warranty terms per sale. Specialised assets make exit costly.</a:t>
             </a:r>
             <a:endParaRPr lang="en-US" sz="1100" dirty="0"/>
           </a:p>
@@ -8946,7 +9251,7 @@
       </p:sp>
       <p:sp>
         <p:nvSpPr>
-          <p:cNvPr id="34" name="Shape 32"/>
+          <p:cNvPr id="35" name="Shape 33"/>
           <p:cNvSpPr/>
           <p:nvPr/>
         </p:nvSpPr>
@@ -8966,7 +9271,7 @@
       </p:sp>
       <p:sp>
         <p:nvSpPr>
-          <p:cNvPr id="35" name="Shape 33"/>
+          <p:cNvPr id="36" name="Shape 34"/>
           <p:cNvSpPr/>
           <p:nvPr/>
         </p:nvSpPr>
@@ -8986,7 +9291,7 @@
       </p:sp>
       <p:sp>
         <p:nvSpPr>
-          <p:cNvPr id="36" name="Text 34"/>
+          <p:cNvPr id="37" name="Text 35"/>
           <p:cNvSpPr txBox="1"/>
           <p:nvPr/>
         </p:nvSpPr>
@@ -9020,7 +9325,7 @@
                 <a:ea typeface="Trebuchet MS" pitchFamily="34" charset="-122"/>
                 <a:cs typeface="Trebuchet MS" pitchFamily="34" charset="-120"/>
               </a:rPr>
-              <a:t>BUSINESS SOFTWARE (ERP)</a:t>
+              <a:t>ENTERPRISE SOFTWARE</a:t>
             </a:r>
             <a:endParaRPr lang="en-US" sz="1000" dirty="0"/>
           </a:p>
@@ -9028,7 +9333,7 @@
       </p:sp>
       <p:sp>
         <p:nvSpPr>
-          <p:cNvPr id="37" name="Text 35"/>
+          <p:cNvPr id="38" name="Text 36"/>
           <p:cNvSpPr txBox="1"/>
           <p:nvPr/>
         </p:nvSpPr>
@@ -9062,7 +9367,7 @@
                 <a:ea typeface="Trebuchet MS" pitchFamily="34" charset="-122"/>
                 <a:cs typeface="Trebuchet MS" pitchFamily="34" charset="-120"/>
               </a:rPr>
-              <a:t>Dominant force: Switching costs</a:t>
+              <a:t>Dominant: Buyer power — LOW</a:t>
             </a:r>
             <a:endParaRPr lang="en-US" sz="1000" dirty="0"/>
           </a:p>
@@ -9070,7 +9375,7 @@
       </p:sp>
       <p:sp>
         <p:nvSpPr>
-          <p:cNvPr id="38" name="Text 36"/>
+          <p:cNvPr id="39" name="Text 37"/>
           <p:cNvSpPr txBox="1"/>
           <p:nvPr/>
         </p:nvSpPr>
@@ -9104,7 +9409,7 @@
                 <a:ea typeface="Calibri" pitchFamily="34" charset="-122"/>
                 <a:cs typeface="Calibri" pitchFamily="34" charset="-120"/>
               </a:rPr>
-              <a:t>SAP / Oracle require years to implement and integrate with mission-critical systems. Customers are effectively locked in — incumbents price accordingly.</a:t>
+              <a:t>SAP-class implementations take years and wire into mission-critical systems. Switching costs neutralise the buyer; incumbents price accordingly.</a:t>
             </a:r>
             <a:endParaRPr lang="en-US" sz="1100" dirty="0"/>
           </a:p>
@@ -9315,7 +9620,7 @@
                 <a:ea typeface="Calibri" pitchFamily="34" charset="-122"/>
                 <a:cs typeface="Calibri" pitchFamily="34" charset="-120"/>
               </a:rPr>
-              <a:t>Source: CFA Institute, Curriculum Vol 5, Learning Module 6, §5 "External Influences", pp. 271–276.</a:t>
+              <a:t>Source: CFA Institute, Curriculum Vol 5, Learning Module 6, §5 "External Influences on Industry Growth", pp. 271–274; beauty example from LM 6 self-assessment Q7, p. 248.</a:t>
             </a:r>
             <a:endParaRPr lang="en-US" sz="750" dirty="0"/>
           </a:p>
@@ -9357,7 +9662,7 @@
                 <a:ea typeface="Calibri" pitchFamily="34" charset="-122"/>
                 <a:cs typeface="Calibri" pitchFamily="34" charset="-120"/>
               </a:rPr>
-              <a:t>Porter asks "how attractive is the industry?". PESTLE asks "what outside the industry is about to change?". Use both.</a:t>
+              <a:t>Porter asks "how attractive is this industry?". PESTLE asks "what outside it is about to change?". Porter drives profitability; PESTLE drives growth and share.</a:t>
             </a:r>
             <a:endParaRPr lang="en-US" sz="1300" dirty="0"/>
           </a:p>
@@ -9386,9 +9691,9 @@
             <a:tbl>
               <a:tblPr/>
               <a:tblGrid>
-                <a:gridCol w="1371600"/>
-                <a:gridCol w="4023360"/>
-                <a:gridCol w="3108960"/>
+                <a:gridCol w="1417320"/>
+                <a:gridCol w="3246120"/>
+                <a:gridCol w="3840480"/>
               </a:tblGrid>
               <a:tr h="274320">
                 <a:tc>
@@ -9610,7 +9915,7 @@
                           <a:ea typeface="Consolas" pitchFamily="34" charset="-122"/>
                           <a:cs typeface="Consolas" pitchFamily="34" charset="-120"/>
                         </a:rPr>
-                        <a:t>Tax, regulation, geopolitical, trade, subsidies</a:t>
+                        <a:t>Policy, regulation, geopolitics</a:t>
                       </a:r>
                       <a:endParaRPr lang="en-US" sz="1100" dirty="0">
                         <a:latin typeface="Consolas" charset="0"/>
@@ -9660,7 +9965,7 @@
                           <a:ea typeface="Consolas" pitchFamily="34" charset="-122"/>
                           <a:cs typeface="Consolas" pitchFamily="34" charset="-120"/>
                         </a:rPr>
-                        <a:t>Proposed packaging-tax on plastic containers</a:t>
+                        <a:t>Excise tax debated on plastic packaging</a:t>
                       </a:r>
                       <a:endParaRPr lang="en-US" sz="1100" dirty="0">
                         <a:latin typeface="Consolas" charset="0"/>
@@ -9812,7 +10117,7 @@
                           <a:ea typeface="Consolas" pitchFamily="34" charset="-122"/>
                           <a:cs typeface="Consolas" pitchFamily="34" charset="-120"/>
                         </a:rPr>
-                        <a:t>Emerging-market income growth expands premium-SKU demand</a:t>
+                        <a:t>EM income growth lifts premium demand</a:t>
                       </a:r>
                       <a:endParaRPr lang="en-US" sz="1100" dirty="0">
                         <a:latin typeface="Consolas" charset="0"/>
@@ -9914,7 +10219,7 @@
                           <a:ea typeface="Consolas" pitchFamily="34" charset="-122"/>
                           <a:cs typeface="Consolas" pitchFamily="34" charset="-120"/>
                         </a:rPr>
-                        <a:t>Demographics, culture, lifestyle, consumer tastes</a:t>
+                        <a:t>Demographics, culture, lifestyles</a:t>
                       </a:r>
                       <a:endParaRPr lang="en-US" sz="1100" dirty="0">
                         <a:latin typeface="Consolas" charset="0"/>
@@ -9964,7 +10269,7 @@
                           <a:ea typeface="Consolas" pitchFamily="34" charset="-122"/>
                           <a:cs typeface="Consolas" pitchFamily="34" charset="-120"/>
                         </a:rPr>
-                        <a:t>Selfie &amp; social-media culture lifts premium-skincare demand</a:t>
+                        <a:t>Phone cameras and social media lift demand</a:t>
                       </a:r>
                       <a:endParaRPr lang="en-US" sz="1100" dirty="0">
                         <a:latin typeface="Consolas" charset="0"/>
@@ -10066,7 +10371,7 @@
                           <a:ea typeface="Consolas" pitchFamily="34" charset="-122"/>
                           <a:cs typeface="Consolas" pitchFamily="34" charset="-120"/>
                         </a:rPr>
-                        <a:t>Innovation (sustaining vs disruptive)</a:t>
+                        <a:t>Sustaining vs disruptive innovation</a:t>
                       </a:r>
                       <a:endParaRPr lang="en-US" sz="1100" dirty="0">
                         <a:latin typeface="Consolas" charset="0"/>
@@ -10116,7 +10421,7 @@
                           <a:ea typeface="Consolas" pitchFamily="34" charset="-122"/>
                           <a:cs typeface="Consolas" pitchFamily="34" charset="-120"/>
                         </a:rPr>
-                        <a:t>AR "try-on" filters shift customer discovery to online</a:t>
+                        <a:t>Influencer video: an efficient new channel</a:t>
                       </a:r>
                       <a:endParaRPr lang="en-US" sz="1100" dirty="0">
                         <a:latin typeface="Consolas" charset="0"/>
@@ -10218,7 +10523,7 @@
                           <a:ea typeface="Consolas" pitchFamily="34" charset="-122"/>
                           <a:cs typeface="Consolas" pitchFamily="34" charset="-120"/>
                         </a:rPr>
-                        <a:t>Contract, competition, IP, labor laws</a:t>
+                        <a:t>Court and policymaker rule changes</a:t>
                       </a:r>
                       <a:endParaRPr lang="en-US" sz="1100" dirty="0">
                         <a:latin typeface="Consolas" charset="0"/>
@@ -10268,7 +10573,7 @@
                           <a:ea typeface="Consolas" pitchFamily="34" charset="-122"/>
                           <a:cs typeface="Consolas" pitchFamily="34" charset="-120"/>
                         </a:rPr>
-                        <a:t>Trademark enforcement on counterfeit cosmetics in cross-border e-commerce</a:t>
+                        <a:t>Counterfeit and trademark enforcement</a:t>
                       </a:r>
                       <a:endParaRPr lang="en-US" sz="1100" dirty="0">
                         <a:latin typeface="Consolas" charset="0"/>
@@ -10370,7 +10675,7 @@
                           <a:ea typeface="Consolas" pitchFamily="34" charset="-122"/>
                           <a:cs typeface="Consolas" pitchFamily="34" charset="-120"/>
                         </a:rPr>
-                        <a:t>Climate, resources, waste, carbon transition</a:t>
+                        <a:t>Carbon transition, waste, land use</a:t>
                       </a:r>
                       <a:endParaRPr lang="en-US" sz="1100" dirty="0">
                         <a:latin typeface="Consolas" charset="0"/>
@@ -10420,7 +10725,7 @@
                           <a:ea typeface="Consolas" pitchFamily="34" charset="-122"/>
                           <a:cs typeface="Consolas" pitchFamily="34" charset="-120"/>
                         </a:rPr>
-                        <a:t>Sustainable-packaging commitments and supply-chain audits</a:t>
+                        <a:t>Sustainable-packaging commitments</a:t>
                       </a:r>
                       <a:endParaRPr lang="en-US" sz="1100" dirty="0">
                         <a:latin typeface="Consolas" charset="0"/>
@@ -10534,7 +10839,7 @@
                 <a:ea typeface="Trebuchet MS" pitchFamily="34" charset="-122"/>
                 <a:cs typeface="Trebuchet MS" pitchFamily="34" charset="-120"/>
               </a:rPr>
-              <a:t>POLITICAL, NOT COMPETITIVE</a:t>
+              <a:t>THE EXAM QUESTION: PESTLE OR PORTER?</a:t>
             </a:r>
             <a:endParaRPr lang="en-US" sz="1100" dirty="0"/>
           </a:p>
@@ -10576,7 +10881,7 @@
                 <a:ea typeface="Calibri" pitchFamily="34" charset="-122"/>
                 <a:cs typeface="Calibri" pitchFamily="34" charset="-120"/>
               </a:rPr>
-              <a:t>A legislature debating a plastic-packaging tax is a PESTLE signal — political. A competitor launching AR filters is a COMPETITIVE move — Porter. Different frameworks, different responses.</a:t>
+              <a:t>A legislature debating a packaging tax is PESTLE — external, political. A rival launching AR "try-on" filters is NOT PESTLE: it is a competitor move inside the industry, so it is Porter. Test: is the actor inside the industry or outside it?</a:t>
             </a:r>
             <a:endParaRPr lang="en-US" sz="1200" dirty="0"/>
           </a:p>
@@ -10784,7 +11089,7 @@
                 <a:ea typeface="Calibri" pitchFamily="34" charset="-122"/>
                 <a:cs typeface="Calibri" pitchFamily="34" charset="-120"/>
               </a:rPr>
-              <a:t>¹ "Stuck in the middle" — neither a cost leader, nor differentiated, nor focused — is the worst competitive position; rare to sustain economic profits.
+              <a:t>¹ "Stuck in the middle" — not a cost leader, not differentiated, not focused — is the worst place to be. Effectiveness is only ever judged in hindsight.
 </a:t>
             </a:r>
             <a:endParaRPr lang="en-US" sz="1000" dirty="0"/>
@@ -10827,7 +11132,7 @@
                 <a:ea typeface="Calibri" pitchFamily="34" charset="-122"/>
                 <a:cs typeface="Calibri" pitchFamily="34" charset="-120"/>
               </a:rPr>
-              <a:t>Source: CFA Institute, Curriculum Vol 5, Learning Module 6, §6 "Competitive Positioning", pp. 276–285. Porter (1980).</a:t>
+              <a:t>Source: CFA Institute, Curriculum Vol 5, Learning Module 6, §6 "Competitive Positioning", Exhibit 6, pp. 276–279. Porter (1980).</a:t>
             </a:r>
             <a:endParaRPr lang="en-US" sz="750" dirty="0"/>
           </a:p>
@@ -11322,7 +11627,7 @@
                 <a:ea typeface="Calibri" pitchFamily="34" charset="-122"/>
                 <a:cs typeface="Calibri" pitchFamily="34" charset="-120"/>
               </a:rPr>
-              <a:t>• Brand and advertising</a:t>
+              <a:t>• Brand, advertising, proprietary channels</a:t>
             </a:r>
             <a:endParaRPr lang="en-US" sz="1100" dirty="0"/>
           </a:p>
@@ -11339,7 +11644,7 @@
                 <a:ea typeface="Calibri" pitchFamily="34" charset="-122"/>
                 <a:cs typeface="Calibri" pitchFamily="34" charset="-120"/>
               </a:rPr>
-              <a:t>• Proprietary channels</a:t>
+              <a:t>• Trademarks, patents, copyright</a:t>
             </a:r>
             <a:endParaRPr lang="en-US" sz="1100" dirty="0"/>
           </a:p>
@@ -11356,7 +11661,7 @@
                 <a:ea typeface="Calibri" pitchFamily="34" charset="-122"/>
                 <a:cs typeface="Calibri" pitchFamily="34" charset="-120"/>
               </a:rPr>
-              <a:t>• Trademarks, patents, copyright</a:t>
+              <a:t>• Superior quality / unique features</a:t>
             </a:r>
             <a:endParaRPr lang="en-US" sz="1100" dirty="0"/>
           </a:p>
@@ -11373,7 +11678,7 @@
                 <a:ea typeface="Calibri" pitchFamily="34" charset="-122"/>
                 <a:cs typeface="Calibri" pitchFamily="34" charset="-120"/>
               </a:rPr>
-              <a:t>• Superior quality / features</a:t>
+              <a:t>• Culture of customer experience</a:t>
             </a:r>
             <a:endParaRPr lang="en-US" sz="1100" dirty="0"/>
           </a:p>
@@ -11390,7 +11695,7 @@
                 <a:ea typeface="Calibri" pitchFamily="34" charset="-122"/>
                 <a:cs typeface="Calibri" pitchFamily="34" charset="-120"/>
               </a:rPr>
-              <a:t>• Customer-experience culture</a:t>
+              <a:t>• Integration of hardware, software, service</a:t>
             </a:r>
             <a:endParaRPr lang="en-US" sz="1100" dirty="0"/>
           </a:p>
@@ -11447,7 +11752,7 @@
                 <a:ea typeface="Calibri" pitchFamily="34" charset="-122"/>
                 <a:cs typeface="Calibri" pitchFamily="34" charset="-120"/>
               </a:rPr>
-              <a:t>Apple · LVMH · Ferrari · Rolex · Nike · Disney</a:t>
+              <a:t>Apple · LVMH · Rolex · Nike · Disney</a:t>
             </a:r>
             <a:endParaRPr lang="en-US" sz="1100" dirty="0"/>
           </a:p>
@@ -11571,7 +11876,7 @@
                 <a:ea typeface="Calibri" pitchFamily="34" charset="-122"/>
                 <a:cs typeface="Calibri" pitchFamily="34" charset="-120"/>
               </a:rPr>
-              <a:t>Narrow segment served exceptionally.</a:t>
+              <a:t>One narrow segment, served exceptionally.</a:t>
             </a:r>
             <a:endParaRPr lang="en-US" sz="1100" dirty="0"/>
           </a:p>
@@ -11611,7 +11916,7 @@
                 <a:ea typeface="Calibri" pitchFamily="34" charset="-122"/>
                 <a:cs typeface="Calibri" pitchFamily="34" charset="-120"/>
               </a:rPr>
-              <a:t>• Proximity to a specific customer</a:t>
+              <a:t>• Proximity to a specific customer group</a:t>
             </a:r>
             <a:endParaRPr lang="en-US" sz="1100" dirty="0"/>
           </a:p>
@@ -11645,7 +11950,7 @@
                 <a:ea typeface="Calibri" pitchFamily="34" charset="-122"/>
                 <a:cs typeface="Calibri" pitchFamily="34" charset="-120"/>
               </a:rPr>
-              <a:t>• May combine cost OR differentiation within that niche</a:t>
+              <a:t>• May borrow from cost leadership OR differentiation — but only inside that niche</a:t>
             </a:r>
             <a:endParaRPr lang="en-US" sz="1100" dirty="0"/>
           </a:p>
@@ -11685,7 +11990,7 @@
                 <a:ea typeface="Calibri" pitchFamily="34" charset="-122"/>
                 <a:cs typeface="Calibri" pitchFamily="34" charset="-120"/>
               </a:rPr>
-              <a:t>Ferrari (luxury auto) · Edward Jones (rural US brokerage) · Hermès (ultra-luxury leather) · Ducati (sport motorcycles)</a:t>
+              <a:t>Ferrari (luxury auto) · Edward Jones (small-town US brokerage) · Ducati (sport motorcycles)</a:t>
             </a:r>
             <a:endParaRPr lang="en-US" sz="1100" dirty="0"/>
           </a:p>
@@ -12096,6 +12401,46 @@
         </p:nvSpPr>
         <p:spPr>
           <a:xfrm>
+            <a:off x="320040" y="4471416"/>
+            <a:ext cx="8503920" cy="192024"/>
+          </a:xfrm>
+          <a:prstGeom prst="rect">
+            <a:avLst/>
+          </a:prstGeom>
+          <a:noFill/>
+          <a:ln/>
+        </p:spPr>
+        <p:txBody>
+          <a:bodyPr wrap="square" lIns="254" tIns="254" rIns="254" bIns="254" rtlCol="0" anchor="t"/>
+          <a:lstStyle/>
+          <a:p>
+            <a:pPr indent="0" marL="0">
+              <a:buNone/>
+            </a:pPr>
+            <a:r>
+              <a:rPr lang="en-US" sz="1000" dirty="0">
+                <a:solidFill>
+                  <a:srgbClr val="6B7A8D"/>
+                </a:solidFill>
+                <a:latin typeface="Calibri" pitchFamily="34" charset="0"/>
+                <a:ea typeface="Calibri" pitchFamily="34" charset="-122"/>
+                <a:cs typeface="Calibri" pitchFamily="34" charset="-120"/>
+              </a:rPr>
+              <a:t>¹ Ciconte et al. (2013): the UPPER bound of a guidance range often represents management's true expectation, padded with a beatable lower bound.
+</a:t>
+            </a:r>
+            <a:endParaRPr lang="en-US" sz="1000" dirty="0"/>
+          </a:p>
+        </p:txBody>
+      </p:sp>
+      <p:sp>
+        <p:nvSpPr>
+          <p:cNvPr id="8" name="Text 6"/>
+          <p:cNvSpPr txBox="1"/>
+          <p:nvPr/>
+        </p:nvSpPr>
+        <p:spPr>
+          <a:xfrm>
             <a:off x="320040" y="4663440"/>
             <a:ext cx="8503920" cy="201168"/>
           </a:xfrm>
@@ -12124,7 +12469,7 @@
                 <a:ea typeface="Calibri" pitchFamily="34" charset="-122"/>
                 <a:cs typeface="Calibri" pitchFamily="34" charset="-120"/>
               </a:rPr>
-              <a:t>Source: CFA Institute, Curriculum Vol 5, Learning Module 7, §2 "Forecast Objects, Principles, Approaches", pp. 288–295.</a:t>
+              <a:t>Source: CFA Institute, Curriculum Vol 5, Learning Module 7, §2 "Forecast Objects, Principles, and Approaches", Exhibit 1, pp. 288–294.</a:t>
             </a:r>
             <a:endParaRPr lang="en-US" sz="750" dirty="0"/>
           </a:p>
@@ -12132,7 +12477,7 @@
       </p:sp>
       <p:sp>
         <p:nvSpPr>
-          <p:cNvPr id="8" name="Text 6"/>
+          <p:cNvPr id="9" name="Text 7"/>
           <p:cNvSpPr txBox="1"/>
           <p:nvPr/>
         </p:nvSpPr>
@@ -12166,7 +12511,7 @@
                 <a:ea typeface="Calibri" pitchFamily="34" charset="-122"/>
                 <a:cs typeface="Calibri" pitchFamily="34" charset="-120"/>
               </a:rPr>
-              <a:t>In practice, approaches are combined — e.g., use guidance for next year, base-rate convergence for the long run, discretionary for a disruptive inflection.</a:t>
+              <a:t>In practice the four are combined — guidance for next year, base-rate convergence for the long run, discretionary judgement at a disruptive inflection.</a:t>
             </a:r>
             <a:endParaRPr lang="en-US" sz="1300" dirty="0"/>
           </a:p>
@@ -12195,9 +12540,9 @@
             <a:tbl>
               <a:tblPr/>
               <a:tblGrid>
-                <a:gridCol w="2103120"/>
-                <a:gridCol w="4023360"/>
-                <a:gridCol w="2377440"/>
+                <a:gridCol w="2011680"/>
+                <a:gridCol w="3291840"/>
+                <a:gridCol w="3200400"/>
               </a:tblGrid>
               <a:tr h="274320">
                 <a:tc>
@@ -12317,7 +12662,7 @@
                           <a:ea typeface="Trebuchet MS" pitchFamily="34" charset="-122"/>
                           <a:cs typeface="Trebuchet MS" pitchFamily="34" charset="-120"/>
                         </a:rPr>
-                        <a:t>Pitfall</a:t>
+                        <a:t>Where it breaks</a:t>
                       </a:r>
                       <a:endParaRPr lang="en-US" sz="1100" dirty="0">
                         <a:latin typeface="Trebuchet MS" charset="0"/>
@@ -12419,7 +12764,7 @@
                           <a:ea typeface="Consolas" pitchFamily="34" charset="-122"/>
                           <a:cs typeface="Consolas" pitchFamily="34" charset="-120"/>
                         </a:rPr>
-                        <a:t>Mature, non-cyclical industries; non-material line items</a:t>
+                        <a:t>Mature, non-cyclical; immaterial lines</a:t>
                       </a:r>
                       <a:endParaRPr lang="en-US" sz="1100" dirty="0">
                         <a:latin typeface="Consolas" charset="0"/>
@@ -12469,7 +12814,7 @@
                           <a:ea typeface="Consolas" pitchFamily="34" charset="-122"/>
                           <a:cs typeface="Consolas" pitchFamily="34" charset="-120"/>
                         </a:rPr>
-                        <a:t>Past conditions may not repeat</a:t>
+                        <a:t>Past conditions need not repeat</a:t>
                       </a:r>
                       <a:endParaRPr lang="en-US" sz="1100" dirty="0">
                         <a:latin typeface="Consolas" charset="0"/>
@@ -12571,7 +12916,7 @@
                           <a:ea typeface="Consolas" pitchFamily="34" charset="-122"/>
                           <a:cs typeface="Consolas" pitchFamily="34" charset="-120"/>
                         </a:rPr>
-                        <a:t>Young firms scaling toward industry norms; maturing markets</a:t>
+                        <a:t>Young firms maturing toward peer norms</a:t>
                       </a:r>
                       <a:endParaRPr lang="en-US" sz="1100" dirty="0">
                         <a:latin typeface="Consolas" charset="0"/>
@@ -12621,7 +12966,7 @@
                           <a:ea typeface="Consolas" pitchFamily="34" charset="-122"/>
                           <a:cs typeface="Consolas" pitchFamily="34" charset="-120"/>
                         </a:rPr>
-                        <a:t>Industry average may be shifting too</a:t>
+                        <a:t>Leader IS the base rate (Alphabet)</a:t>
                       </a:r>
                       <a:endParaRPr lang="en-US" sz="1100" dirty="0">
                         <a:latin typeface="Consolas" charset="0"/>
@@ -12723,7 +13068,7 @@
                           <a:ea typeface="Consolas" pitchFamily="34" charset="-122"/>
                           <a:cs typeface="Consolas" pitchFamily="34" charset="-120"/>
                         </a:rPr>
-                        <a:t>Strong track record of accuracy; management controls the variable</a:t>
+                        <a:t>Good track record; firm-level variables</a:t>
                       </a:r>
                       <a:endParaRPr lang="en-US" sz="1100" dirty="0">
                         <a:latin typeface="Consolas" charset="0"/>
@@ -12773,7 +13118,7 @@
                           <a:ea typeface="Consolas" pitchFamily="34" charset="-122"/>
                           <a:cs typeface="Consolas" pitchFamily="34" charset="-120"/>
                         </a:rPr>
-                        <a:t>Macro-sensitive lines — no info advantage</a:t>
+                        <a:t>Macro lines — no info advantage</a:t>
                       </a:r>
                       <a:endParaRPr lang="en-US" sz="1100" dirty="0">
                         <a:latin typeface="Consolas" charset="0"/>
@@ -12875,7 +13220,7 @@
                           <a:ea typeface="Consolas" pitchFamily="34" charset="-122"/>
                           <a:cs typeface="Consolas" pitchFamily="34" charset="-120"/>
                         </a:rPr>
-                        <a:t>Cyclicals, disruptive change, unique business, no comparables</a:t>
+                        <a:t>Cyclicals, no comparables, disruption</a:t>
                       </a:r>
                       <a:endParaRPr lang="en-US" sz="1100" dirty="0">
                         <a:latin typeface="Consolas" charset="0"/>
@@ -12925,7 +13270,7 @@
                           <a:ea typeface="Consolas" pitchFamily="34" charset="-122"/>
                           <a:cs typeface="Consolas" pitchFamily="34" charset="-120"/>
                         </a:rPr>
-                        <a:t>Dependent on analyst judgment quality</a:t>
+                        <a:t>Only as good as the judgement</a:t>
                       </a:r>
                       <a:endParaRPr lang="en-US" sz="1100" dirty="0">
                         <a:latin typeface="Consolas" charset="0"/>
@@ -12965,14 +13310,14 @@
       </p:graphicFrame>
       <p:sp>
         <p:nvSpPr>
-          <p:cNvPr id="10" name="Shape 7"/>
+          <p:cNvPr id="11" name="Shape 8"/>
           <p:cNvSpPr/>
           <p:nvPr/>
         </p:nvSpPr>
         <p:spPr>
           <a:xfrm>
-            <a:off x="320040" y="3154680"/>
-            <a:ext cx="8503920" cy="1143000"/>
+            <a:off x="320040" y="2971800"/>
+            <a:ext cx="8503920" cy="1325880"/>
           </a:xfrm>
           <a:prstGeom prst="rect">
             <a:avLst/>
@@ -12985,14 +13330,14 @@
       </p:sp>
       <p:sp>
         <p:nvSpPr>
-          <p:cNvPr id="11" name="Shape 8"/>
+          <p:cNvPr id="12" name="Shape 9"/>
           <p:cNvSpPr/>
           <p:nvPr/>
         </p:nvSpPr>
         <p:spPr>
           <a:xfrm>
-            <a:off x="320040" y="3154680"/>
-            <a:ext cx="73152" cy="1143000"/>
+            <a:off x="320040" y="2971800"/>
+            <a:ext cx="73152" cy="1325880"/>
           </a:xfrm>
           <a:prstGeom prst="rect">
             <a:avLst/>
@@ -13005,13 +13350,13 @@
       </p:sp>
       <p:sp>
         <p:nvSpPr>
-          <p:cNvPr id="12" name="Text 9"/>
+          <p:cNvPr id="13" name="Text 10"/>
           <p:cNvSpPr txBox="1"/>
           <p:nvPr/>
         </p:nvSpPr>
         <p:spPr>
           <a:xfrm>
-            <a:off x="457200" y="3200400"/>
+            <a:off x="457200" y="3017520"/>
             <a:ext cx="8275320" cy="256032"/>
           </a:xfrm>
           <a:prstGeom prst="rect">
@@ -13039,7 +13384,7 @@
                 <a:ea typeface="Trebuchet MS" pitchFamily="34" charset="-122"/>
                 <a:cs typeface="Trebuchet MS" pitchFamily="34" charset="-120"/>
               </a:rPr>
-              <a:t>FORECAST OBJECTS — 4 LEVELS OF GRANULARITY</a:t>
+              <a:t>AND FOUR FORECAST OBJECTS — PICK THE RIGHT GRANULARITY</a:t>
             </a:r>
             <a:endParaRPr lang="en-US" sz="1100" dirty="0"/>
           </a:p>
@@ -13047,14 +13392,14 @@
       </p:sp>
       <p:sp>
         <p:nvSpPr>
-          <p:cNvPr id="13" name="Text 10"/>
+          <p:cNvPr id="14" name="Text 11"/>
           <p:cNvSpPr txBox="1"/>
           <p:nvPr/>
         </p:nvSpPr>
         <p:spPr>
           <a:xfrm>
-            <a:off x="457200" y="3474720"/>
-            <a:ext cx="8275320" cy="777240"/>
+            <a:off x="457200" y="3291840"/>
+            <a:ext cx="8275320" cy="960120"/>
           </a:xfrm>
           <a:prstGeom prst="rect">
             <a:avLst/>
@@ -13081,7 +13426,30 @@
                 <a:ea typeface="Calibri" pitchFamily="34" charset="-122"/>
                 <a:cs typeface="Calibri" pitchFamily="34" charset="-120"/>
               </a:rPr>
-              <a:t>1. DRIVERS of financial-statement lines (# stores × sales / store) — highest explanatory value.  ·  2. INDIVIDUAL LINES directly — efficient when drivers unclear or line is immaterial.  ·  3. SUMMARY MEASURES (FCF, EPS, total assets) — efficient but opaque.  ·  4. AD-HOC objects (one-off legal, regulatory, weather) — require judgment.</a:t>
+              <a:t>1. DRIVERS of financial-statement lines (stores × sales per store) — highest explanatory value.  ·  2. INDIVIDUAL LINES directly — efficient where drivers are unclear or the line is immaterial.  ·  3. SUMMARY MEASURES (FCF, EPS, total assets) — efficient but opaque.  ·  4. AD HOC objects (litigation, regulatory action, disaster) — not yet on any statement.</a:t>
+            </a:r>
+            <a:endParaRPr lang="en-US" sz="1200" dirty="0"/>
+          </a:p>
+          <a:p>
+            <a:pPr algn="l" indent="0" marL="0">
+              <a:buNone/>
+            </a:pPr>
+            <a:endParaRPr lang="en-US" sz="1200" dirty="0"/>
+          </a:p>
+          <a:p>
+            <a:pPr algn="l" indent="0" marL="0">
+              <a:buNone/>
+            </a:pPr>
+            <a:r>
+              <a:rPr lang="en-US" sz="1200" dirty="0">
+                <a:solidFill>
+                  <a:srgbClr val="334155"/>
+                </a:solidFill>
+                <a:latin typeface="Calibri" pitchFamily="34" charset="0"/>
+                <a:ea typeface="Calibri" pitchFamily="34" charset="-122"/>
+                <a:cs typeface="Calibri" pitchFamily="34" charset="-120"/>
+              </a:rPr>
+              <a:t>Rule: forecast only what is disclosed regularly — otherwise you can never check whether you were wrong.</a:t>
             </a:r>
             <a:endParaRPr lang="en-US" sz="1200" dirty="0"/>
           </a:p>
@@ -13292,7 +13660,7 @@
                 <a:ea typeface="Calibri" pitchFamily="34" charset="-122"/>
                 <a:cs typeface="Calibri" pitchFamily="34" charset="-120"/>
               </a:rPr>
-              <a:t>Source: CFA Institute, Curriculum Vol 5, Learning Module 7, §3 "Forecasting Revenues", Exhibit 2, pp. 295–300.</a:t>
+              <a:t>Source: CFA Institute, Curriculum Vol 5, Learning Module 7, §3 "Forecasting Revenues", Exhibit 2 (Warehouse Club Inc.), pp. 296–298.</a:t>
             </a:r>
             <a:endParaRPr lang="en-US" sz="750" dirty="0"/>
           </a:p>
@@ -13334,7 +13702,7 @@
                 <a:ea typeface="Calibri" pitchFamily="34" charset="-122"/>
                 <a:cs typeface="Calibri" pitchFamily="34" charset="-120"/>
               </a:rPr>
-              <a:t>Both methods applied to the same company should converge within a narrow band — if they don't, one or more assumptions is wrong and worth finding.</a:t>
+              <a:t>Run both on the same company. Where they disagree, the gap is an assumption you have not made explicit yet — usually market share.</a:t>
             </a:r>
             <a:endParaRPr lang="en-US" sz="1300" dirty="0"/>
           </a:p>
@@ -13475,7 +13843,7 @@
                 <a:ea typeface="Calibri" pitchFamily="34" charset="-122"/>
                 <a:cs typeface="Calibri" pitchFamily="34" charset="-120"/>
               </a:rPr>
-              <a:t>  · nominal GDP × industry / GDP ratio</a:t>
+              <a:t>  · nominal GDP, then a premium or discount to it</a:t>
             </a:r>
             <a:endParaRPr lang="en-US" sz="1100" dirty="0"/>
           </a:p>
@@ -13492,7 +13860,7 @@
                 <a:ea typeface="Calibri" pitchFamily="34" charset="-122"/>
                 <a:cs typeface="Calibri" pitchFamily="34" charset="-120"/>
               </a:rPr>
-              <a:t>  · adjust for life-cycle (growth, mature, decline)</a:t>
+              <a:t>  · or market growth directly, adjusted for life cycle</a:t>
             </a:r>
             <a:endParaRPr lang="en-US" sz="1100" dirty="0"/>
           </a:p>
@@ -13595,7 +13963,7 @@
                 <a:ea typeface="Calibri" pitchFamily="34" charset="-122"/>
                 <a:cs typeface="Calibri" pitchFamily="34" charset="-120"/>
               </a:rPr>
-              <a:t>Example (Warehouse Club):</a:t>
+              <a:t>CFA example (Warehouse Club Inc.):</a:t>
             </a:r>
             <a:endParaRPr lang="en-US" sz="1100" dirty="0"/>
           </a:p>
@@ -13612,7 +13980,7 @@
                 <a:ea typeface="Calibri" pitchFamily="34" charset="-122"/>
                 <a:cs typeface="Calibri" pitchFamily="34" charset="-120"/>
               </a:rPr>
-              <a:t>• US retail (ex autos) grows 3.4% p.a.</a:t>
+              <a:t>• US retail ex autos grew 3.4% p.a. over 10 years</a:t>
             </a:r>
             <a:endParaRPr lang="en-US" sz="1100" dirty="0"/>
           </a:p>
@@ -13629,7 +13997,7 @@
                 <a:ea typeface="Calibri" pitchFamily="34" charset="-122"/>
                 <a:cs typeface="Calibri" pitchFamily="34" charset="-120"/>
               </a:rPr>
-              <a:t>• Share gain: +2 bps per year</a:t>
+              <a:t>• Share was 70 bps in 2X19, rising ~2 bps a year</a:t>
             </a:r>
             <a:endParaRPr lang="en-US" sz="1100" dirty="0"/>
           </a:p>
@@ -13646,7 +14014,7 @@
                 <a:ea typeface="Calibri" pitchFamily="34" charset="-122"/>
                 <a:cs typeface="Calibri" pitchFamily="34" charset="-120"/>
               </a:rPr>
-              <a:t>• 10-y cumulative top-line driver: +38%</a:t>
+              <a:t>• Forecast = market × 1.034 × (share + 2 bps)</a:t>
             </a:r>
             <a:endParaRPr lang="en-US" sz="1100" dirty="0"/>
           </a:p>
@@ -13890,7 +14258,7 @@
                 <a:ea typeface="Calibri" pitchFamily="34" charset="-122"/>
                 <a:cs typeface="Calibri" pitchFamily="34" charset="-120"/>
               </a:rPr>
-              <a:t>Example (Warehouse Club):</a:t>
+              <a:t>CFA example (Warehouse Club Inc.):</a:t>
             </a:r>
             <a:endParaRPr lang="en-US" sz="1100" dirty="0"/>
           </a:p>
@@ -13907,7 +14275,7 @@
                 <a:ea typeface="Calibri" pitchFamily="34" charset="-122"/>
                 <a:cs typeface="Calibri" pitchFamily="34" charset="-120"/>
               </a:rPr>
-              <a:t>• 4–6 new stores / year</a:t>
+              <a:t>• 4–6 new stores opened per year</a:t>
             </a:r>
             <a:endParaRPr lang="en-US" sz="1100" dirty="0"/>
           </a:p>
@@ -13924,7 +14292,7 @@
                 <a:ea typeface="Calibri" pitchFamily="34" charset="-122"/>
                 <a:cs typeface="Calibri" pitchFamily="34" charset="-120"/>
               </a:rPr>
-              <a:t>• Same-store sales growth 3.8%</a:t>
+              <a:t>• Net sales PER STORE grew 3.8% p.a.</a:t>
             </a:r>
             <a:endParaRPr lang="en-US" sz="1100" dirty="0"/>
           </a:p>
@@ -13941,24 +14309,7 @@
                 <a:ea typeface="Calibri" pitchFamily="34" charset="-122"/>
                 <a:cs typeface="Calibri" pitchFamily="34" charset="-120"/>
               </a:rPr>
-              <a:t>• ~450 k new members / year × annual fee</a:t>
-            </a:r>
-            <a:endParaRPr lang="en-US" sz="1100" dirty="0"/>
-          </a:p>
-          <a:p>
-            <a:pPr algn="l" indent="0" marL="0">
-              <a:buNone/>
-            </a:pPr>
-            <a:r>
-              <a:rPr lang="en-US" sz="1100" dirty="0">
-                <a:solidFill>
-                  <a:srgbClr val="334155"/>
-                </a:solidFill>
-                <a:latin typeface="Calibri" pitchFamily="34" charset="0"/>
-                <a:ea typeface="Calibri" pitchFamily="34" charset="-122"/>
-                <a:cs typeface="Calibri" pitchFamily="34" charset="-120"/>
-              </a:rPr>
-              <a:t>• Totals: +USD 8–10 bn / year</a:t>
+              <a:t>• ~450,000 members added per year × annual fee</a:t>
             </a:r>
             <a:endParaRPr lang="en-US" sz="1100" dirty="0"/>
           </a:p>
@@ -14169,7 +14520,7 @@
                 <a:ea typeface="Calibri" pitchFamily="34" charset="-122"/>
                 <a:cs typeface="Calibri" pitchFamily="34" charset="-120"/>
               </a:rPr>
-              <a:t>Source: CFA Institute, Curriculum Vol 5, Learning Module 7, §6 "Scenario Analysis", pp. 318–320.</a:t>
+              <a:t>Source: CFA Institute, Curriculum Vol 5, Learning Module 7, §6 "Scenario Analysis", pp. 318–319. Figures here are an illustrative build, not a CFA example.</a:t>
             </a:r>
             <a:endParaRPr lang="en-US" sz="750" dirty="0"/>
           </a:p>
@@ -14211,7 +14562,7 @@
                 <a:ea typeface="Calibri" pitchFamily="34" charset="-122"/>
                 <a:cs typeface="Calibri" pitchFamily="34" charset="-120"/>
               </a:rPr>
-              <a:t>Each scenario should correspond to a coherent story — bear = e-commerce share loss accelerates, base = trend continues, bull = physical stores regain share post-pandemic.</a:t>
+              <a:t>Every scenario needs a story, not just a number — bear = recession plus accelerating e-commerce share loss; bull = store traffic recovers and pricing sticks.</a:t>
             </a:r>
             <a:endParaRPr lang="en-US" sz="1300" dirty="0"/>
           </a:p>
@@ -14225,8 +14576,8 @@
         </p:nvSpPr>
         <p:spPr>
           <a:xfrm>
-            <a:off x="320040" y="1143000"/>
-            <a:ext cx="8503920" cy="1325880"/>
+            <a:off x="320040" y="1097280"/>
+            <a:ext cx="8503920" cy="1874520"/>
           </a:xfrm>
           <a:prstGeom prst="rect">
             <a:avLst/>
@@ -14250,7 +14601,7 @@
         </p:nvSpPr>
         <p:spPr>
           <a:xfrm>
-            <a:off x="457200" y="1188720"/>
+            <a:off x="457200" y="1143000"/>
             <a:ext cx="8229600" cy="256032"/>
           </a:xfrm>
           <a:prstGeom prst="rect">
@@ -14278,7 +14629,7 @@
                 <a:ea typeface="Trebuchet MS" pitchFamily="34" charset="-122"/>
                 <a:cs typeface="Trebuchet MS" pitchFamily="34" charset="-120"/>
               </a:rPr>
-              <a:t>BASE CASE — US CONSUMER-STAPLES RETAILER (FY+1)</a:t>
+              <a:t>BASE CASE — ILLUSTRATIVE US CONSUMER-STAPLES RETAILER (FY+1)</a:t>
             </a:r>
             <a:endParaRPr lang="en-US" sz="1100" dirty="0"/>
           </a:p>
@@ -14292,7 +14643,7 @@
         </p:nvSpPr>
         <p:spPr>
           <a:xfrm>
-            <a:off x="457200" y="1481328"/>
+            <a:off x="457200" y="1435608"/>
             <a:ext cx="8229600" cy="457200"/>
           </a:xfrm>
           <a:prstGeom prst="rect">
@@ -14320,7 +14671,7 @@
                 <a:ea typeface="Calibri" pitchFamily="34" charset="-122"/>
                 <a:cs typeface="Calibri" pitchFamily="34" charset="-120"/>
               </a:rPr>
-              <a:t>Starting revenue USD 11,500 m. Real GDP +2.0%, inflation +2.5% → nominal GDP +4.5%. Industry tracks GDP. Company share is stable at 0.70% of US retail ex-autos. Same-store sales +3.5%, +5 new stores at USD 50m each.</a:t>
+              <a:t>Prior-year revenue USD 11,500 m. Real GDP +2.0% and inflation +2.5% → nominal GDP +4.5%; industry tracks it. Bottom-up: same-store sales +3.5% and five new stores at USD 50 m each. Five stores open in every scenario.</a:t>
             </a:r>
             <a:endParaRPr lang="en-US" sz="1200" dirty="0"/>
           </a:p>
@@ -14334,8 +14685,8 @@
         </p:nvSpPr>
         <p:spPr>
           <a:xfrm>
-            <a:off x="457200" y="1993392"/>
-            <a:ext cx="8229600" cy="274320"/>
+            <a:off x="457200" y="1947672"/>
+            <a:ext cx="8229600" cy="512064"/>
           </a:xfrm>
           <a:prstGeom prst="rect">
             <a:avLst/>
@@ -14357,7 +14708,7 @@
               <a:buNone/>
             </a:pPr>
             <a:r>
-              <a:rPr lang="en-US" sz="1050" b="1" dirty="0">
+              <a:rPr lang="en-US" sz="1100" b="1" dirty="0">
                 <a:solidFill>
                   <a:srgbClr val="1B2A4A"/>
                 </a:solidFill>
@@ -14374,7 +14725,7 @@
               <a:buNone/>
             </a:pPr>
             <a:r>
-              <a:rPr lang="en-US" sz="1050" dirty="0">
+              <a:rPr lang="en-US" sz="1100" dirty="0">
                 <a:solidFill>
                   <a:srgbClr val="334155"/>
                 </a:solidFill>
@@ -14382,7 +14733,7 @@
                 <a:ea typeface="Calibri" pitchFamily="34" charset="-122"/>
                 <a:cs typeface="Calibri" pitchFamily="34" charset="-120"/>
               </a:rPr>
-              <a:t>Top-down: 11,500 × (1 + 4.5%) = 12,018 m
+              <a:t>Top-down:  11,500 × 1.045  =  12,018 m
 </a:t>
             </a:r>
             <a:pPr indent="0" marL="0">
@@ -14392,7 +14743,7 @@
               <a:buNone/>
             </a:pPr>
             <a:r>
-              <a:rPr lang="en-US" sz="1050" b="1" dirty="0">
+              <a:rPr lang="en-US" sz="1100" b="1" dirty="0">
                 <a:solidFill>
                   <a:srgbClr val="1B2A4A"/>
                 </a:solidFill>
@@ -14409,7 +14760,7 @@
               <a:buNone/>
             </a:pPr>
             <a:r>
-              <a:rPr lang="en-US" sz="1050" dirty="0">
+              <a:rPr lang="en-US" sz="1100" dirty="0">
                 <a:solidFill>
                   <a:srgbClr val="334155"/>
                 </a:solidFill>
@@ -14417,7 +14768,7 @@
                 <a:ea typeface="Calibri" pitchFamily="34" charset="-122"/>
                 <a:cs typeface="Calibri" pitchFamily="34" charset="-120"/>
               </a:rPr>
-              <a:t>Bottom-up: SSS +3.5% × 11,500 = +402 m; new stores 5 × 50 = 250 m; pricing +0.5% = 58 m → 12,210 m
+              <a:t>Bottom-up:  11,500 × 1.035 = 11,903, + (5 × 50) = 250  →  12,153 m
 </a:t>
             </a:r>
             <a:pPr indent="0" marL="0">
@@ -14427,7 +14778,7 @@
               <a:buNone/>
             </a:pPr>
             <a:r>
-              <a:rPr lang="en-US" sz="1050" b="1" dirty="0">
+              <a:rPr lang="en-US" sz="1100" b="1" dirty="0">
                 <a:solidFill>
                   <a:srgbClr val="1B2A4A"/>
                 </a:solidFill>
@@ -14444,7 +14795,7 @@
               <a:buNone/>
             </a:pPr>
             <a:r>
-              <a:rPr lang="en-US" sz="1050" dirty="0">
+              <a:rPr lang="en-US" sz="1100" dirty="0">
                 <a:solidFill>
                   <a:srgbClr val="334155"/>
                 </a:solidFill>
@@ -14452,9 +14803,9 @@
                 <a:ea typeface="Calibri" pitchFamily="34" charset="-122"/>
                 <a:cs typeface="Calibri" pitchFamily="34" charset="-120"/>
               </a:rPr>
-              <a:t>Reconcile → base-case FY+1 revenue ≈ USD 12,100 m (average of the two)</a:t>
-            </a:r>
-            <a:endParaRPr lang="en-US" sz="1050" dirty="0"/>
+              <a:t>Gap = 135 m ≈ 1.1% of sales — that gap IS an implied share gain. Split it: (12,018 + 12,153) / 2</a:t>
+            </a:r>
+            <a:endParaRPr lang="en-US" sz="1100" dirty="0"/>
           </a:p>
         </p:txBody>
       </p:sp>
@@ -14466,7 +14817,7 @@
         </p:nvSpPr>
         <p:spPr>
           <a:xfrm>
-            <a:off x="411480" y="2029968"/>
+            <a:off x="411480" y="2532888"/>
             <a:ext cx="8321040" cy="365760"/>
           </a:xfrm>
           <a:prstGeom prst="rect">
@@ -14486,7 +14837,7 @@
         </p:nvSpPr>
         <p:spPr>
           <a:xfrm>
-            <a:off x="457200" y="2029968"/>
+            <a:off x="457200" y="2532888"/>
             <a:ext cx="8229600" cy="365760"/>
           </a:xfrm>
           <a:prstGeom prst="rect">
@@ -14514,7 +14865,7 @@
                 <a:ea typeface="Consolas" pitchFamily="34" charset="-122"/>
                 <a:cs typeface="Consolas" pitchFamily="34" charset="-120"/>
               </a:rPr>
-              <a:t>BASE-CASE FY+1 REVENUE  ≈  USD 12,100 m  (+5.2% YoY)</a:t>
+              <a:t>BASE-CASE FY+1 REVENUE  =  USD 12,085 m   (+5.1% YoY)</a:t>
             </a:r>
             <a:endParaRPr lang="en-US" sz="1150" dirty="0"/>
           </a:p>
@@ -14535,7 +14886,7 @@
           </p:nvPr>
         </p:nvGraphicFramePr>
         <p:xfrm>
-          <a:off x="320040" y="2606040"/>
+          <a:off x="320040" y="3063240"/>
           <a:ext cx="8503920" cy="914400"/>
         </p:xfrm>
         <a:graphic>
@@ -14543,11 +14894,13 @@
             <a:tbl>
               <a:tblPr/>
               <a:tblGrid>
-                <a:gridCol w="1280160"/>
-                <a:gridCol w="4480560"/>
-                <a:gridCol w="731520"/>
-                <a:gridCol w="731520"/>
-                <a:gridCol w="1280160"/>
+                <a:gridCol w="1188720"/>
+                <a:gridCol w="2834640"/>
+                <a:gridCol w="960120"/>
+                <a:gridCol w="777240"/>
+                <a:gridCol w="914400"/>
+                <a:gridCol w="960120"/>
+                <a:gridCol w="868680"/>
               </a:tblGrid>
               <a:tr h="274320">
                 <a:tc>
@@ -14667,7 +15020,7 @@
                           <a:ea typeface="Trebuchet MS" pitchFamily="34" charset="-122"/>
                           <a:cs typeface="Trebuchet MS" pitchFamily="34" charset="-120"/>
                         </a:rPr>
-                        <a:t>GDP</a:t>
+                        <a:t>Nom. GDP</a:t>
                       </a:r>
                       <a:endParaRPr lang="en-US" sz="1100" dirty="0">
                         <a:latin typeface="Trebuchet MS" charset="0"/>
@@ -14767,7 +15120,107 @@
                           <a:ea typeface="Trebuchet MS" pitchFamily="34" charset="-122"/>
                           <a:cs typeface="Trebuchet MS" pitchFamily="34" charset="-120"/>
                         </a:rPr>
-                        <a:t>FY+1 rev USD m</a:t>
+                        <a:t>Top-down</a:t>
+                      </a:r>
+                      <a:endParaRPr lang="en-US" sz="1100" dirty="0">
+                        <a:latin typeface="Trebuchet MS" charset="0"/>
+                        <a:ea typeface="Trebuchet MS" charset="0"/>
+                        <a:cs typeface="Trebuchet MS" charset="0"/>
+                      </a:endParaRPr>
+                    </a:p>
+                  </a:txBody>
+                  <a:tcPr marL="91440" marR="91440" marT="45720" marB="45720" anchor="ctr">
+                    <a:lnL w="0" cap="flat" cmpd="sng" algn="ctr">
+                      <a:noFill/>
+                    </a:lnL>
+                    <a:lnR w="0" cap="flat" cmpd="sng" algn="ctr">
+                      <a:noFill/>
+                    </a:lnR>
+                    <a:lnT w="6350" cap="flat" cmpd="sng" algn="ctr">
+                      <a:solidFill>
+                        <a:srgbClr val="1B2A4A"/>
+                      </a:solidFill>
+                      <a:prstDash val="solid"/>
+                      <a:round/>
+                      <a:headEnd type="none" w="med" len="med"/>
+                      <a:tailEnd type="none" w="med" len="med"/>
+                    </a:lnT>
+                    <a:lnB w="0" cap="flat" cmpd="sng" algn="ctr">
+                      <a:noFill/>
+                    </a:lnB>
+                    <a:solidFill>
+                      <a:srgbClr val="1B2A4A"/>
+                    </a:solidFill>
+                  </a:tcPr>
+                </a:tc>
+                <a:tc>
+                  <a:txBody>
+                    <a:bodyPr/>
+                    <a:lstStyle/>
+                    <a:p>
+                      <a:pPr algn="ctr" indent="0" marL="0">
+                        <a:buNone/>
+                      </a:pPr>
+                      <a:r>
+                        <a:rPr lang="en-US" sz="1100" b="1" dirty="0">
+                          <a:solidFill>
+                            <a:srgbClr val="FFFFFF"/>
+                          </a:solidFill>
+                          <a:latin typeface="Trebuchet MS" pitchFamily="34" charset="0"/>
+                          <a:ea typeface="Trebuchet MS" pitchFamily="34" charset="-122"/>
+                          <a:cs typeface="Trebuchet MS" pitchFamily="34" charset="-120"/>
+                        </a:rPr>
+                        <a:t>Bottom-up</a:t>
+                      </a:r>
+                      <a:endParaRPr lang="en-US" sz="1100" dirty="0">
+                        <a:latin typeface="Trebuchet MS" charset="0"/>
+                        <a:ea typeface="Trebuchet MS" charset="0"/>
+                        <a:cs typeface="Trebuchet MS" charset="0"/>
+                      </a:endParaRPr>
+                    </a:p>
+                  </a:txBody>
+                  <a:tcPr marL="91440" marR="91440" marT="45720" marB="45720" anchor="ctr">
+                    <a:lnL w="0" cap="flat" cmpd="sng" algn="ctr">
+                      <a:noFill/>
+                    </a:lnL>
+                    <a:lnR w="0" cap="flat" cmpd="sng" algn="ctr">
+                      <a:noFill/>
+                    </a:lnR>
+                    <a:lnT w="6350" cap="flat" cmpd="sng" algn="ctr">
+                      <a:solidFill>
+                        <a:srgbClr val="1B2A4A"/>
+                      </a:solidFill>
+                      <a:prstDash val="solid"/>
+                      <a:round/>
+                      <a:headEnd type="none" w="med" len="med"/>
+                      <a:tailEnd type="none" w="med" len="med"/>
+                    </a:lnT>
+                    <a:lnB w="0" cap="flat" cmpd="sng" algn="ctr">
+                      <a:noFill/>
+                    </a:lnB>
+                    <a:solidFill>
+                      <a:srgbClr val="1B2A4A"/>
+                    </a:solidFill>
+                  </a:tcPr>
+                </a:tc>
+                <a:tc>
+                  <a:txBody>
+                    <a:bodyPr/>
+                    <a:lstStyle/>
+                    <a:p>
+                      <a:pPr algn="ctr" indent="0" marL="0">
+                        <a:buNone/>
+                      </a:pPr>
+                      <a:r>
+                        <a:rPr lang="en-US" sz="1100" b="1" dirty="0">
+                          <a:solidFill>
+                            <a:srgbClr val="FFFFFF"/>
+                          </a:solidFill>
+                          <a:latin typeface="Trebuchet MS" pitchFamily="34" charset="0"/>
+                          <a:ea typeface="Trebuchet MS" pitchFamily="34" charset="-122"/>
+                          <a:cs typeface="Trebuchet MS" pitchFamily="34" charset="-120"/>
+                        </a:rPr>
+                        <a:t>FY+1 rev</a:t>
                       </a:r>
                       <a:endParaRPr lang="en-US" sz="1100" dirty="0">
                         <a:latin typeface="Trebuchet MS" charset="0"/>
@@ -14819,7 +15272,7 @@
                           <a:ea typeface="Calibri" pitchFamily="34" charset="-122"/>
                           <a:cs typeface="Calibri" pitchFamily="34" charset="-120"/>
                         </a:rPr>
-                        <a:t>Bear (25%)</a:t>
+                        <a:t>Bear (20%)</a:t>
                       </a:r>
                       <a:endParaRPr lang="en-US" sz="1100" dirty="0">
                         <a:latin typeface="Calibri" charset="0"/>
@@ -14869,7 +15322,7 @@
                           <a:ea typeface="Consolas" pitchFamily="34" charset="-122"/>
                           <a:cs typeface="Consolas" pitchFamily="34" charset="-120"/>
                         </a:rPr>
-                        <a:t>Accelerating e-commerce share loss; recession</a:t>
+                        <a:t>Recession; e-commerce takes share</a:t>
                       </a:r>
                       <a:endParaRPr lang="en-US" sz="1100" dirty="0">
                         <a:latin typeface="Consolas" charset="0"/>
@@ -14919,7 +15372,7 @@
                           <a:ea typeface="Consolas" pitchFamily="34" charset="-122"/>
                           <a:cs typeface="Consolas" pitchFamily="34" charset="-120"/>
                         </a:rPr>
-                        <a:t>+0.5%</a:t>
+                        <a:t>+1.0%</a:t>
                       </a:r>
                       <a:endParaRPr lang="en-US" sz="1100" dirty="0">
                         <a:latin typeface="Consolas" charset="0"/>
@@ -14969,7 +15422,7 @@
                           <a:ea typeface="Consolas" pitchFamily="34" charset="-122"/>
                           <a:cs typeface="Consolas" pitchFamily="34" charset="-120"/>
                         </a:rPr>
-                        <a:t>−1.5%</a:t>
+                        <a:t>−3.0%</a:t>
                       </a:r>
                       <a:endParaRPr lang="en-US" sz="1100" dirty="0">
                         <a:latin typeface="Consolas" charset="0"/>
@@ -15019,7 +15472,107 @@
                           <a:ea typeface="Consolas" pitchFamily="34" charset="-122"/>
                           <a:cs typeface="Consolas" pitchFamily="34" charset="-120"/>
                         </a:rPr>
-                        <a:t>11,610</a:t>
+                        <a:t>11,615</a:t>
+                      </a:r>
+                      <a:endParaRPr lang="en-US" sz="1100" dirty="0">
+                        <a:latin typeface="Consolas" charset="0"/>
+                        <a:ea typeface="Consolas" charset="0"/>
+                        <a:cs typeface="Consolas" charset="0"/>
+                      </a:endParaRPr>
+                    </a:p>
+                  </a:txBody>
+                  <a:tcPr marL="91440" marR="91440" marT="45720" marB="45720" anchor="ctr">
+                    <a:lnL w="0" cap="flat" cmpd="sng" algn="ctr">
+                      <a:noFill/>
+                    </a:lnL>
+                    <a:lnR w="0" cap="flat" cmpd="sng" algn="ctr">
+                      <a:noFill/>
+                    </a:lnR>
+                    <a:lnT w="0" cap="flat" cmpd="sng" algn="ctr">
+                      <a:noFill/>
+                    </a:lnT>
+                    <a:lnB w="3175" cap="flat" cmpd="sng" algn="ctr">
+                      <a:solidFill>
+                        <a:srgbClr val="D0D8E8"/>
+                      </a:solidFill>
+                      <a:prstDash val="solid"/>
+                      <a:round/>
+                      <a:headEnd type="none" w="med" len="med"/>
+                      <a:tailEnd type="none" w="med" len="med"/>
+                    </a:lnB>
+                    <a:solidFill>
+                      <a:srgbClr val="FFFFFF"/>
+                    </a:solidFill>
+                  </a:tcPr>
+                </a:tc>
+                <a:tc>
+                  <a:txBody>
+                    <a:bodyPr/>
+                    <a:lstStyle/>
+                    <a:p>
+                      <a:pPr algn="r" indent="0" marL="0">
+                        <a:buNone/>
+                      </a:pPr>
+                      <a:r>
+                        <a:rPr lang="en-US" sz="1100" dirty="0">
+                          <a:solidFill>
+                            <a:srgbClr val="334155"/>
+                          </a:solidFill>
+                          <a:latin typeface="Consolas" pitchFamily="34" charset="0"/>
+                          <a:ea typeface="Consolas" pitchFamily="34" charset="-122"/>
+                          <a:cs typeface="Consolas" pitchFamily="34" charset="-120"/>
+                        </a:rPr>
+                        <a:t>11,405</a:t>
+                      </a:r>
+                      <a:endParaRPr lang="en-US" sz="1100" dirty="0">
+                        <a:latin typeface="Consolas" charset="0"/>
+                        <a:ea typeface="Consolas" charset="0"/>
+                        <a:cs typeface="Consolas" charset="0"/>
+                      </a:endParaRPr>
+                    </a:p>
+                  </a:txBody>
+                  <a:tcPr marL="91440" marR="91440" marT="45720" marB="45720" anchor="ctr">
+                    <a:lnL w="0" cap="flat" cmpd="sng" algn="ctr">
+                      <a:noFill/>
+                    </a:lnL>
+                    <a:lnR w="0" cap="flat" cmpd="sng" algn="ctr">
+                      <a:noFill/>
+                    </a:lnR>
+                    <a:lnT w="0" cap="flat" cmpd="sng" algn="ctr">
+                      <a:noFill/>
+                    </a:lnT>
+                    <a:lnB w="3175" cap="flat" cmpd="sng" algn="ctr">
+                      <a:solidFill>
+                        <a:srgbClr val="D0D8E8"/>
+                      </a:solidFill>
+                      <a:prstDash val="solid"/>
+                      <a:round/>
+                      <a:headEnd type="none" w="med" len="med"/>
+                      <a:tailEnd type="none" w="med" len="med"/>
+                    </a:lnB>
+                    <a:solidFill>
+                      <a:srgbClr val="FFFFFF"/>
+                    </a:solidFill>
+                  </a:tcPr>
+                </a:tc>
+                <a:tc>
+                  <a:txBody>
+                    <a:bodyPr/>
+                    <a:lstStyle/>
+                    <a:p>
+                      <a:pPr algn="r" indent="0" marL="0">
+                        <a:buNone/>
+                      </a:pPr>
+                      <a:r>
+                        <a:rPr lang="en-US" sz="1100" dirty="0">
+                          <a:solidFill>
+                            <a:srgbClr val="334155"/>
+                          </a:solidFill>
+                          <a:latin typeface="Consolas" pitchFamily="34" charset="0"/>
+                          <a:ea typeface="Consolas" pitchFamily="34" charset="-122"/>
+                          <a:cs typeface="Consolas" pitchFamily="34" charset="-120"/>
+                        </a:rPr>
+                        <a:t>11,510</a:t>
                       </a:r>
                       <a:endParaRPr lang="en-US" sz="1100" dirty="0">
                         <a:latin typeface="Consolas" charset="0"/>
@@ -15071,7 +15624,7 @@
                           <a:ea typeface="Calibri" pitchFamily="34" charset="-122"/>
                           <a:cs typeface="Calibri" pitchFamily="34" charset="-120"/>
                         </a:rPr>
-                        <a:t>Base (50%)</a:t>
+                        <a:t>Base (60%)</a:t>
                       </a:r>
                       <a:endParaRPr lang="en-US" sz="1100" dirty="0">
                         <a:latin typeface="Calibri" charset="0"/>
@@ -15121,7 +15674,7 @@
                           <a:ea typeface="Consolas" pitchFamily="34" charset="-122"/>
                           <a:cs typeface="Consolas" pitchFamily="34" charset="-120"/>
                         </a:rPr>
-                        <a:t>Trend continues: mild GDP growth, share stable</a:t>
+                        <a:t>Trend holds; share edges up</a:t>
                       </a:r>
                       <a:endParaRPr lang="en-US" sz="1100" dirty="0">
                         <a:latin typeface="Consolas" charset="0"/>
@@ -15271,7 +15824,107 @@
                           <a:ea typeface="Consolas" pitchFamily="34" charset="-122"/>
                           <a:cs typeface="Consolas" pitchFamily="34" charset="-120"/>
                         </a:rPr>
-                        <a:t>12,100</a:t>
+                        <a:t>12,018</a:t>
+                      </a:r>
+                      <a:endParaRPr lang="en-US" sz="1100" dirty="0">
+                        <a:latin typeface="Consolas" charset="0"/>
+                        <a:ea typeface="Consolas" charset="0"/>
+                        <a:cs typeface="Consolas" charset="0"/>
+                      </a:endParaRPr>
+                    </a:p>
+                  </a:txBody>
+                  <a:tcPr marL="91440" marR="91440" marT="45720" marB="45720" anchor="ctr">
+                    <a:lnL w="0" cap="flat" cmpd="sng" algn="ctr">
+                      <a:noFill/>
+                    </a:lnL>
+                    <a:lnR w="0" cap="flat" cmpd="sng" algn="ctr">
+                      <a:noFill/>
+                    </a:lnR>
+                    <a:lnT w="0" cap="flat" cmpd="sng" algn="ctr">
+                      <a:noFill/>
+                    </a:lnT>
+                    <a:lnB w="3175" cap="flat" cmpd="sng" algn="ctr">
+                      <a:solidFill>
+                        <a:srgbClr val="D0D8E8"/>
+                      </a:solidFill>
+                      <a:prstDash val="solid"/>
+                      <a:round/>
+                      <a:headEnd type="none" w="med" len="med"/>
+                      <a:tailEnd type="none" w="med" len="med"/>
+                    </a:lnB>
+                    <a:solidFill>
+                      <a:srgbClr val="F5F7FA"/>
+                    </a:solidFill>
+                  </a:tcPr>
+                </a:tc>
+                <a:tc>
+                  <a:txBody>
+                    <a:bodyPr/>
+                    <a:lstStyle/>
+                    <a:p>
+                      <a:pPr algn="r" indent="0" marL="0">
+                        <a:buNone/>
+                      </a:pPr>
+                      <a:r>
+                        <a:rPr lang="en-US" sz="1100" dirty="0">
+                          <a:solidFill>
+                            <a:srgbClr val="334155"/>
+                          </a:solidFill>
+                          <a:latin typeface="Consolas" pitchFamily="34" charset="0"/>
+                          <a:ea typeface="Consolas" pitchFamily="34" charset="-122"/>
+                          <a:cs typeface="Consolas" pitchFamily="34" charset="-120"/>
+                        </a:rPr>
+                        <a:t>12,153</a:t>
+                      </a:r>
+                      <a:endParaRPr lang="en-US" sz="1100" dirty="0">
+                        <a:latin typeface="Consolas" charset="0"/>
+                        <a:ea typeface="Consolas" charset="0"/>
+                        <a:cs typeface="Consolas" charset="0"/>
+                      </a:endParaRPr>
+                    </a:p>
+                  </a:txBody>
+                  <a:tcPr marL="91440" marR="91440" marT="45720" marB="45720" anchor="ctr">
+                    <a:lnL w="0" cap="flat" cmpd="sng" algn="ctr">
+                      <a:noFill/>
+                    </a:lnL>
+                    <a:lnR w="0" cap="flat" cmpd="sng" algn="ctr">
+                      <a:noFill/>
+                    </a:lnR>
+                    <a:lnT w="0" cap="flat" cmpd="sng" algn="ctr">
+                      <a:noFill/>
+                    </a:lnT>
+                    <a:lnB w="3175" cap="flat" cmpd="sng" algn="ctr">
+                      <a:solidFill>
+                        <a:srgbClr val="D0D8E8"/>
+                      </a:solidFill>
+                      <a:prstDash val="solid"/>
+                      <a:round/>
+                      <a:headEnd type="none" w="med" len="med"/>
+                      <a:tailEnd type="none" w="med" len="med"/>
+                    </a:lnB>
+                    <a:solidFill>
+                      <a:srgbClr val="F5F7FA"/>
+                    </a:solidFill>
+                  </a:tcPr>
+                </a:tc>
+                <a:tc>
+                  <a:txBody>
+                    <a:bodyPr/>
+                    <a:lstStyle/>
+                    <a:p>
+                      <a:pPr algn="r" indent="0" marL="0">
+                        <a:buNone/>
+                      </a:pPr>
+                      <a:r>
+                        <a:rPr lang="en-US" sz="1100" dirty="0">
+                          <a:solidFill>
+                            <a:srgbClr val="334155"/>
+                          </a:solidFill>
+                          <a:latin typeface="Consolas" pitchFamily="34" charset="0"/>
+                          <a:ea typeface="Consolas" pitchFamily="34" charset="-122"/>
+                          <a:cs typeface="Consolas" pitchFamily="34" charset="-120"/>
+                        </a:rPr>
+                        <a:t>12,085</a:t>
                       </a:r>
                       <a:endParaRPr lang="en-US" sz="1100" dirty="0">
                         <a:latin typeface="Consolas" charset="0"/>
@@ -15323,7 +15976,7 @@
                           <a:ea typeface="Calibri" pitchFamily="34" charset="-122"/>
                           <a:cs typeface="Calibri" pitchFamily="34" charset="-120"/>
                         </a:rPr>
-                        <a:t>Bull (25%)</a:t>
+                        <a:t>Bull (20%)</a:t>
                       </a:r>
                       <a:endParaRPr lang="en-US" sz="1100" dirty="0">
                         <a:latin typeface="Calibri" charset="0"/>
@@ -15373,57 +16026,7 @@
                           <a:ea typeface="Consolas" pitchFamily="34" charset="-122"/>
                           <a:cs typeface="Consolas" pitchFamily="34" charset="-120"/>
                         </a:rPr>
-                        <a:t>Physical-store renaissance + margin expansion</a:t>
-                      </a:r>
-                      <a:endParaRPr lang="en-US" sz="1100" dirty="0">
-                        <a:latin typeface="Consolas" charset="0"/>
-                        <a:ea typeface="Consolas" charset="0"/>
-                        <a:cs typeface="Consolas" charset="0"/>
-                      </a:endParaRPr>
-                    </a:p>
-                  </a:txBody>
-                  <a:tcPr marL="91440" marR="91440" marT="45720" marB="45720" anchor="ctr">
-                    <a:lnL w="0" cap="flat" cmpd="sng" algn="ctr">
-                      <a:noFill/>
-                    </a:lnL>
-                    <a:lnR w="0" cap="flat" cmpd="sng" algn="ctr">
-                      <a:noFill/>
-                    </a:lnR>
-                    <a:lnT w="0" cap="flat" cmpd="sng" algn="ctr">
-                      <a:noFill/>
-                    </a:lnT>
-                    <a:lnB w="3175" cap="flat" cmpd="sng" algn="ctr">
-                      <a:solidFill>
-                        <a:srgbClr val="D0D8E8"/>
-                      </a:solidFill>
-                      <a:prstDash val="solid"/>
-                      <a:round/>
-                      <a:headEnd type="none" w="med" len="med"/>
-                      <a:tailEnd type="none" w="med" len="med"/>
-                    </a:lnB>
-                    <a:solidFill>
-                      <a:srgbClr val="FFFFFF"/>
-                    </a:solidFill>
-                  </a:tcPr>
-                </a:tc>
-                <a:tc>
-                  <a:txBody>
-                    <a:bodyPr/>
-                    <a:lstStyle/>
-                    <a:p>
-                      <a:pPr algn="ctr" indent="0" marL="0">
-                        <a:buNone/>
-                      </a:pPr>
-                      <a:r>
-                        <a:rPr lang="en-US" sz="1100" dirty="0">
-                          <a:solidFill>
-                            <a:srgbClr val="334155"/>
-                          </a:solidFill>
-                          <a:latin typeface="Consolas" pitchFamily="34" charset="0"/>
-                          <a:ea typeface="Consolas" pitchFamily="34" charset="-122"/>
-                          <a:cs typeface="Consolas" pitchFamily="34" charset="-120"/>
-                        </a:rPr>
-                        <a:t>+5.5%</a:t>
+                        <a:t>Traffic recovers; pricing sticks</a:t>
                       </a:r>
                       <a:endParaRPr lang="en-US" sz="1100" dirty="0">
                         <a:latin typeface="Consolas" charset="0"/>
@@ -15511,6 +16114,56 @@
                     <a:bodyPr/>
                     <a:lstStyle/>
                     <a:p>
+                      <a:pPr algn="ctr" indent="0" marL="0">
+                        <a:buNone/>
+                      </a:pPr>
+                      <a:r>
+                        <a:rPr lang="en-US" sz="1100" dirty="0">
+                          <a:solidFill>
+                            <a:srgbClr val="334155"/>
+                          </a:solidFill>
+                          <a:latin typeface="Consolas" pitchFamily="34" charset="0"/>
+                          <a:ea typeface="Consolas" pitchFamily="34" charset="-122"/>
+                          <a:cs typeface="Consolas" pitchFamily="34" charset="-120"/>
+                        </a:rPr>
+                        <a:t>+6.0%</a:t>
+                      </a:r>
+                      <a:endParaRPr lang="en-US" sz="1100" dirty="0">
+                        <a:latin typeface="Consolas" charset="0"/>
+                        <a:ea typeface="Consolas" charset="0"/>
+                        <a:cs typeface="Consolas" charset="0"/>
+                      </a:endParaRPr>
+                    </a:p>
+                  </a:txBody>
+                  <a:tcPr marL="91440" marR="91440" marT="45720" marB="45720" anchor="ctr">
+                    <a:lnL w="0" cap="flat" cmpd="sng" algn="ctr">
+                      <a:noFill/>
+                    </a:lnL>
+                    <a:lnR w="0" cap="flat" cmpd="sng" algn="ctr">
+                      <a:noFill/>
+                    </a:lnR>
+                    <a:lnT w="0" cap="flat" cmpd="sng" algn="ctr">
+                      <a:noFill/>
+                    </a:lnT>
+                    <a:lnB w="3175" cap="flat" cmpd="sng" algn="ctr">
+                      <a:solidFill>
+                        <a:srgbClr val="D0D8E8"/>
+                      </a:solidFill>
+                      <a:prstDash val="solid"/>
+                      <a:round/>
+                      <a:headEnd type="none" w="med" len="med"/>
+                      <a:tailEnd type="none" w="med" len="med"/>
+                    </a:lnB>
+                    <a:solidFill>
+                      <a:srgbClr val="FFFFFF"/>
+                    </a:solidFill>
+                  </a:tcPr>
+                </a:tc>
+                <a:tc>
+                  <a:txBody>
+                    <a:bodyPr/>
+                    <a:lstStyle/>
+                    <a:p>
                       <a:pPr algn="r" indent="0" marL="0">
                         <a:buNone/>
                       </a:pPr>
@@ -15523,7 +16176,107 @@
                           <a:ea typeface="Consolas" pitchFamily="34" charset="-122"/>
                           <a:cs typeface="Consolas" pitchFamily="34" charset="-120"/>
                         </a:rPr>
-                        <a:t>12,990</a:t>
+                        <a:t>12,190</a:t>
+                      </a:r>
+                      <a:endParaRPr lang="en-US" sz="1100" dirty="0">
+                        <a:latin typeface="Consolas" charset="0"/>
+                        <a:ea typeface="Consolas" charset="0"/>
+                        <a:cs typeface="Consolas" charset="0"/>
+                      </a:endParaRPr>
+                    </a:p>
+                  </a:txBody>
+                  <a:tcPr marL="91440" marR="91440" marT="45720" marB="45720" anchor="ctr">
+                    <a:lnL w="0" cap="flat" cmpd="sng" algn="ctr">
+                      <a:noFill/>
+                    </a:lnL>
+                    <a:lnR w="0" cap="flat" cmpd="sng" algn="ctr">
+                      <a:noFill/>
+                    </a:lnR>
+                    <a:lnT w="0" cap="flat" cmpd="sng" algn="ctr">
+                      <a:noFill/>
+                    </a:lnT>
+                    <a:lnB w="3175" cap="flat" cmpd="sng" algn="ctr">
+                      <a:solidFill>
+                        <a:srgbClr val="D0D8E8"/>
+                      </a:solidFill>
+                      <a:prstDash val="solid"/>
+                      <a:round/>
+                      <a:headEnd type="none" w="med" len="med"/>
+                      <a:tailEnd type="none" w="med" len="med"/>
+                    </a:lnB>
+                    <a:solidFill>
+                      <a:srgbClr val="FFFFFF"/>
+                    </a:solidFill>
+                  </a:tcPr>
+                </a:tc>
+                <a:tc>
+                  <a:txBody>
+                    <a:bodyPr/>
+                    <a:lstStyle/>
+                    <a:p>
+                      <a:pPr algn="r" indent="0" marL="0">
+                        <a:buNone/>
+                      </a:pPr>
+                      <a:r>
+                        <a:rPr lang="en-US" sz="1100" dirty="0">
+                          <a:solidFill>
+                            <a:srgbClr val="334155"/>
+                          </a:solidFill>
+                          <a:latin typeface="Consolas" pitchFamily="34" charset="0"/>
+                          <a:ea typeface="Consolas" pitchFamily="34" charset="-122"/>
+                          <a:cs typeface="Consolas" pitchFamily="34" charset="-120"/>
+                        </a:rPr>
+                        <a:t>12,440</a:t>
+                      </a:r>
+                      <a:endParaRPr lang="en-US" sz="1100" dirty="0">
+                        <a:latin typeface="Consolas" charset="0"/>
+                        <a:ea typeface="Consolas" charset="0"/>
+                        <a:cs typeface="Consolas" charset="0"/>
+                      </a:endParaRPr>
+                    </a:p>
+                  </a:txBody>
+                  <a:tcPr marL="91440" marR="91440" marT="45720" marB="45720" anchor="ctr">
+                    <a:lnL w="0" cap="flat" cmpd="sng" algn="ctr">
+                      <a:noFill/>
+                    </a:lnL>
+                    <a:lnR w="0" cap="flat" cmpd="sng" algn="ctr">
+                      <a:noFill/>
+                    </a:lnR>
+                    <a:lnT w="0" cap="flat" cmpd="sng" algn="ctr">
+                      <a:noFill/>
+                    </a:lnT>
+                    <a:lnB w="3175" cap="flat" cmpd="sng" algn="ctr">
+                      <a:solidFill>
+                        <a:srgbClr val="D0D8E8"/>
+                      </a:solidFill>
+                      <a:prstDash val="solid"/>
+                      <a:round/>
+                      <a:headEnd type="none" w="med" len="med"/>
+                      <a:tailEnd type="none" w="med" len="med"/>
+                    </a:lnB>
+                    <a:solidFill>
+                      <a:srgbClr val="FFFFFF"/>
+                    </a:solidFill>
+                  </a:tcPr>
+                </a:tc>
+                <a:tc>
+                  <a:txBody>
+                    <a:bodyPr/>
+                    <a:lstStyle/>
+                    <a:p>
+                      <a:pPr algn="r" indent="0" marL="0">
+                        <a:buNone/>
+                      </a:pPr>
+                      <a:r>
+                        <a:rPr lang="en-US" sz="1100" dirty="0">
+                          <a:solidFill>
+                            <a:srgbClr val="334155"/>
+                          </a:solidFill>
+                          <a:latin typeface="Consolas" pitchFamily="34" charset="0"/>
+                          <a:ea typeface="Consolas" pitchFamily="34" charset="-122"/>
+                          <a:cs typeface="Consolas" pitchFamily="34" charset="-120"/>
+                        </a:rPr>
+                        <a:t>12,315</a:t>
                       </a:r>
                       <a:endParaRPr lang="en-US" sz="1100" dirty="0">
                         <a:latin typeface="Consolas" charset="0"/>
@@ -15575,7 +16328,63 @@
                           <a:ea typeface="Consolas" pitchFamily="34" charset="-122"/>
                           <a:cs typeface="Consolas" pitchFamily="34" charset="-120"/>
                         </a:rPr>
-                        <a:t>Probability-weighted FY+1 revenue</a:t>
+                        <a:t>Weighted</a:t>
+                      </a:r>
+                      <a:endParaRPr lang="en-US" sz="1100" dirty="0">
+                        <a:latin typeface="Consolas" charset="0"/>
+                        <a:ea typeface="Consolas" charset="0"/>
+                        <a:cs typeface="Consolas" charset="0"/>
+                      </a:endParaRPr>
+                    </a:p>
+                  </a:txBody>
+                  <a:tcPr marL="91440" marR="91440" marT="45720" marB="45720" anchor="ctr">
+                    <a:lnL w="0" cap="flat" cmpd="sng" algn="ctr">
+                      <a:noFill/>
+                    </a:lnL>
+                    <a:lnR w="0" cap="flat" cmpd="sng" algn="ctr">
+                      <a:noFill/>
+                    </a:lnR>
+                    <a:lnT w="12700" cap="flat" cmpd="sng" algn="ctr">
+                      <a:solidFill>
+                        <a:srgbClr val="1B2A4A"/>
+                      </a:solidFill>
+                      <a:prstDash val="solid"/>
+                      <a:round/>
+                      <a:headEnd type="none" w="med" len="med"/>
+                      <a:tailEnd type="none" w="med" len="med"/>
+                    </a:lnT>
+                    <a:lnB w="12700" cap="flat" cmpd="sng" algn="ctr">
+                      <a:solidFill>
+                        <a:srgbClr val="1B2A4A"/>
+                      </a:solidFill>
+                      <a:prstDash val="solid"/>
+                      <a:round/>
+                      <a:headEnd type="none" w="med" len="med"/>
+                      <a:tailEnd type="none" w="med" len="med"/>
+                    </a:lnB>
+                    <a:solidFill>
+                      <a:srgbClr val="E8ECF0"/>
+                    </a:solidFill>
+                  </a:tcPr>
+                </a:tc>
+                <a:tc>
+                  <a:txBody>
+                    <a:bodyPr/>
+                    <a:lstStyle/>
+                    <a:p>
+                      <a:pPr algn="r" indent="0" marL="0">
+                        <a:buNone/>
+                      </a:pPr>
+                      <a:r>
+                        <a:rPr lang="en-US" sz="1100" b="1" dirty="0">
+                          <a:solidFill>
+                            <a:srgbClr val="1B2A4A"/>
+                          </a:solidFill>
+                          <a:latin typeface="Consolas" pitchFamily="34" charset="0"/>
+                          <a:ea typeface="Consolas" pitchFamily="34" charset="-122"/>
+                          <a:cs typeface="Consolas" pitchFamily="34" charset="-120"/>
+                        </a:rPr>
+                        <a:t>Probability-weighted expectation</a:t>
                       </a:r>
                       <a:endParaRPr lang="en-US" sz="1100" dirty="0">
                         <a:latin typeface="Consolas" charset="0"/>
@@ -15757,6 +16566,51 @@
                       <a:pPr algn="r" indent="0" marL="0">
                         <a:buNone/>
                       </a:pPr>
+                      <a:endParaRPr lang="en-US" sz="1100" dirty="0">
+                        <a:latin typeface="Consolas" charset="0"/>
+                        <a:ea typeface="Consolas" charset="0"/>
+                        <a:cs typeface="Consolas" charset="0"/>
+                      </a:endParaRPr>
+                    </a:p>
+                  </a:txBody>
+                  <a:tcPr marL="91440" marR="91440" marT="45720" marB="45720" anchor="ctr">
+                    <a:lnL w="0" cap="flat" cmpd="sng" algn="ctr">
+                      <a:noFill/>
+                    </a:lnL>
+                    <a:lnR w="0" cap="flat" cmpd="sng" algn="ctr">
+                      <a:noFill/>
+                    </a:lnR>
+                    <a:lnT w="12700" cap="flat" cmpd="sng" algn="ctr">
+                      <a:solidFill>
+                        <a:srgbClr val="1B2A4A"/>
+                      </a:solidFill>
+                      <a:prstDash val="solid"/>
+                      <a:round/>
+                      <a:headEnd type="none" w="med" len="med"/>
+                      <a:tailEnd type="none" w="med" len="med"/>
+                    </a:lnT>
+                    <a:lnB w="12700" cap="flat" cmpd="sng" algn="ctr">
+                      <a:solidFill>
+                        <a:srgbClr val="1B2A4A"/>
+                      </a:solidFill>
+                      <a:prstDash val="solid"/>
+                      <a:round/>
+                      <a:headEnd type="none" w="med" len="med"/>
+                      <a:tailEnd type="none" w="med" len="med"/>
+                    </a:lnB>
+                    <a:solidFill>
+                      <a:srgbClr val="E8ECF0"/>
+                    </a:solidFill>
+                  </a:tcPr>
+                </a:tc>
+                <a:tc>
+                  <a:txBody>
+                    <a:bodyPr/>
+                    <a:lstStyle/>
+                    <a:p>
+                      <a:pPr algn="r" indent="0" marL="0">
+                        <a:buNone/>
+                      </a:pPr>
                       <a:r>
                         <a:rPr lang="en-US" sz="1100" b="1" dirty="0">
                           <a:solidFill>
@@ -15766,7 +16620,7 @@
                           <a:ea typeface="Consolas" pitchFamily="34" charset="-122"/>
                           <a:cs typeface="Consolas" pitchFamily="34" charset="-120"/>
                         </a:rPr>
-                        <a:t>12,200</a:t>
+                        <a:t>12,016</a:t>
                       </a:r>
                       <a:endParaRPr lang="en-US" sz="1100" dirty="0">
                         <a:latin typeface="Consolas" charset="0"/>
@@ -16347,7 +17201,7 @@
                 <a:ea typeface="Calibri" pitchFamily="34" charset="-122"/>
                 <a:cs typeface="Calibri" pitchFamily="34" charset="-120"/>
               </a:rPr>
-              <a:t>Classification (GICS) · Porter Five Forces · PESTLE · generic strategies · industry life cycle</a:t>
+              <a:t>Classification (GICS / ICB / TRBC) · Porter Five Forces · how to rank them · PESTLE · three generic strategies</a:t>
             </a:r>
             <a:endParaRPr lang="en-US" sz="1100" dirty="0"/>
           </a:p>
@@ -16890,7 +17744,7 @@
                 <a:ea typeface="Calibri" pitchFamily="34" charset="-122"/>
                 <a:cs typeface="Calibri" pitchFamily="34" charset="-120"/>
               </a:rPr>
-              <a:t>Source: CFA Institute, Curriculum Vol 5, Learning Module 7, Example 4 "Tablet Cannibalization", pp. 319–323.</a:t>
+              <a:t>Source: CFA Institute, Curriculum Vol 5, Learning Module 7, Example 4, Exhibits 13 &amp; 17 and the Knowledge Check, pp. 319–325.</a:t>
             </a:r>
             <a:endParaRPr lang="en-US" sz="750" dirty="0"/>
           </a:p>
@@ -16932,7 +17786,7 @@
                 <a:ea typeface="Calibri" pitchFamily="34" charset="-122"/>
                 <a:cs typeface="Calibri" pitchFamily="34" charset="-120"/>
               </a:rPr>
-              <a:t>At the start of 2012, one year after iPad launch — the question: what fraction of PC sales will tablets replace, and what does that cost Microsoft?</a:t>
+              <a:t>Set at the start of 2012, just over a year after the iPad launched. The question: what share of PC sales do tablets replace, and what does that cost Microsoft?</a:t>
             </a:r>
             <a:endParaRPr lang="en-US" sz="1300" dirty="0"/>
           </a:p>
@@ -16986,7 +17840,7 @@
                           <a:ea typeface="Trebuchet MS" pitchFamily="34" charset="-122"/>
                           <a:cs typeface="Trebuchet MS" pitchFamily="34" charset="-120"/>
                         </a:rPr>
-                        <a:t>Row</a:t>
+                        <a:t>Row (thousands of units unless noted)</a:t>
                       </a:r>
                       <a:endParaRPr lang="en-US" sz="1100" dirty="0">
                         <a:latin typeface="Trebuchet MS" charset="0"/>
@@ -17288,7 +18142,7 @@
                           <a:ea typeface="Calibri" pitchFamily="34" charset="-122"/>
                           <a:cs typeface="Calibri" pitchFamily="34" charset="-120"/>
                         </a:rPr>
-                        <a:t>Pre-cannib. PC shipments (k)</a:t>
+                        <a:t>Pre-cannibalisation PC shipments</a:t>
                       </a:r>
                       <a:endParaRPr lang="en-US" sz="1100" dirty="0">
                         <a:latin typeface="Calibri" charset="0"/>
@@ -17590,7 +18444,7 @@
                           <a:ea typeface="Calibri" pitchFamily="34" charset="-122"/>
                           <a:cs typeface="Calibri" pitchFamily="34" charset="-120"/>
                         </a:rPr>
-                        <a:t>Tablet shipments (k)</a:t>
+                        <a:t>Tablet shipments</a:t>
                       </a:r>
                       <a:endParaRPr lang="en-US" sz="1100" dirty="0">
                         <a:latin typeface="Calibri" charset="0"/>
@@ -17892,7 +18746,7 @@
                           <a:ea typeface="Calibri" pitchFamily="34" charset="-122"/>
                           <a:cs typeface="Calibri" pitchFamily="34" charset="-120"/>
                         </a:rPr>
-                        <a:t>Cannib. factor (consumer / non-consumer)</a:t>
+                        <a:t>Cannib. factor, consumer / non-consumer</a:t>
                       </a:r>
                       <a:endParaRPr lang="en-US" sz="1100" dirty="0">
                         <a:latin typeface="Calibri" charset="0"/>
@@ -18194,7 +19048,7 @@
                           <a:ea typeface="Calibri" pitchFamily="34" charset="-122"/>
                           <a:cs typeface="Calibri" pitchFamily="34" charset="-120"/>
                         </a:rPr>
-                        <a:t>PCs cannibalized (k)</a:t>
+                        <a:t>PCs cannibalised by tablets</a:t>
                       </a:r>
                       <a:endParaRPr lang="en-US" sz="1100" dirty="0">
                         <a:latin typeface="Calibri" charset="0"/>
@@ -18496,7 +19350,7 @@
                           <a:ea typeface="Calibri" pitchFamily="34" charset="-122"/>
                           <a:cs typeface="Calibri" pitchFamily="34" charset="-120"/>
                         </a:rPr>
-                        <a:t>MSFT revenue impact (USD m, ASP 85 cons / 155 non)</a:t>
+                        <a:t>MSFT revenue lost (USD m, ASP 85 / 155)</a:t>
                       </a:r>
                       <a:endParaRPr lang="en-US" sz="1100" dirty="0">
                         <a:latin typeface="Calibri" charset="0"/>
@@ -18860,7 +19714,7 @@
                 <a:ea typeface="Trebuchet MS" pitchFamily="34" charset="-122"/>
                 <a:cs typeface="Trebuchet MS" pitchFamily="34" charset="-120"/>
               </a:rPr>
-              <a:t>BASE-CASE TAKEAWAY</a:t>
+              <a:t>WHAT THE SCENARIO ACTUALLY BUYS YOU</a:t>
             </a:r>
             <a:endParaRPr lang="en-US" sz="1100" dirty="0"/>
           </a:p>
@@ -18902,7 +19756,7 @@
                 <a:ea typeface="Calibri" pitchFamily="34" charset="-122"/>
                 <a:cs typeface="Calibri" pitchFamily="34" charset="-120"/>
               </a:rPr>
-              <a:t>Under the base case (30% consumer / 10% non-consumer cannibalization), Microsoft loses ~USD 2.2 bn of PC-OS + Office revenue in FY12, growing to ~USD 4.2 bn by FY14. Bear case (40%/15%) extrapolates to USD 6 bn+; bull case (20%/5%) halves the damage. The analyst's recommendation depends on which scenario is priced in.</a:t>
+              <a:t>Base case (30% / 10%): Microsoft loses ~USD 2.2 bn of revenue in FY12, rising to USD 4.2 bn by FY14 — and with ~70% of its cost base fixed, that FY14 hit becomes USD 2.6 bn of operating income, 96 bps of margin and USD 0.25 of EPS. Move the factors to 40% / 15% and FY12 goes from 2.2 to 3.0 bn. The call turns on which is priced in.</a:t>
             </a:r>
             <a:endParaRPr lang="en-US" sz="1200" dirty="0"/>
           </a:p>
@@ -19808,7 +20662,7 @@
                 <a:ea typeface="Calibri" pitchFamily="34" charset="-122"/>
                 <a:cs typeface="Calibri" pitchFamily="34" charset="-120"/>
               </a:rPr>
-              <a:t>Metrics:</a:t>
+              <a:t>Equity level: P/E, P/B, P/S, P/CF</a:t>
             </a:r>
             <a:endParaRPr lang="en-US" sz="1100" dirty="0"/>
           </a:p>
@@ -19825,8 +20679,14 @@
                 <a:ea typeface="Calibri" pitchFamily="34" charset="-122"/>
                 <a:cs typeface="Calibri" pitchFamily="34" charset="-120"/>
               </a:rPr>
-              <a:t>• P/E, P/B, P/S, P/CF</a:t>
-            </a:r>
+              <a:t>Enterprise level: EV/EBITDA, EV/Sales, EV/Operating income</a:t>
+            </a:r>
+            <a:endParaRPr lang="en-US" sz="1100" dirty="0"/>
+          </a:p>
+          <a:p>
+            <a:pPr algn="l" indent="0" marL="0">
+              <a:buNone/>
+            </a:pPr>
             <a:endParaRPr lang="en-US" sz="1100" dirty="0"/>
           </a:p>
           <a:p>
@@ -19842,7 +20702,7 @@
                 <a:ea typeface="Calibri" pitchFamily="34" charset="-122"/>
                 <a:cs typeface="Calibri" pitchFamily="34" charset="-120"/>
               </a:rPr>
-              <a:t>• EV/EBITDA, EV/Sales, EV/Op. Income</a:t>
+              <a:t>Trailing or forward — either is fine, provided it is the SAME basis across every company compared.</a:t>
             </a:r>
             <a:endParaRPr lang="en-US" sz="1100" dirty="0"/>
           </a:p>
@@ -19865,7 +20725,7 @@
                 <a:ea typeface="Calibri" pitchFamily="34" charset="-122"/>
                 <a:cs typeface="Calibri" pitchFamily="34" charset="-120"/>
               </a:rPr>
-              <a:t>Best for:</a:t>
+              <a:t>Weakness:</a:t>
             </a:r>
             <a:endParaRPr lang="en-US" sz="1100" dirty="0"/>
           </a:p>
@@ -19882,47 +20742,7 @@
                 <a:ea typeface="Calibri" pitchFamily="34" charset="-122"/>
                 <a:cs typeface="Calibri" pitchFamily="34" charset="-120"/>
               </a:rPr>
-              <a:t>Cross-sectional comparison within industry; quick screen for over-/under-valuation.</a:t>
-            </a:r>
-            <a:endParaRPr lang="en-US" sz="1100" dirty="0"/>
-          </a:p>
-          <a:p>
-            <a:pPr algn="l" indent="0" marL="0">
-              <a:buNone/>
-            </a:pPr>
-            <a:endParaRPr lang="en-US" sz="1100" dirty="0"/>
-          </a:p>
-          <a:p>
-            <a:pPr algn="l" indent="0" marL="0">
-              <a:buNone/>
-            </a:pPr>
-            <a:r>
-              <a:rPr lang="en-US" sz="1100" dirty="0">
-                <a:solidFill>
-                  <a:srgbClr val="334155"/>
-                </a:solidFill>
-                <a:latin typeface="Calibri" pitchFamily="34" charset="0"/>
-                <a:ea typeface="Calibri" pitchFamily="34" charset="-122"/>
-                <a:cs typeface="Calibri" pitchFamily="34" charset="-120"/>
-              </a:rPr>
-              <a:t>Weakness:</a:t>
-            </a:r>
-            <a:endParaRPr lang="en-US" sz="1100" dirty="0"/>
-          </a:p>
-          <a:p>
-            <a:pPr algn="l" indent="0" marL="0">
-              <a:buNone/>
-            </a:pPr>
-            <a:r>
-              <a:rPr lang="en-US" sz="1100" dirty="0">
-                <a:solidFill>
-                  <a:srgbClr val="334155"/>
-                </a:solidFill>
-                <a:latin typeface="Calibri" pitchFamily="34" charset="0"/>
-                <a:ea typeface="Calibri" pitchFamily="34" charset="-122"/>
-                <a:cs typeface="Calibri" pitchFamily="34" charset="-120"/>
-              </a:rPr>
-              <a:t>Assumes peers correctly priced; accounting noise; cyclicality distorts denominators.</a:t>
+              <a:t>Assumes peers are correctly priced; accounting noise; cyclicality distorts the denominator.</a:t>
             </a:r>
             <a:endParaRPr lang="en-US" sz="1100" dirty="0"/>
           </a:p>
@@ -20086,7 +20906,7 @@
                 <a:ea typeface="Calibri" pitchFamily="34" charset="-122"/>
                 <a:cs typeface="Calibri" pitchFamily="34" charset="-120"/>
               </a:rPr>
-              <a:t>• Holding companies, REITs, closed-end funds</a:t>
+              <a:t>• Financial companies</a:t>
             </a:r>
             <a:endParaRPr lang="en-US" sz="1100" dirty="0"/>
           </a:p>
@@ -20103,7 +20923,7 @@
                 <a:ea typeface="Calibri" pitchFamily="34" charset="-122"/>
                 <a:cs typeface="Calibri" pitchFamily="34" charset="-120"/>
               </a:rPr>
-              <a:t>• Natural-resource and financial firms</a:t>
+              <a:t>• Natural-resource companies</a:t>
             </a:r>
             <a:endParaRPr lang="en-US" sz="1100" dirty="0"/>
           </a:p>
@@ -20120,7 +20940,7 @@
                 <a:ea typeface="Calibri" pitchFamily="34" charset="-122"/>
                 <a:cs typeface="Calibri" pitchFamily="34" charset="-120"/>
               </a:rPr>
-              <a:t>• Liquidations, takeover floors</a:t>
+              <a:t>• Former going concerns being liquidated</a:t>
             </a:r>
             <a:endParaRPr lang="en-US" sz="1100" dirty="0"/>
           </a:p>
@@ -20160,7 +20980,7 @@
                 <a:ea typeface="Calibri" pitchFamily="34" charset="-122"/>
                 <a:cs typeface="Calibri" pitchFamily="34" charset="-120"/>
               </a:rPr>
-              <a:t>Ignores intangibles (brands, people, growth). Provides a floor, not a going-concern value.</a:t>
+              <a:t>Ignores intangibles (brands, people, growth) and is hard where PP&amp;E has no observable price. A floor, not a going-concern value.</a:t>
             </a:r>
             <a:endParaRPr lang="en-US" sz="1100" dirty="0"/>
           </a:p>
@@ -20371,7 +21191,7 @@
                 <a:ea typeface="Calibri" pitchFamily="34" charset="-122"/>
                 <a:cs typeface="Calibri" pitchFamily="34" charset="-120"/>
               </a:rPr>
-              <a:t>Source: CFA Institute, Curriculum Vol 5, Learning Module 8, §5 "DDM and FCFE Model", pp. 343–347.</a:t>
+              <a:t>Source: CFA Institute, Curriculum Vol 5, Learning Module 8, §5 "Dividend Discount Model (DDM) and Free-Cash-Flow-to-Equity Model (FCFE)", Eqs. 1 &amp; 4, pp. 343–345.</a:t>
             </a:r>
             <a:endParaRPr lang="en-US" sz="750" dirty="0"/>
           </a:p>
@@ -20413,7 +21233,7 @@
                 <a:ea typeface="Calibri" pitchFamily="34" charset="-122"/>
                 <a:cs typeface="Calibri" pitchFamily="34" charset="-120"/>
               </a:rPr>
-              <a:t>Mature dividend-payer with stable payout? DDM. Young firm, non-payer, or levered firm with large buybacks? FCFE.</a:t>
+              <a:t>Mature dividend-payer with a stable payout? DDM. Young firm, non-payer, or heavy buybacks? FCFE. Both are equity-level, so both discount at the cost of equity.</a:t>
             </a:r>
             <a:endParaRPr lang="en-US" sz="1300" dirty="0"/>
           </a:p>
@@ -20475,7 +21295,7 @@
                 <a:ea typeface="Consolas" pitchFamily="34" charset="-122"/>
                 <a:cs typeface="Consolas" pitchFamily="34" charset="-120"/>
               </a:rPr>
-              <a:t>V₀  =  Σ  Dₜ / (1 + r)ᵗ           FCFE  =  CFO  −  FCInv  +  Net borrowing</a:t>
+              <a:t>V₀ = Σ Dₜ / (1 + r)ᵗ     FCFE = CFO − FCInv + Net borrowing</a:t>
             </a:r>
             <a:endParaRPr lang="en-US" sz="1800" dirty="0"/>
           </a:p>
@@ -20517,7 +21337,7 @@
                 <a:ea typeface="Calibri" pitchFamily="34" charset="-122"/>
                 <a:cs typeface="Calibri" pitchFamily="34" charset="-120"/>
               </a:rPr>
-              <a:t>where: Dₜ = expected dividend in year t; r = required return on equity; FCInv = fixed-capital investment (capex); Net borrowing = new debt − repayments.</a:t>
+              <a:t>where: Dₜ = expected dividend in year t; r = required return on EQUITY; FCInv = capex; Net borrowing = new debt − repayments.</a:t>
             </a:r>
             <a:endParaRPr lang="en-US" sz="1100" dirty="0"/>
           </a:p>
@@ -20839,7 +21659,7 @@
                 <a:ea typeface="Calibri" pitchFamily="34" charset="-122"/>
                 <a:cs typeface="Calibri" pitchFamily="34" charset="-120"/>
               </a:rPr>
-              <a:t>• The firm doesn't pay dividends (Amazon, Meta pre-2022)</a:t>
+              <a:t>• The firm doesn't pay dividends (Amazon; Meta pre-2024)</a:t>
             </a:r>
             <a:endParaRPr lang="en-US" sz="1200" dirty="0"/>
           </a:p>
@@ -20913,7 +21733,7 @@
                 <a:ea typeface="Calibri" pitchFamily="34" charset="-122"/>
                 <a:cs typeface="Calibri" pitchFamily="34" charset="-120"/>
               </a:rPr>
-              <a:t>FCFE requires forecasting CFO, capex, working capital, and net borrowing — more inputs but less arbitrary.</a:t>
+              <a:t>FCFE needs CFO, capex, working capital and net borrowing — more inputs, but far less arbitrary than guessing when a dividend starts.</a:t>
             </a:r>
             <a:endParaRPr lang="en-US" sz="1200" dirty="0"/>
           </a:p>
@@ -21121,7 +21941,7 @@
                 <a:ea typeface="Calibri" pitchFamily="34" charset="-122"/>
                 <a:cs typeface="Calibri" pitchFamily="34" charset="-120"/>
               </a:rPr>
-              <a:t>¹ The numerator in the Gordon formula is D₁ (next-year dividend), not D₀. Using the wrong numerator is a common mistake.
+              <a:t>¹ The numerator is D₁, the NEXT-year dividend — either D₀(1+g) or a forecast D₁. Putting D₀ on top is the single most common error here.
 </a:t>
             </a:r>
             <a:pPr indent="0" marL="0">
@@ -21136,7 +21956,7 @@
                 <a:ea typeface="Calibri" pitchFamily="34" charset="-122"/>
                 <a:cs typeface="Calibri" pitchFamily="34" charset="-120"/>
               </a:rPr>
-              <a:t>² Sustainable growth check: g = b × ROE, with b = retention rate = 1 − payout. Siemens implied g ≈ 8.5% using 5-year average — higher than the dividend-growth estimate of 5.4%.
+              <a:t>² Sanity check g with b × ROE: Siemens' 5-year average retention × ROE gives ≈ 0.49 × 17.3% ≈ 8.5%, well above the 5.4% dividend-growth estimate.
 </a:t>
             </a:r>
             <a:endParaRPr lang="en-US" sz="1000" dirty="0"/>
@@ -21179,7 +21999,7 @@
                 <a:ea typeface="Calibri" pitchFamily="34" charset="-122"/>
                 <a:cs typeface="Calibri" pitchFamily="34" charset="-120"/>
               </a:rPr>
-              <a:t>Source: CFA Institute, Curriculum Vol 5, Learning Module 8, §7 "Gordon Growth Model", Example 7, pp. 349–352.</a:t>
+              <a:t>Source: CFA Institute, Curriculum Vol 5, Learning Module 8, §7 "The Gordon Growth Model", Example 7 and Exhibit 4, pp. 350–352.</a:t>
             </a:r>
             <a:endParaRPr lang="en-US" sz="750" dirty="0"/>
           </a:p>
@@ -21221,7 +22041,7 @@
                 <a:ea typeface="Calibri" pitchFamily="34" charset="-122"/>
                 <a:cs typeface="Calibri" pitchFamily="34" charset="-120"/>
               </a:rPr>
-              <a:t>Cross-reference Deck 01 Shipline — there we used D₀ = 2.00, r = 10%, g = 6%→3%. Here CFA uses Siemens with D₀ = 3.70, r = 7.5%, g = 5.4%.</a:t>
+              <a:t>Deck 01 did this on Shipline: D₀ = 1.50, r = 15%, g = 6% → GBP 17.67. Same formula, different inputs — here CFA uses Siemens, D₀ = 3.70, r = 7.5%, g = 5.4%.</a:t>
             </a:r>
             <a:endParaRPr lang="en-US" sz="1300" dirty="0"/>
           </a:p>
@@ -21339,8 +22159,8 @@
         </p:nvSpPr>
         <p:spPr>
           <a:xfrm>
-            <a:off x="320040" y="2286000"/>
-            <a:ext cx="4937760" cy="2011680"/>
+            <a:off x="320040" y="2194560"/>
+            <a:ext cx="4937760" cy="1965960"/>
           </a:xfrm>
           <a:prstGeom prst="rect">
             <a:avLst/>
@@ -21364,7 +22184,7 @@
         </p:nvSpPr>
         <p:spPr>
           <a:xfrm>
-            <a:off x="457200" y="2331720"/>
+            <a:off x="457200" y="2240280"/>
             <a:ext cx="4663440" cy="256032"/>
           </a:xfrm>
           <a:prstGeom prst="rect">
@@ -21406,7 +22226,7 @@
         </p:nvSpPr>
         <p:spPr>
           <a:xfrm>
-            <a:off x="457200" y="2624328"/>
+            <a:off x="457200" y="2532888"/>
             <a:ext cx="4663440" cy="457200"/>
           </a:xfrm>
           <a:prstGeom prst="rect">
@@ -21434,7 +22254,7 @@
                 <a:ea typeface="Calibri" pitchFamily="34" charset="-122"/>
                 <a:cs typeface="Calibri" pitchFamily="34" charset="-120"/>
               </a:rPr>
-              <a:t>Most recent dividend D₀ = 3.70. Dividend growth 2013→2017 averaged 5.4%. Required return estimated at 7.5%.</a:t>
+              <a:t>Most recent dividend D₀ = €3.70. Dividends grew 5.4% p.a. over 2013–2017 [3.00(1+g)⁴ = 3.70]. Required return estimated at 7.5%.</a:t>
             </a:r>
             <a:endParaRPr lang="en-US" sz="1200" dirty="0"/>
           </a:p>
@@ -21448,8 +22268,8 @@
         </p:nvSpPr>
         <p:spPr>
           <a:xfrm>
-            <a:off x="457200" y="3136392"/>
-            <a:ext cx="4663440" cy="649224"/>
+            <a:off x="457200" y="3044952"/>
+            <a:ext cx="4663440" cy="603504"/>
           </a:xfrm>
           <a:prstGeom prst="rect">
             <a:avLst/>
@@ -21471,7 +22291,7 @@
               <a:buNone/>
             </a:pPr>
             <a:r>
-              <a:rPr lang="en-US" sz="1150" b="1" dirty="0">
+              <a:rPr lang="en-US" sz="1100" b="1" dirty="0">
                 <a:solidFill>
                   <a:srgbClr val="1B2A4A"/>
                 </a:solidFill>
@@ -21488,7 +22308,7 @@
               <a:buNone/>
             </a:pPr>
             <a:r>
-              <a:rPr lang="en-US" sz="1150" dirty="0">
+              <a:rPr lang="en-US" sz="1100" dirty="0">
                 <a:solidFill>
                   <a:srgbClr val="334155"/>
                 </a:solidFill>
@@ -21506,7 +22326,7 @@
               <a:buNone/>
             </a:pPr>
             <a:r>
-              <a:rPr lang="en-US" sz="1150" b="1" dirty="0">
+              <a:rPr lang="en-US" sz="1100" b="1" dirty="0">
                 <a:solidFill>
                   <a:srgbClr val="1B2A4A"/>
                 </a:solidFill>
@@ -21523,7 +22343,7 @@
               <a:buNone/>
             </a:pPr>
             <a:r>
-              <a:rPr lang="en-US" sz="1150" dirty="0">
+              <a:rPr lang="en-US" sz="1100" dirty="0">
                 <a:solidFill>
                   <a:srgbClr val="334155"/>
                 </a:solidFill>
@@ -21541,7 +22361,7 @@
               <a:buNone/>
             </a:pPr>
             <a:r>
-              <a:rPr lang="en-US" sz="1150" b="1" dirty="0">
+              <a:rPr lang="en-US" sz="1100" b="1" dirty="0">
                 <a:solidFill>
                   <a:srgbClr val="1B2A4A"/>
                 </a:solidFill>
@@ -21558,7 +22378,7 @@
               <a:buNone/>
             </a:pPr>
             <a:r>
-              <a:rPr lang="en-US" sz="1150" dirty="0">
+              <a:rPr lang="en-US" sz="1100" dirty="0">
                 <a:solidFill>
                   <a:srgbClr val="334155"/>
                 </a:solidFill>
@@ -21568,7 +22388,7 @@
               </a:rPr>
               <a:t>V₀ = 3.90 / 0.021</a:t>
             </a:r>
-            <a:endParaRPr lang="en-US" sz="1150" dirty="0"/>
+            <a:endParaRPr lang="en-US" sz="1100" dirty="0"/>
           </a:p>
         </p:txBody>
       </p:sp>
@@ -21580,7 +22400,7 @@
         </p:nvSpPr>
         <p:spPr>
           <a:xfrm>
-            <a:off x="411480" y="3858768"/>
+            <a:off x="411480" y="3721608"/>
             <a:ext cx="4754880" cy="365760"/>
           </a:xfrm>
           <a:prstGeom prst="rect">
@@ -21600,7 +22420,7 @@
         </p:nvSpPr>
         <p:spPr>
           <a:xfrm>
-            <a:off x="457200" y="3858768"/>
+            <a:off x="457200" y="3721608"/>
             <a:ext cx="4663440" cy="365760"/>
           </a:xfrm>
           <a:prstGeom prst="rect">
@@ -21649,7 +22469,7 @@
           </p:nvPr>
         </p:nvGraphicFramePr>
         <p:xfrm>
-          <a:off x="5349240" y="2286000"/>
+          <a:off x="5349240" y="2194560"/>
           <a:ext cx="3474720" cy="914400"/>
         </p:xfrm>
         <a:graphic>
@@ -22881,7 +23701,7 @@
                 <a:ea typeface="Calibri" pitchFamily="34" charset="-122"/>
                 <a:cs typeface="Calibri" pitchFamily="34" charset="-120"/>
               </a:rPr>
-              <a:t>Source: CFA Institute, Curriculum Vol 5, Learning Module 8, §8 "Multistage DDMs", Example 10, pp. 354–358.</a:t>
+              <a:t>Source: CFA Institute, Curriculum Vol 5, Learning Module 8, §8 "Multistage Dividend Discount Models", Example 10, pp. 355–357.</a:t>
             </a:r>
             <a:endParaRPr lang="en-US" sz="750" dirty="0"/>
           </a:p>
@@ -22923,7 +23743,7 @@
                 <a:ea typeface="Calibri" pitchFamily="34" charset="-122"/>
                 <a:cs typeface="Calibri" pitchFamily="34" charset="-120"/>
               </a:rPr>
-              <a:t>IBM was a transitioning firm in 2018 — 5-year dividend growth 13.5%, but forecast 4.5% through 2023. Two-stage DDM designed for exactly this profile.</a:t>
+              <a:t>IBM in 2018: dividends had grown 13.5% p.a. over five years, but Value Line forecast 4.5% for 2015–2023. Two-stage DDM is built for exactly that profile.</a:t>
             </a:r>
             <a:endParaRPr lang="en-US" sz="1300" dirty="0"/>
           </a:p>
@@ -22985,7 +23805,7 @@
                 <a:ea typeface="Consolas" pitchFamily="34" charset="-122"/>
                 <a:cs typeface="Consolas" pitchFamily="34" charset="-120"/>
               </a:rPr>
-              <a:t>V₀  =  Σ_{t=1..n}  D₀(1+g_S)ᵗ / (1+r)ᵗ   +   [D_{n+1} / (r − g_L)] / (1+r)ⁿ</a:t>
+              <a:t>V₀ = Σ D₀(1+g_S)ᵗ/(1+r)ᵗ  +  [D_(n+1)/(r − g_L)]/(1+r)ⁿ</a:t>
             </a:r>
             <a:endParaRPr lang="en-US" sz="1800" dirty="0"/>
           </a:p>
@@ -23027,7 +23847,7 @@
                 <a:ea typeface="Calibri" pitchFamily="34" charset="-122"/>
                 <a:cs typeface="Calibri" pitchFamily="34" charset="-120"/>
               </a:rPr>
-              <a:t>where: g_S = short-term growth during stage 1 (n years); g_L = long-term sustainable growth; terminal value = Gordon perpetuity at end of stage 1.</a:t>
+              <a:t>where: g_S = stage-1 growth; g_L = long-run growth. D_{n+1} on top puts the terminal value at end of year n — discount n periods, not n+1.</a:t>
             </a:r>
             <a:endParaRPr lang="en-US" sz="1100" dirty="0"/>
           </a:p>
@@ -23042,7 +23862,7 @@
         <p:spPr>
           <a:xfrm>
             <a:off x="320040" y="2240280"/>
-            <a:ext cx="8503920" cy="2057400"/>
+            <a:ext cx="8503920" cy="2240280"/>
           </a:xfrm>
           <a:prstGeom prst="rect">
             <a:avLst/>
@@ -23136,7 +23956,7 @@
                 <a:ea typeface="Calibri" pitchFamily="34" charset="-122"/>
                 <a:cs typeface="Calibri" pitchFamily="34" charset="-120"/>
               </a:rPr>
-              <a:t>D₂₀₁₈ = USD 6.21. g_S = 5% for one year (aligned with Value Line 2019 forecast). g_L = 2.33% thereafter (produces 8-y CAGR of 4.5%, matching forecast). r from CAPM: 2% + 0.95 × 5% = 6.75%.</a:t>
+              <a:t>D₂₀₁₈ = USD 6.21. g_S = 5% for one year, then g_L = 2.33% forever (produces the 8-y CAGR of 4.5% Value Line forecasts). r from CAPM: 2% + 0.95 × 5% = 6.75%. CFA carries two explicit dividends, so n = 2.</a:t>
             </a:r>
             <a:endParaRPr lang="en-US" sz="1200" dirty="0"/>
           </a:p>
@@ -23151,7 +23971,7 @@
         <p:spPr>
           <a:xfrm>
             <a:off x="457200" y="3090672"/>
-            <a:ext cx="8229600" cy="694944"/>
+            <a:ext cx="8229600" cy="877824"/>
           </a:xfrm>
           <a:prstGeom prst="rect">
             <a:avLst/>
@@ -23173,7 +23993,7 @@
               <a:buNone/>
             </a:pPr>
             <a:r>
-              <a:rPr lang="en-US" sz="1100" b="1" dirty="0">
+              <a:rPr lang="en-US" sz="1150" b="1" dirty="0">
                 <a:solidFill>
                   <a:srgbClr val="1B2A4A"/>
                 </a:solidFill>
@@ -23190,7 +24010,7 @@
               <a:buNone/>
             </a:pPr>
             <a:r>
-              <a:rPr lang="en-US" sz="1100" dirty="0">
+              <a:rPr lang="en-US" sz="1150" dirty="0">
                 <a:solidFill>
                   <a:srgbClr val="334155"/>
                 </a:solidFill>
@@ -23198,7 +24018,7 @@
                 <a:ea typeface="Calibri" pitchFamily="34" charset="-122"/>
                 <a:cs typeface="Calibri" pitchFamily="34" charset="-120"/>
               </a:rPr>
-              <a:t>D₂₀₁₉ = 6.21 × 1.05 = 6.5205
+              <a:t>D₂₀₁₉ = 6.21 × 1.05 = 6.5205        D₂₀₂₀ = 6.5205 × 1.0233 = 6.6724
 </a:t>
             </a:r>
             <a:pPr indent="0" marL="0">
@@ -23208,7 +24028,7 @@
               <a:buNone/>
             </a:pPr>
             <a:r>
-              <a:rPr lang="en-US" sz="1100" b="1" dirty="0">
+              <a:rPr lang="en-US" sz="1150" b="1" dirty="0">
                 <a:solidFill>
                   <a:srgbClr val="1B2A4A"/>
                 </a:solidFill>
@@ -23225,7 +24045,7 @@
               <a:buNone/>
             </a:pPr>
             <a:r>
-              <a:rPr lang="en-US" sz="1100" dirty="0">
+              <a:rPr lang="en-US" sz="1150" dirty="0">
                 <a:solidFill>
                   <a:srgbClr val="334155"/>
                 </a:solidFill>
@@ -23233,7 +24053,7 @@
                 <a:ea typeface="Calibri" pitchFamily="34" charset="-122"/>
                 <a:cs typeface="Calibri" pitchFamily="34" charset="-120"/>
               </a:rPr>
-              <a:t>D₂₀₂₀ = 6.21 × 1.05 × 1.0233 = 6.6724
+              <a:t>D₂₀₂₁ = 6.6724 × 1.0233 = 6.8279 — the first dividend of the perpetual-growth phase
 </a:t>
             </a:r>
             <a:pPr indent="0" marL="0">
@@ -23243,7 +24063,7 @@
               <a:buNone/>
             </a:pPr>
             <a:r>
-              <a:rPr lang="en-US" sz="1100" b="1" dirty="0">
+              <a:rPr lang="en-US" sz="1150" b="1" dirty="0">
                 <a:solidFill>
                   <a:srgbClr val="1B2A4A"/>
                 </a:solidFill>
@@ -23260,7 +24080,7 @@
               <a:buNone/>
             </a:pPr>
             <a:r>
-              <a:rPr lang="en-US" sz="1100" dirty="0">
+              <a:rPr lang="en-US" sz="1150" dirty="0">
                 <a:solidFill>
                   <a:srgbClr val="334155"/>
                 </a:solidFill>
@@ -23268,7 +24088,7 @@
                 <a:ea typeface="Calibri" pitchFamily="34" charset="-122"/>
                 <a:cs typeface="Calibri" pitchFamily="34" charset="-120"/>
               </a:rPr>
-              <a:t>V₂₀₁₉ (terminal at end of 2019) = D₂₀₂₀ / (r − g_L) = 6.6724 / (0.0675 − 0.0233) = 150.96
+              <a:t>V₂₀₂₀ = D₂₀₂₁ / (r − g_L) = 6.8279 / 0.0442 = 154.477 — struck at the END of 2020
 </a:t>
             </a:r>
             <a:pPr indent="0" marL="0">
@@ -23278,7 +24098,7 @@
               <a:buNone/>
             </a:pPr>
             <a:r>
-              <a:rPr lang="en-US" sz="1100" b="1" dirty="0">
+              <a:rPr lang="en-US" sz="1150" b="1" dirty="0">
                 <a:solidFill>
                   <a:srgbClr val="1B2A4A"/>
                 </a:solidFill>
@@ -23295,7 +24115,7 @@
               <a:buNone/>
             </a:pPr>
             <a:r>
-              <a:rPr lang="en-US" sz="1100" dirty="0">
+              <a:rPr lang="en-US" sz="1150" dirty="0">
                 <a:solidFill>
                   <a:srgbClr val="334155"/>
                 </a:solidFill>
@@ -23303,9 +24123,9 @@
                 <a:ea typeface="Calibri" pitchFamily="34" charset="-122"/>
                 <a:cs typeface="Calibri" pitchFamily="34" charset="-120"/>
               </a:rPr>
-              <a:t>V₂₀₁₈ = 6.5205 / 1.0675 + 150.96 / 1.0675 = 6.108 + 141.42 = USD 147.52</a:t>
-            </a:r>
-            <a:endParaRPr lang="en-US" sz="1100" dirty="0"/>
+              <a:t>V₂₀₁₈ = 6.5205/1.0675 + 6.6724/1.0675² + 154.477/1.0675² = USD 147.52</a:t>
+            </a:r>
+            <a:endParaRPr lang="en-US" sz="1150" dirty="0"/>
           </a:p>
         </p:txBody>
       </p:sp>
@@ -23317,7 +24137,7 @@
         </p:nvSpPr>
         <p:spPr>
           <a:xfrm>
-            <a:off x="411480" y="3858768"/>
+            <a:off x="411480" y="4041648"/>
             <a:ext cx="8321040" cy="365760"/>
           </a:xfrm>
           <a:prstGeom prst="rect">
@@ -23337,7 +24157,7 @@
         </p:nvSpPr>
         <p:spPr>
           <a:xfrm>
-            <a:off x="457200" y="3858768"/>
+            <a:off x="457200" y="4041648"/>
             <a:ext cx="8229600" cy="365760"/>
           </a:xfrm>
           <a:prstGeom prst="rect">
@@ -23548,6 +24368,46 @@
         </p:nvSpPr>
         <p:spPr>
           <a:xfrm>
+            <a:off x="320040" y="4471416"/>
+            <a:ext cx="8503920" cy="192024"/>
+          </a:xfrm>
+          <a:prstGeom prst="rect">
+            <a:avLst/>
+          </a:prstGeom>
+          <a:noFill/>
+          <a:ln/>
+        </p:spPr>
+        <p:txBody>
+          <a:bodyPr wrap="square" lIns="254" tIns="254" rIns="254" bIns="254" rtlCol="0" anchor="t"/>
+          <a:lstStyle/>
+          <a:p>
+            <a:pPr indent="0" marL="0">
+              <a:buNone/>
+            </a:pPr>
+            <a:r>
+              <a:rPr lang="en-US" sz="1000" dirty="0">
+                <a:solidFill>
+                  <a:srgbClr val="6B7A8D"/>
+                </a:solidFill>
+                <a:latin typeface="Calibri" pitchFamily="34" charset="0"/>
+                <a:ea typeface="Calibri" pitchFamily="34" charset="-122"/>
+                <a:cs typeface="Calibri" pitchFamily="34" charset="-120"/>
+              </a:rPr>
+              <a:t>¹ V₀ = Σ FCFEₜ /(1+r)ᵗ with a Gordon tail. Discount FCFE at WACC, or subtract net debt from an FCFE value, and you double-count the debt.
+</a:t>
+            </a:r>
+            <a:endParaRPr lang="en-US" sz="1000" dirty="0"/>
+          </a:p>
+        </p:txBody>
+      </p:sp>
+      <p:sp>
+        <p:nvSpPr>
+          <p:cNvPr id="8" name="Text 6"/>
+          <p:cNvSpPr txBox="1"/>
+          <p:nvPr/>
+        </p:nvSpPr>
+        <p:spPr>
+          <a:xfrm>
             <a:off x="320040" y="4663440"/>
             <a:ext cx="8503920" cy="201168"/>
           </a:xfrm>
@@ -23576,7 +24436,7 @@
                 <a:ea typeface="Calibri" pitchFamily="34" charset="-122"/>
                 <a:cs typeface="Calibri" pitchFamily="34" charset="-120"/>
               </a:rPr>
-              <a:t>Source: CFA Institute, Curriculum Vol 5, Learning Module 8, §5 "FCFE Model", pp. 345–347.</a:t>
+              <a:t>Source: CFA Institute, Curriculum Vol 5, Learning Module 8, §5 "FCFE Model", Eq. 4, pp. 344–345. Figures here are an illustrative build.</a:t>
             </a:r>
             <a:endParaRPr lang="en-US" sz="750" dirty="0"/>
           </a:p>
@@ -23584,7 +24444,7 @@
       </p:sp>
       <p:sp>
         <p:nvSpPr>
-          <p:cNvPr id="8" name="Text 6"/>
+          <p:cNvPr id="9" name="Text 7"/>
           <p:cNvSpPr txBox="1"/>
           <p:nvPr/>
         </p:nvSpPr>
@@ -23618,7 +24478,7 @@
                 <a:ea typeface="Calibri" pitchFamily="34" charset="-122"/>
                 <a:cs typeface="Calibri" pitchFamily="34" charset="-120"/>
               </a:rPr>
-              <a:t>FCFE ≠ dividends actually paid. A firm with USD 950 FCFE paying USD 300 in dividends is retaining USD 650 — either for reinvestment or to build cash for future distributions / buybacks.</a:t>
+              <a:t>FCFE ≠ dividends paid. A firm generating USD 950 of FCFE and paying USD 300 of dividends is retaining USD 650 — for reinvestment, buybacks, or a future distribution.</a:t>
             </a:r>
             <a:endParaRPr lang="en-US" sz="1300" dirty="0"/>
           </a:p>
@@ -23626,7 +24486,7 @@
       </p:sp>
       <p:sp>
         <p:nvSpPr>
-          <p:cNvPr id="9" name="Shape 7"/>
+          <p:cNvPr id="10" name="Shape 8"/>
           <p:cNvSpPr/>
           <p:nvPr/>
         </p:nvSpPr>
@@ -23646,7 +24506,7 @@
       </p:sp>
       <p:sp>
         <p:nvSpPr>
-          <p:cNvPr id="10" name="Text 8"/>
+          <p:cNvPr id="11" name="Text 9"/>
           <p:cNvSpPr txBox="1"/>
           <p:nvPr/>
         </p:nvSpPr>
@@ -23688,7 +24548,7 @@
       </p:sp>
       <p:sp>
         <p:nvSpPr>
-          <p:cNvPr id="11" name="Text 9"/>
+          <p:cNvPr id="12" name="Text 10"/>
           <p:cNvSpPr txBox="1"/>
           <p:nvPr/>
         </p:nvSpPr>
@@ -23722,7 +24582,7 @@
                 <a:ea typeface="Calibri" pitchFamily="34" charset="-122"/>
                 <a:cs typeface="Calibri" pitchFamily="34" charset="-120"/>
               </a:rPr>
-              <a:t>where: Equivalently: FCFE = CFO − FCInv + Net borrowing. Discount at r_equity (cost of equity, usually via CAPM).</a:t>
+              <a:t>where: the same thing as CFO − FCInv + Net borrowing. FCFE is an EQUITY claim — discount at the cost of equity and the result IS equity value.</a:t>
             </a:r>
             <a:endParaRPr lang="en-US" sz="1100" dirty="0"/>
           </a:p>
@@ -23743,7 +24603,7 @@
           </p:nvPr>
         </p:nvGraphicFramePr>
         <p:xfrm>
-          <a:off x="320040" y="1965960"/>
+          <a:off x="320040" y="2212848"/>
           <a:ext cx="8503920" cy="914400"/>
         </p:xfrm>
         <a:graphic>
@@ -23751,9 +24611,9 @@
             <a:tbl>
               <a:tblPr/>
               <a:tblGrid>
-                <a:gridCol w="4389120"/>
-                <a:gridCol w="1371600"/>
-                <a:gridCol w="2743200"/>
+                <a:gridCol w="3977640"/>
+                <a:gridCol w="1051560"/>
+                <a:gridCol w="3474720"/>
               </a:tblGrid>
               <a:tr h="274320">
                 <a:tc>
@@ -23873,7 +24733,7 @@
                           <a:ea typeface="Trebuchet MS" pitchFamily="34" charset="-122"/>
                           <a:cs typeface="Trebuchet MS" pitchFamily="34" charset="-120"/>
                         </a:rPr>
-                        <a:t>Notes</a:t>
+                        <a:t>Why it belongs here</a:t>
                       </a:r>
                       <a:endParaRPr lang="en-US" sz="1100" dirty="0">
                         <a:latin typeface="Trebuchet MS" charset="0"/>
@@ -24025,7 +24885,7 @@
                           <a:ea typeface="Consolas" pitchFamily="34" charset="-122"/>
                           <a:cs typeface="Consolas" pitchFamily="34" charset="-120"/>
                         </a:rPr>
-                        <a:t>After-tax earnings, bottom of P&amp;L</a:t>
+                        <a:t>After-tax earnings, bottom of the P&amp;L</a:t>
                       </a:r>
                       <a:endParaRPr lang="en-US" sz="1100" dirty="0">
                         <a:latin typeface="Consolas" charset="0"/>
@@ -24077,7 +24937,7 @@
                           <a:ea typeface="Calibri" pitchFamily="34" charset="-122"/>
                           <a:cs typeface="Calibri" pitchFamily="34" charset="-120"/>
                         </a:rPr>
-                        <a:t>+ Depreciation &amp; amortization</a:t>
+                        <a:t>+ Depreciation &amp; amortisation</a:t>
                       </a:r>
                       <a:endParaRPr lang="en-US" sz="1100" dirty="0">
                         <a:latin typeface="Calibri" charset="0"/>
@@ -24177,7 +25037,7 @@
                           <a:ea typeface="Consolas" pitchFamily="34" charset="-122"/>
                           <a:cs typeface="Consolas" pitchFamily="34" charset="-120"/>
                         </a:rPr>
-                        <a:t>Non-cash expense, already in NI</a:t>
+                        <a:t>Non-cash charge already deducted in NI</a:t>
                       </a:r>
                       <a:endParaRPr lang="en-US" sz="1100" dirty="0">
                         <a:latin typeface="Consolas" charset="0"/>
@@ -24229,7 +25089,7 @@
                           <a:ea typeface="Calibri" pitchFamily="34" charset="-122"/>
                           <a:cs typeface="Calibri" pitchFamily="34" charset="-120"/>
                         </a:rPr>
-                        <a:t>− Increase in working capital (A/R, inv.)</a:t>
+                        <a:t>− Increase in working capital</a:t>
                       </a:r>
                       <a:endParaRPr lang="en-US" sz="1100" dirty="0">
                         <a:latin typeface="Calibri" charset="0"/>
@@ -24329,7 +25189,7 @@
                           <a:ea typeface="Consolas" pitchFamily="34" charset="-122"/>
                           <a:cs typeface="Consolas" pitchFamily="34" charset="-120"/>
                         </a:rPr>
-                        <a:t>Revenue growth absorbs WC</a:t>
+                        <a:t>Growth ties up cash in receivables/stock</a:t>
                       </a:r>
                       <a:endParaRPr lang="en-US" sz="1100" dirty="0">
                         <a:latin typeface="Consolas" charset="0"/>
@@ -24381,7 +25241,7 @@
                           <a:ea typeface="Calibri" pitchFamily="34" charset="-122"/>
                           <a:cs typeface="Calibri" pitchFamily="34" charset="-120"/>
                         </a:rPr>
-                        <a:t>− Capital expenditures (maintenance + growth)</a:t>
+                        <a:t>− Capital expenditure</a:t>
                       </a:r>
                       <a:endParaRPr lang="en-US" sz="1100" dirty="0">
                         <a:latin typeface="Calibri" charset="0"/>
@@ -24481,7 +25341,7 @@
                           <a:ea typeface="Consolas" pitchFamily="34" charset="-122"/>
                           <a:cs typeface="Consolas" pitchFamily="34" charset="-120"/>
                         </a:rPr>
-                        <a:t>Fixed-capital investment</a:t>
+                        <a:t>FCInv — needed to stay a going concern</a:t>
                       </a:r>
                       <a:endParaRPr lang="en-US" sz="1100" dirty="0">
                         <a:latin typeface="Consolas" charset="0"/>
@@ -24533,7 +25393,7 @@
                           <a:ea typeface="Calibri" pitchFamily="34" charset="-122"/>
                           <a:cs typeface="Calibri" pitchFamily="34" charset="-120"/>
                         </a:rPr>
-                        <a:t>+ Net borrowing (new debt − repayments)</a:t>
+                        <a:t>+ Net borrowing</a:t>
                       </a:r>
                       <a:endParaRPr lang="en-US" sz="1100" dirty="0">
                         <a:latin typeface="Calibri" charset="0"/>
@@ -24633,7 +25493,7 @@
                           <a:ea typeface="Consolas" pitchFamily="34" charset="-122"/>
                           <a:cs typeface="Consolas" pitchFamily="34" charset="-120"/>
                         </a:rPr>
-                        <a:t>New LT debt issued, net of amortization</a:t>
+                        <a:t>New debt is cash available to equity</a:t>
                       </a:r>
                       <a:endParaRPr lang="en-US" sz="1100" dirty="0">
                         <a:latin typeface="Consolas" charset="0"/>
@@ -24797,7 +25657,7 @@
                           <a:ea typeface="Consolas" pitchFamily="34" charset="-122"/>
                           <a:cs typeface="Consolas" pitchFamily="34" charset="-120"/>
                         </a:rPr>
-                        <a:t>95% of NI — healthy conversion</a:t>
+                        <a:t>95% of net income — healthy conversion</a:t>
                       </a:r>
                       <a:endParaRPr lang="en-US" sz="1100" dirty="0">
                         <a:latin typeface="Consolas" charset="0"/>
@@ -24841,130 +25701,6 @@
           </a:graphicData>
         </a:graphic>
       </p:graphicFrame>
-      <p:sp>
-        <p:nvSpPr>
-          <p:cNvPr id="13" name="Shape 10"/>
-          <p:cNvSpPr/>
-          <p:nvPr/>
-        </p:nvSpPr>
-        <p:spPr>
-          <a:xfrm>
-            <a:off x="320040" y="3840480"/>
-            <a:ext cx="8503920" cy="457200"/>
-          </a:xfrm>
-          <a:prstGeom prst="rect">
-            <a:avLst/>
-          </a:prstGeom>
-          <a:solidFill>
-            <a:srgbClr val="FEF0E7"/>
-          </a:solidFill>
-          <a:ln/>
-        </p:spPr>
-      </p:sp>
-      <p:sp>
-        <p:nvSpPr>
-          <p:cNvPr id="14" name="Shape 11"/>
-          <p:cNvSpPr/>
-          <p:nvPr/>
-        </p:nvSpPr>
-        <p:spPr>
-          <a:xfrm>
-            <a:off x="320040" y="3840480"/>
-            <a:ext cx="73152" cy="457200"/>
-          </a:xfrm>
-          <a:prstGeom prst="rect">
-            <a:avLst/>
-          </a:prstGeom>
-          <a:solidFill>
-            <a:srgbClr val="E8600A"/>
-          </a:solidFill>
-          <a:ln/>
-        </p:spPr>
-      </p:sp>
-      <p:sp>
-        <p:nvSpPr>
-          <p:cNvPr id="15" name="Text 12"/>
-          <p:cNvSpPr txBox="1"/>
-          <p:nvPr/>
-        </p:nvSpPr>
-        <p:spPr>
-          <a:xfrm>
-            <a:off x="457200" y="3886200"/>
-            <a:ext cx="8275320" cy="256032"/>
-          </a:xfrm>
-          <a:prstGeom prst="rect">
-            <a:avLst/>
-          </a:prstGeom>
-          <a:noFill/>
-          <a:ln/>
-        </p:spPr>
-        <p:txBody>
-          <a:bodyPr wrap="square" lIns="508" tIns="508" rIns="508" bIns="508" rtlCol="0" anchor="ctr">
-            <a:normAutofit/>
-            <a:spAutoFit/>
-          </a:bodyPr>
-          <a:lstStyle/>
-          <a:p>
-            <a:pPr algn="l" indent="0" marL="0">
-              <a:buNone/>
-            </a:pPr>
-            <a:r>
-              <a:rPr lang="en-US" sz="1100" b="1" spc="400" kern="0" dirty="0">
-                <a:solidFill>
-                  <a:srgbClr val="E8600A"/>
-                </a:solidFill>
-                <a:latin typeface="Trebuchet MS" pitchFamily="34" charset="0"/>
-                <a:ea typeface="Trebuchet MS" pitchFamily="34" charset="-122"/>
-                <a:cs typeface="Trebuchet MS" pitchFamily="34" charset="-120"/>
-              </a:rPr>
-              <a:t>VALUATION</a:t>
-            </a:r>
-            <a:endParaRPr lang="en-US" sz="1100" dirty="0"/>
-          </a:p>
-        </p:txBody>
-      </p:sp>
-      <p:sp>
-        <p:nvSpPr>
-          <p:cNvPr id="16" name="Text 13"/>
-          <p:cNvSpPr txBox="1"/>
-          <p:nvPr/>
-        </p:nvSpPr>
-        <p:spPr>
-          <a:xfrm>
-            <a:off x="457200" y="4160520"/>
-            <a:ext cx="8275320" cy="91440"/>
-          </a:xfrm>
-          <a:prstGeom prst="rect">
-            <a:avLst/>
-          </a:prstGeom>
-          <a:noFill/>
-          <a:ln/>
-        </p:spPr>
-        <p:txBody>
-          <a:bodyPr wrap="square" lIns="508" tIns="508" rIns="508" bIns="508" rtlCol="0" anchor="t">
-            <a:normAutofit/>
-            <a:spAutoFit/>
-          </a:bodyPr>
-          <a:lstStyle/>
-          <a:p>
-            <a:pPr algn="l" indent="0" marL="0">
-              <a:buNone/>
-            </a:pPr>
-            <a:r>
-              <a:rPr lang="en-US" sz="1200" dirty="0">
-                <a:solidFill>
-                  <a:srgbClr val="334155"/>
-                </a:solidFill>
-                <a:latin typeface="Calibri" pitchFamily="34" charset="0"/>
-                <a:ea typeface="Calibri" pitchFamily="34" charset="-122"/>
-                <a:cs typeface="Calibri" pitchFamily="34" charset="-120"/>
-              </a:rPr>
-              <a:t>V₀ = Σ FCFEₜ / (1+r)ᵗ. With a terminal assumption, a Gordon-style tail applies at the end of the explicit forecast.</a:t>
-            </a:r>
-            <a:endParaRPr lang="en-US" sz="1200" dirty="0"/>
-          </a:p>
-        </p:txBody>
-      </p:sp>
     </p:spTree>
   </p:cSld>
   <p:clrMapOvr>
@@ -25142,6 +25878,61 @@
         </p:nvSpPr>
         <p:spPr>
           <a:xfrm>
+            <a:off x="320040" y="4325112"/>
+            <a:ext cx="8503920" cy="338328"/>
+          </a:xfrm>
+          <a:prstGeom prst="rect">
+            <a:avLst/>
+          </a:prstGeom>
+          <a:noFill/>
+          <a:ln/>
+        </p:spPr>
+        <p:txBody>
+          <a:bodyPr wrap="square" lIns="254" tIns="254" rIns="254" bIns="254" rtlCol="0" anchor="t"/>
+          <a:lstStyle/>
+          <a:p>
+            <a:pPr indent="0" marL="0">
+              <a:buNone/>
+            </a:pPr>
+            <a:r>
+              <a:rPr lang="en-US" sz="1000" dirty="0">
+                <a:solidFill>
+                  <a:srgbClr val="6B7A8D"/>
+                </a:solidFill>
+                <a:latin typeface="Calibri" pitchFamily="34" charset="0"/>
+                <a:ea typeface="Calibri" pitchFamily="34" charset="-122"/>
+                <a:cs typeface="Calibri" pitchFamily="34" charset="-120"/>
+              </a:rPr>
+              <a:t>¹ FORWARD P/E uses next year's EPS, TRAILING the last twelve months. Either works — but every company in a comp set must use the same basis.
+</a:t>
+            </a:r>
+            <a:pPr indent="0" marL="0">
+              <a:buNone/>
+            </a:pPr>
+            <a:r>
+              <a:rPr lang="en-US" sz="1000" dirty="0">
+                <a:solidFill>
+                  <a:srgbClr val="6B7A8D"/>
+                </a:solidFill>
+                <a:latin typeface="Calibri" pitchFamily="34" charset="0"/>
+                <a:ea typeface="Calibri" pitchFamily="34" charset="-122"/>
+                <a:cs typeface="Calibri" pitchFamily="34" charset="-120"/>
+              </a:rPr>
+              <a:t>² Grid assumes r = 9%. Raising r to 9.5% cuts the justified P/E to 26.2×; using ROE of 16.5% instead of 21.5% cuts it to 18.4×.
+</a:t>
+            </a:r>
+            <a:endParaRPr lang="en-US" sz="1000" dirty="0"/>
+          </a:p>
+        </p:txBody>
+      </p:sp>
+      <p:sp>
+        <p:nvSpPr>
+          <p:cNvPr id="8" name="Text 6"/>
+          <p:cNvSpPr txBox="1"/>
+          <p:nvPr/>
+        </p:nvSpPr>
+        <p:spPr>
+          <a:xfrm>
             <a:off x="320040" y="4663440"/>
             <a:ext cx="8503920" cy="201168"/>
           </a:xfrm>
@@ -25170,7 +25961,7 @@
                 <a:ea typeface="Calibri" pitchFamily="34" charset="-122"/>
                 <a:cs typeface="Calibri" pitchFamily="34" charset="-120"/>
               </a:rPr>
-              <a:t>Source: CFA Institute, Curriculum Vol 5, Learning Module 8, §9 "Multiples &amp; Fundamentals", Example 12, pp. 358–362.</a:t>
+              <a:t>Source: CFA Institute, Curriculum Vol 5, Learning Module 8, §9 "Multiplier Models…and Fundamentals", Example 12 and Exhibit 6, pp. 360–362.</a:t>
             </a:r>
             <a:endParaRPr lang="en-US" sz="750" dirty="0"/>
           </a:p>
@@ -25178,7 +25969,7 @@
       </p:sp>
       <p:sp>
         <p:nvSpPr>
-          <p:cNvPr id="8" name="Text 6"/>
+          <p:cNvPr id="9" name="Text 7"/>
           <p:cNvSpPr txBox="1"/>
           <p:nvPr/>
         </p:nvSpPr>
@@ -25212,7 +26003,7 @@
                 <a:ea typeface="Calibri" pitchFamily="34" charset="-122"/>
                 <a:cs typeface="Calibri" pitchFamily="34" charset="-120"/>
               </a:rPr>
-              <a:t>Watch the trap — payout up, retention down, so g = b × ROE falls too. Changing one input means rechecking the others ("dividend displacement of earnings").</a:t>
+              <a:t>Watch the trap: raise the payout and the numerator rises, but retention falls, so g = b × ROE falls and the denominator widens. Never move one input alone.</a:t>
             </a:r>
             <a:endParaRPr lang="en-US" sz="1300" dirty="0"/>
           </a:p>
@@ -25220,14 +26011,14 @@
       </p:sp>
       <p:sp>
         <p:nvSpPr>
-          <p:cNvPr id="9" name="Shape 7"/>
+          <p:cNvPr id="10" name="Shape 8"/>
           <p:cNvSpPr/>
           <p:nvPr/>
         </p:nvSpPr>
         <p:spPr>
           <a:xfrm>
-            <a:off x="320040" y="1188720"/>
-            <a:ext cx="8503920" cy="658368"/>
+            <a:off x="320040" y="1143000"/>
+            <a:ext cx="8503920" cy="594360"/>
           </a:xfrm>
           <a:prstGeom prst="rect">
             <a:avLst/>
@@ -25240,14 +26031,14 @@
       </p:sp>
       <p:sp>
         <p:nvSpPr>
-          <p:cNvPr id="10" name="Text 8"/>
+          <p:cNvPr id="11" name="Text 9"/>
           <p:cNvSpPr txBox="1"/>
           <p:nvPr/>
         </p:nvSpPr>
         <p:spPr>
           <a:xfrm>
-            <a:off x="411480" y="1188720"/>
-            <a:ext cx="8321040" cy="658368"/>
+            <a:off x="411480" y="1143000"/>
+            <a:ext cx="8321040" cy="594360"/>
           </a:xfrm>
           <a:prstGeom prst="rect">
             <a:avLst/>
@@ -25274,7 +26065,7 @@
                 <a:ea typeface="Consolas" pitchFamily="34" charset="-122"/>
                 <a:cs typeface="Consolas" pitchFamily="34" charset="-120"/>
               </a:rPr>
-              <a:t>P₀ / E₁  =  payout ratio  /  (r − g)        with   g  =  (1 − payout) × ROE</a:t>
+              <a:t>P₀/E₁  =  payout / (r − g)       g  =  (1 − payout) × ROE</a:t>
             </a:r>
             <a:endParaRPr lang="en-US" sz="1800" dirty="0"/>
           </a:p>
@@ -25282,14 +26073,14 @@
       </p:sp>
       <p:sp>
         <p:nvSpPr>
-          <p:cNvPr id="11" name="Shape 9"/>
+          <p:cNvPr id="12" name="Shape 10"/>
           <p:cNvSpPr/>
           <p:nvPr/>
         </p:nvSpPr>
         <p:spPr>
           <a:xfrm>
-            <a:off x="320040" y="2331720"/>
-            <a:ext cx="4937760" cy="1965960"/>
+            <a:off x="320040" y="1920240"/>
+            <a:ext cx="4937760" cy="2240280"/>
           </a:xfrm>
           <a:prstGeom prst="rect">
             <a:avLst/>
@@ -25307,13 +26098,13 @@
       </p:sp>
       <p:sp>
         <p:nvSpPr>
-          <p:cNvPr id="12" name="Text 10"/>
+          <p:cNvPr id="13" name="Text 11"/>
           <p:cNvSpPr txBox="1"/>
           <p:nvPr/>
         </p:nvSpPr>
         <p:spPr>
           <a:xfrm>
-            <a:off x="457200" y="2377440"/>
+            <a:off x="457200" y="1965960"/>
             <a:ext cx="4663440" cy="256032"/>
           </a:xfrm>
           <a:prstGeom prst="rect">
@@ -25341,7 +26132,7 @@
                 <a:ea typeface="Trebuchet MS" pitchFamily="34" charset="-122"/>
                 <a:cs typeface="Trebuchet MS" pitchFamily="34" charset="-120"/>
               </a:rPr>
-              <a:t>CFA LM 8 EXAMPLE 12 — NESTLÉ JUSTIFIED FWD P/E</a:t>
+              <a:t>CFA EX. 12 — NESTLÉ JUSTIFIED FWD P/E</a:t>
             </a:r>
             <a:endParaRPr lang="en-US" sz="1100" dirty="0"/>
           </a:p>
@@ -25349,13 +26140,13 @@
       </p:sp>
       <p:sp>
         <p:nvSpPr>
-          <p:cNvPr id="13" name="Text 11"/>
+          <p:cNvPr id="14" name="Text 12"/>
           <p:cNvSpPr txBox="1"/>
           <p:nvPr/>
         </p:nvSpPr>
         <p:spPr>
           <a:xfrm>
-            <a:off x="457200" y="2670048"/>
+            <a:off x="457200" y="2258568"/>
             <a:ext cx="4663440" cy="457200"/>
           </a:xfrm>
           <a:prstGeom prst="rect">
@@ -25383,7 +26174,7 @@
                 <a:ea typeface="Calibri" pitchFamily="34" charset="-122"/>
                 <a:cs typeface="Calibri" pitchFamily="34" charset="-120"/>
               </a:rPr>
-              <a:t>Payout ratio (2013-16 avg) = 68%; retention b = 32%; long-run ROE = 21.5%; required return r = 9%.</a:t>
+              <a:t>Payout ratio 68% (2013–17 average, rounded); retention b = 32%; long-run ROE estimated at 21.5%; required return r = 9%.</a:t>
             </a:r>
             <a:endParaRPr lang="en-US" sz="1200" dirty="0"/>
           </a:p>
@@ -25391,14 +26182,14 @@
       </p:sp>
       <p:sp>
         <p:nvSpPr>
-          <p:cNvPr id="14" name="Text 12"/>
+          <p:cNvPr id="15" name="Text 13"/>
           <p:cNvSpPr txBox="1"/>
           <p:nvPr/>
         </p:nvSpPr>
         <p:spPr>
           <a:xfrm>
-            <a:off x="457200" y="3182112"/>
-            <a:ext cx="4663440" cy="603504"/>
+            <a:off x="457200" y="2770632"/>
+            <a:ext cx="4663440" cy="877824"/>
           </a:xfrm>
           <a:prstGeom prst="rect">
             <a:avLst/>
@@ -25420,7 +26211,7 @@
               <a:buNone/>
             </a:pPr>
             <a:r>
-              <a:rPr lang="en-US" sz="1100" b="1" dirty="0">
+              <a:rPr lang="en-US" sz="1150" b="1" dirty="0">
                 <a:solidFill>
                   <a:srgbClr val="1B2A4A"/>
                 </a:solidFill>
@@ -25437,7 +26228,7 @@
               <a:buNone/>
             </a:pPr>
             <a:r>
-              <a:rPr lang="en-US" sz="1100" dirty="0">
+              <a:rPr lang="en-US" sz="1150" dirty="0">
                 <a:solidFill>
                   <a:srgbClr val="334155"/>
                 </a:solidFill>
@@ -25445,7 +26236,7 @@
                 <a:ea typeface="Calibri" pitchFamily="34" charset="-122"/>
                 <a:cs typeface="Calibri" pitchFamily="34" charset="-120"/>
               </a:rPr>
-              <a:t>g = 0.32 × 0.215 = 6.9%
+              <a:t>g = b × ROE = 0.32 × 0.215 = 6.9%
 </a:t>
             </a:r>
             <a:pPr indent="0" marL="0">
@@ -25455,7 +26246,7 @@
               <a:buNone/>
             </a:pPr>
             <a:r>
-              <a:rPr lang="en-US" sz="1100" b="1" dirty="0">
+              <a:rPr lang="en-US" sz="1150" b="1" dirty="0">
                 <a:solidFill>
                   <a:srgbClr val="1B2A4A"/>
                 </a:solidFill>
@@ -25472,7 +26263,7 @@
               <a:buNone/>
             </a:pPr>
             <a:r>
-              <a:rPr lang="en-US" sz="1100" dirty="0">
+              <a:rPr lang="en-US" sz="1150" dirty="0">
                 <a:solidFill>
                   <a:srgbClr val="334155"/>
                 </a:solidFill>
@@ -25490,7 +26281,7 @@
               <a:buNone/>
             </a:pPr>
             <a:r>
-              <a:rPr lang="en-US" sz="1100" b="1" dirty="0">
+              <a:rPr lang="en-US" sz="1150" b="1" dirty="0">
                 <a:solidFill>
                   <a:srgbClr val="1B2A4A"/>
                 </a:solidFill>
@@ -25507,7 +26298,7 @@
               <a:buNone/>
             </a:pPr>
             <a:r>
-              <a:rPr lang="en-US" sz="1100" dirty="0">
+              <a:rPr lang="en-US" sz="1150" dirty="0">
                 <a:solidFill>
                   <a:srgbClr val="334155"/>
                 </a:solidFill>
@@ -25515,21 +26306,56 @@
                 <a:ea typeface="Calibri" pitchFamily="34" charset="-122"/>
                 <a:cs typeface="Calibri" pitchFamily="34" charset="-120"/>
               </a:rPr>
-              <a:t>P/E = 0.68 / 0.021</a:t>
-            </a:r>
-            <a:endParaRPr lang="en-US" sz="1100" dirty="0"/>
+              <a:t>P₀/E₁ = 0.68 / 0.021
+</a:t>
+            </a:r>
+            <a:pPr indent="0" marL="0">
+              <a:spcAft>
+                <a:spcPts val="200"/>
+              </a:spcAft>
+              <a:buNone/>
+            </a:pPr>
+            <a:r>
+              <a:rPr lang="en-US" sz="1150" b="1" dirty="0">
+                <a:solidFill>
+                  <a:srgbClr val="1B2A4A"/>
+                </a:solidFill>
+                <a:latin typeface="Calibri" pitchFamily="34" charset="0"/>
+                <a:ea typeface="Calibri" pitchFamily="34" charset="-122"/>
+                <a:cs typeface="Calibri" pitchFamily="34" charset="-120"/>
+              </a:rPr>
+              <a:t>4. </a:t>
+            </a:r>
+            <a:pPr indent="0" marL="0">
+              <a:spcAft>
+                <a:spcPts val="200"/>
+              </a:spcAft>
+              <a:buNone/>
+            </a:pPr>
+            <a:r>
+              <a:rPr lang="en-US" sz="1150" dirty="0">
+                <a:solidFill>
+                  <a:srgbClr val="334155"/>
+                </a:solidFill>
+                <a:latin typeface="Calibri" pitchFamily="34" charset="0"/>
+                <a:ea typeface="Calibri" pitchFamily="34" charset="-122"/>
+                <a:cs typeface="Calibri" pitchFamily="34" charset="-120"/>
+              </a:rPr>
+              <a:t>Sell-side forward P/Es at the time: 19.3× to 26.3×</a:t>
+            </a:r>
+            <a:endParaRPr lang="en-US" sz="1150" dirty="0"/>
           </a:p>
         </p:txBody>
       </p:sp>
       <p:sp>
         <p:nvSpPr>
-          <p:cNvPr id="15" name="Shape 13"/>
+          <p:cNvPr id="16" name="Shape 14"/>
           <p:cNvSpPr/>
           <p:nvPr/>
         </p:nvSpPr>
         <p:spPr>
           <a:xfrm>
-            <a:off x="411480" y="3858768"/>
+            <a:off x="411480" y="3721608"/>
             <a:ext cx="4754880" cy="365760"/>
           </a:xfrm>
           <a:prstGeom prst="rect">
@@ -25543,13 +26369,13 @@
       </p:sp>
       <p:sp>
         <p:nvSpPr>
-          <p:cNvPr id="16" name="Text 14"/>
+          <p:cNvPr id="17" name="Text 15"/>
           <p:cNvSpPr txBox="1"/>
           <p:nvPr/>
         </p:nvSpPr>
         <p:spPr>
           <a:xfrm>
-            <a:off x="457200" y="3858768"/>
+            <a:off x="457200" y="3721608"/>
             <a:ext cx="4663440" cy="365760"/>
           </a:xfrm>
           <a:prstGeom prst="rect">
@@ -25577,7 +26403,7 @@
                 <a:ea typeface="Consolas" pitchFamily="34" charset="-122"/>
                 <a:cs typeface="Consolas" pitchFamily="34" charset="-120"/>
               </a:rPr>
-              <a:t>Justified forward P/E = 32.4×</a:t>
+              <a:t>Justified forward P/E = 32.4× — above the whole street</a:t>
             </a:r>
             <a:endParaRPr lang="en-US" sz="1150" dirty="0"/>
           </a:p>
@@ -25598,7 +26424,7 @@
           </p:nvPr>
         </p:nvGraphicFramePr>
         <p:xfrm>
-          <a:off x="5349240" y="2331720"/>
+          <a:off x="5349240" y="1920240"/>
           <a:ext cx="3474720" cy="914400"/>
         </p:xfrm>
         <a:graphic>
@@ -25606,10 +26432,10 @@
             <a:tbl>
               <a:tblPr/>
               <a:tblGrid>
-                <a:gridCol w="1097280"/>
-                <a:gridCol w="795528"/>
-                <a:gridCol w="795528"/>
-                <a:gridCol w="786384"/>
+                <a:gridCol w="1234440"/>
+                <a:gridCol w="749808"/>
+                <a:gridCol w="749808"/>
+                <a:gridCol w="740664"/>
               </a:tblGrid>
               <a:tr h="274320">
                 <a:tc>
@@ -25629,7 +26455,7 @@
                           <a:ea typeface="Trebuchet MS" pitchFamily="34" charset="-122"/>
                           <a:cs typeface="Trebuchet MS" pitchFamily="34" charset="-120"/>
                         </a:rPr>
-                        <a:t>payout / g</a:t>
+                        <a:t>Payout ↓ / g →</a:t>
                       </a:r>
                       <a:endParaRPr lang="en-US" sz="1100" dirty="0">
                         <a:latin typeface="Trebuchet MS" charset="0"/>
@@ -25831,7 +26657,7 @@
                           <a:ea typeface="Calibri" pitchFamily="34" charset="-122"/>
                           <a:cs typeface="Calibri" pitchFamily="34" charset="-120"/>
                         </a:rPr>
-                        <a:t>55% </a:t>
+                        <a:t>55%</a:t>
                       </a:r>
                       <a:endParaRPr lang="en-US" sz="1100" dirty="0">
                         <a:latin typeface="Calibri" charset="0"/>
@@ -26830,7 +27656,7 @@
                 <a:ea typeface="Calibri" pitchFamily="34" charset="-122"/>
                 <a:cs typeface="Calibri" pitchFamily="34" charset="-120"/>
               </a:rPr>
-              <a:t>Source: CFA Institute, Curriculum Vol 5, Learning Module 8, §10 "Method of Comparables", Example 13, pp. 362–364.</a:t>
+              <a:t>Source: CFA Institute, Curriculum Vol 5, Learning Module 8, §10 "Method of Comparables", Example 13, p. 363 (P/S as at December 2017). Right-hand column is presenter commentary, not CFA text.</a:t>
             </a:r>
             <a:endParaRPr lang="en-US" sz="750" dirty="0"/>
           </a:p>
@@ -26872,7 +27698,7 @@
                 <a:ea typeface="Calibri" pitchFamily="34" charset="-122"/>
                 <a:cs typeface="Calibri" pitchFamily="34" charset="-120"/>
               </a:rPr>
-              <a:t>Law of one price: identical assets should sell for the same price. But firms in the same industry differ on growth, margins, leverage, cyclicality — dig into each before acting.</a:t>
+              <a:t>Law of one price: identical assets should sell for the same price. Cars are not identical — growth, margin, leverage and cyclicality all differ. P/S is where the question starts.</a:t>
             </a:r>
             <a:endParaRPr lang="en-US" sz="1300" dirty="0"/>
           </a:p>
@@ -26901,9 +27727,9 @@
             <a:tbl>
               <a:tblPr/>
               <a:tblGrid>
-                <a:gridCol w="2560320"/>
-                <a:gridCol w="914400"/>
-                <a:gridCol w="5029200"/>
+                <a:gridCol w="2194560"/>
+                <a:gridCol w="868680"/>
+                <a:gridCol w="5440680"/>
               </a:tblGrid>
               <a:tr h="274320">
                 <a:tc>
@@ -27023,7 +27849,7 @@
                           <a:ea typeface="Trebuchet MS" pitchFamily="34" charset="-122"/>
                           <a:cs typeface="Trebuchet MS" pitchFamily="34" charset="-120"/>
                         </a:rPr>
-                        <a:t>Reading</a:t>
+                        <a:t>What you would have to check before calling it cheap</a:t>
                       </a:r>
                       <a:endParaRPr lang="en-US" sz="1100" dirty="0">
                         <a:latin typeface="Trebuchet MS" charset="0"/>
@@ -27175,7 +28001,7 @@
                           <a:ea typeface="Consolas" pitchFamily="34" charset="-122"/>
                           <a:cs typeface="Consolas" pitchFamily="34" charset="-120"/>
                         </a:rPr>
-                        <a:t>Lowest P/S — Europe turnaround story, investors wary of margin volatility</a:t>
+                        <a:t>Lowest P/S — mid-turnaround, thin and volatile margins</a:t>
                       </a:r>
                       <a:endParaRPr lang="en-US" sz="1100" dirty="0">
                         <a:latin typeface="Consolas" charset="0"/>
@@ -27327,7 +28153,7 @@
                           <a:ea typeface="Consolas" pitchFamily="34" charset="-122"/>
                           <a:cs typeface="Consolas" pitchFamily="34" charset="-120"/>
                         </a:rPr>
-                        <a:t>Cyclically exposed US market, legacy pension obligations weigh on equity</a:t>
+                        <a:t>US cyclical exposure; legacy obligations sit ahead of equity</a:t>
                       </a:r>
                       <a:endParaRPr lang="en-US" sz="1100" dirty="0">
                         <a:latin typeface="Consolas" charset="0"/>
@@ -27479,7 +28305,7 @@
                           <a:ea typeface="Consolas" pitchFamily="34" charset="-122"/>
                           <a:cs typeface="Consolas" pitchFamily="34" charset="-120"/>
                         </a:rPr>
-                        <a:t>Similar to Ford but with cleaner balance sheet post-2009 restructuring</a:t>
+                        <a:t>Like Ford, on a balance sheet cleaned up after 2009</a:t>
                       </a:r>
                       <a:endParaRPr lang="en-US" sz="1100" dirty="0">
                         <a:latin typeface="Consolas" charset="0"/>
@@ -27631,7 +28457,7 @@
                           <a:ea typeface="Consolas" pitchFamily="34" charset="-122"/>
                           <a:cs typeface="Consolas" pitchFamily="34" charset="-120"/>
                         </a:rPr>
-                        <a:t>Alliance-structure discount; multiple governance concerns</a:t>
+                        <a:t>Alliance structure and governance complicate the equity story</a:t>
                       </a:r>
                       <a:endParaRPr lang="en-US" sz="1100" dirty="0">
                         <a:latin typeface="Consolas" charset="0"/>
@@ -27783,7 +28609,7 @@
                           <a:ea typeface="Consolas" pitchFamily="34" charset="-122"/>
                           <a:cs typeface="Consolas" pitchFamily="34" charset="-120"/>
                         </a:rPr>
-                        <a:t>Stable Japanese quality story; diversified (motorcycles + power products)</a:t>
+                        <a:t>Diversified beyond cars — motorcycles and power products</a:t>
                       </a:r>
                       <a:endParaRPr lang="en-US" sz="1100" dirty="0">
                         <a:latin typeface="Consolas" charset="0"/>
@@ -27835,7 +28661,7 @@
                           <a:ea typeface="Calibri" pitchFamily="34" charset="-122"/>
                           <a:cs typeface="Calibri" pitchFamily="34" charset="-120"/>
                         </a:rPr>
-                        <a:t>Daimler</a:t>
+                        <a:t>Tata Motors</a:t>
                       </a:r>
                       <a:endParaRPr lang="en-US" sz="1100" dirty="0">
                         <a:latin typeface="Calibri" charset="0"/>
@@ -27885,7 +28711,7 @@
                           <a:ea typeface="Consolas" pitchFamily="34" charset="-122"/>
                           <a:cs typeface="Consolas" pitchFamily="34" charset="-120"/>
                         </a:rPr>
-                        <a:t>0.55</a:t>
+                        <a:t>0.49</a:t>
                       </a:r>
                       <a:endParaRPr lang="en-US" sz="1100" dirty="0">
                         <a:latin typeface="Consolas" charset="0"/>
@@ -27935,7 +28761,7 @@
                           <a:ea typeface="Consolas" pitchFamily="34" charset="-122"/>
                           <a:cs typeface="Consolas" pitchFamily="34" charset="-120"/>
                         </a:rPr>
-                        <a:t>Premium exposure (Mercedes-Benz) supports a higher multiple</a:t>
+                        <a:t>India volume plus Jaguar Land Rover — two different businesses</a:t>
                       </a:r>
                       <a:endParaRPr lang="en-US" sz="1100" dirty="0">
                         <a:latin typeface="Consolas" charset="0"/>
@@ -27987,7 +28813,7 @@
                           <a:ea typeface="Calibri" pitchFamily="34" charset="-122"/>
                           <a:cs typeface="Calibri" pitchFamily="34" charset="-120"/>
                         </a:rPr>
-                        <a:t>BMW</a:t>
+                        <a:t>Daimler</a:t>
                       </a:r>
                       <a:endParaRPr lang="en-US" sz="1100" dirty="0">
                         <a:latin typeface="Calibri" charset="0"/>
@@ -28037,7 +28863,7 @@
                           <a:ea typeface="Consolas" pitchFamily="34" charset="-122"/>
                           <a:cs typeface="Consolas" pitchFamily="34" charset="-120"/>
                         </a:rPr>
-                        <a:t>0.57</a:t>
+                        <a:t>0.55</a:t>
                       </a:r>
                       <a:endParaRPr lang="en-US" sz="1100" dirty="0">
                         <a:latin typeface="Consolas" charset="0"/>
@@ -28087,7 +28913,7 @@
                           <a:ea typeface="Consolas" pitchFamily="34" charset="-122"/>
                           <a:cs typeface="Consolas" pitchFamily="34" charset="-120"/>
                         </a:rPr>
-                        <a:t>Premium-only mix; strong brand and high customer-retention rates</a:t>
+                        <a:t>Premium mix (Mercedes-Benz) supports a higher multiple</a:t>
                       </a:r>
                       <a:endParaRPr lang="en-US" sz="1100" dirty="0">
                         <a:latin typeface="Consolas" charset="0"/>
@@ -28139,7 +28965,7 @@
                           <a:ea typeface="Calibri" pitchFamily="34" charset="-122"/>
                           <a:cs typeface="Calibri" pitchFamily="34" charset="-120"/>
                         </a:rPr>
-                        <a:t>Toyota Motor</a:t>
+                        <a:t>BMW</a:t>
                       </a:r>
                       <a:endParaRPr lang="en-US" sz="1100" dirty="0">
                         <a:latin typeface="Calibri" charset="0"/>
@@ -28189,7 +29015,7 @@
                           <a:ea typeface="Consolas" pitchFamily="34" charset="-122"/>
                           <a:cs typeface="Consolas" pitchFamily="34" charset="-120"/>
                         </a:rPr>
-                        <a:t>0.80</a:t>
+                        <a:t>0.57</a:t>
                       </a:r>
                       <a:endParaRPr lang="en-US" sz="1100" dirty="0">
                         <a:latin typeface="Consolas" charset="0"/>
@@ -28239,7 +29065,7 @@
                           <a:ea typeface="Consolas" pitchFamily="34" charset="-122"/>
                           <a:cs typeface="Consolas" pitchFamily="34" charset="-120"/>
                         </a:rPr>
-                        <a:t>Highest P/S — scale, reliability, capital discipline, global footprint</a:t>
+                        <a:t>Premium-only mix, strong brand, high retention</a:t>
                       </a:r>
                       <a:endParaRPr lang="en-US" sz="1100" dirty="0">
                         <a:latin typeface="Consolas" charset="0"/>
@@ -28273,134 +29099,162 @@
                   </a:tcPr>
                 </a:tc>
               </a:tr>
+              <a:tr h="274320">
+                <a:tc>
+                  <a:txBody>
+                    <a:bodyPr/>
+                    <a:lstStyle/>
+                    <a:p>
+                      <a:pPr algn="l" indent="0" marL="0">
+                        <a:buNone/>
+                      </a:pPr>
+                      <a:r>
+                        <a:rPr lang="en-US" sz="1100" dirty="0">
+                          <a:solidFill>
+                            <a:srgbClr val="334155"/>
+                          </a:solidFill>
+                          <a:latin typeface="Calibri" pitchFamily="34" charset="0"/>
+                          <a:ea typeface="Calibri" pitchFamily="34" charset="-122"/>
+                          <a:cs typeface="Calibri" pitchFamily="34" charset="-120"/>
+                        </a:rPr>
+                        <a:t>Toyota Motor</a:t>
+                      </a:r>
+                      <a:endParaRPr lang="en-US" sz="1100" dirty="0">
+                        <a:latin typeface="Calibri" charset="0"/>
+                        <a:ea typeface="Calibri" charset="0"/>
+                        <a:cs typeface="Calibri" charset="0"/>
+                      </a:endParaRPr>
+                    </a:p>
+                  </a:txBody>
+                  <a:tcPr marL="91440" marR="91440" marT="45720" marB="45720" anchor="ctr">
+                    <a:lnL w="0" cap="flat" cmpd="sng" algn="ctr">
+                      <a:noFill/>
+                    </a:lnL>
+                    <a:lnR w="0" cap="flat" cmpd="sng" algn="ctr">
+                      <a:noFill/>
+                    </a:lnR>
+                    <a:lnT w="0" cap="flat" cmpd="sng" algn="ctr">
+                      <a:noFill/>
+                    </a:lnT>
+                    <a:lnB w="3175" cap="flat" cmpd="sng" algn="ctr">
+                      <a:solidFill>
+                        <a:srgbClr val="D0D8E8"/>
+                      </a:solidFill>
+                      <a:prstDash val="solid"/>
+                      <a:round/>
+                      <a:headEnd type="none" w="med" len="med"/>
+                      <a:tailEnd type="none" w="med" len="med"/>
+                    </a:lnB>
+                    <a:solidFill>
+                      <a:srgbClr val="FFFFFF"/>
+                    </a:solidFill>
+                  </a:tcPr>
+                </a:tc>
+                <a:tc>
+                  <a:txBody>
+                    <a:bodyPr/>
+                    <a:lstStyle/>
+                    <a:p>
+                      <a:pPr algn="r" indent="0" marL="0">
+                        <a:buNone/>
+                      </a:pPr>
+                      <a:r>
+                        <a:rPr lang="en-US" sz="1100" dirty="0">
+                          <a:solidFill>
+                            <a:srgbClr val="334155"/>
+                          </a:solidFill>
+                          <a:latin typeface="Consolas" pitchFamily="34" charset="0"/>
+                          <a:ea typeface="Consolas" pitchFamily="34" charset="-122"/>
+                          <a:cs typeface="Consolas" pitchFamily="34" charset="-120"/>
+                        </a:rPr>
+                        <a:t>0.80</a:t>
+                      </a:r>
+                      <a:endParaRPr lang="en-US" sz="1100" dirty="0">
+                        <a:latin typeface="Consolas" charset="0"/>
+                        <a:ea typeface="Consolas" charset="0"/>
+                        <a:cs typeface="Consolas" charset="0"/>
+                      </a:endParaRPr>
+                    </a:p>
+                  </a:txBody>
+                  <a:tcPr marL="91440" marR="91440" marT="45720" marB="45720" anchor="ctr">
+                    <a:lnL w="0" cap="flat" cmpd="sng" algn="ctr">
+                      <a:noFill/>
+                    </a:lnL>
+                    <a:lnR w="0" cap="flat" cmpd="sng" algn="ctr">
+                      <a:noFill/>
+                    </a:lnR>
+                    <a:lnT w="0" cap="flat" cmpd="sng" algn="ctr">
+                      <a:noFill/>
+                    </a:lnT>
+                    <a:lnB w="3175" cap="flat" cmpd="sng" algn="ctr">
+                      <a:solidFill>
+                        <a:srgbClr val="D0D8E8"/>
+                      </a:solidFill>
+                      <a:prstDash val="solid"/>
+                      <a:round/>
+                      <a:headEnd type="none" w="med" len="med"/>
+                      <a:tailEnd type="none" w="med" len="med"/>
+                    </a:lnB>
+                    <a:solidFill>
+                      <a:srgbClr val="FFFFFF"/>
+                    </a:solidFill>
+                  </a:tcPr>
+                </a:tc>
+                <a:tc>
+                  <a:txBody>
+                    <a:bodyPr/>
+                    <a:lstStyle/>
+                    <a:p>
+                      <a:pPr algn="ctr" indent="0" marL="0">
+                        <a:buNone/>
+                      </a:pPr>
+                      <a:r>
+                        <a:rPr lang="en-US" sz="1100" dirty="0">
+                          <a:solidFill>
+                            <a:srgbClr val="334155"/>
+                          </a:solidFill>
+                          <a:latin typeface="Consolas" pitchFamily="34" charset="0"/>
+                          <a:ea typeface="Consolas" pitchFamily="34" charset="-122"/>
+                          <a:cs typeface="Consolas" pitchFamily="34" charset="-120"/>
+                        </a:rPr>
+                        <a:t>Highest P/S — scale, reliability, capital discipline</a:t>
+                      </a:r>
+                      <a:endParaRPr lang="en-US" sz="1100" dirty="0">
+                        <a:latin typeface="Consolas" charset="0"/>
+                        <a:ea typeface="Consolas" charset="0"/>
+                        <a:cs typeface="Consolas" charset="0"/>
+                      </a:endParaRPr>
+                    </a:p>
+                  </a:txBody>
+                  <a:tcPr marL="91440" marR="91440" marT="45720" marB="45720" anchor="ctr">
+                    <a:lnL w="0" cap="flat" cmpd="sng" algn="ctr">
+                      <a:noFill/>
+                    </a:lnL>
+                    <a:lnR w="0" cap="flat" cmpd="sng" algn="ctr">
+                      <a:noFill/>
+                    </a:lnR>
+                    <a:lnT w="0" cap="flat" cmpd="sng" algn="ctr">
+                      <a:noFill/>
+                    </a:lnT>
+                    <a:lnB w="3175" cap="flat" cmpd="sng" algn="ctr">
+                      <a:solidFill>
+                        <a:srgbClr val="D0D8E8"/>
+                      </a:solidFill>
+                      <a:prstDash val="solid"/>
+                      <a:round/>
+                      <a:headEnd type="none" w="med" len="med"/>
+                      <a:tailEnd type="none" w="med" len="med"/>
+                    </a:lnB>
+                    <a:solidFill>
+                      <a:srgbClr val="FFFFFF"/>
+                    </a:solidFill>
+                  </a:tcPr>
+                </a:tc>
+              </a:tr>
             </a:tbl>
           </a:graphicData>
         </a:graphic>
       </p:graphicFrame>
-      <p:sp>
-        <p:nvSpPr>
-          <p:cNvPr id="10" name="Shape 7"/>
-          <p:cNvSpPr/>
-          <p:nvPr/>
-        </p:nvSpPr>
-        <p:spPr>
-          <a:xfrm>
-            <a:off x="320040" y="3749040"/>
-            <a:ext cx="8503920" cy="548640"/>
-          </a:xfrm>
-          <a:prstGeom prst="rect">
-            <a:avLst/>
-          </a:prstGeom>
-          <a:solidFill>
-            <a:srgbClr val="FEF0E7"/>
-          </a:solidFill>
-          <a:ln/>
-        </p:spPr>
-      </p:sp>
-      <p:sp>
-        <p:nvSpPr>
-          <p:cNvPr id="11" name="Shape 8"/>
-          <p:cNvSpPr/>
-          <p:nvPr/>
-        </p:nvSpPr>
-        <p:spPr>
-          <a:xfrm>
-            <a:off x="320040" y="3749040"/>
-            <a:ext cx="73152" cy="548640"/>
-          </a:xfrm>
-          <a:prstGeom prst="rect">
-            <a:avLst/>
-          </a:prstGeom>
-          <a:solidFill>
-            <a:srgbClr val="E8600A"/>
-          </a:solidFill>
-          <a:ln/>
-        </p:spPr>
-      </p:sp>
-      <p:sp>
-        <p:nvSpPr>
-          <p:cNvPr id="12" name="Text 9"/>
-          <p:cNvSpPr txBox="1"/>
-          <p:nvPr/>
-        </p:nvSpPr>
-        <p:spPr>
-          <a:xfrm>
-            <a:off x="457200" y="3794760"/>
-            <a:ext cx="8275320" cy="256032"/>
-          </a:xfrm>
-          <a:prstGeom prst="rect">
-            <a:avLst/>
-          </a:prstGeom>
-          <a:noFill/>
-          <a:ln/>
-        </p:spPr>
-        <p:txBody>
-          <a:bodyPr wrap="square" lIns="508" tIns="508" rIns="508" bIns="508" rtlCol="0" anchor="ctr">
-            <a:normAutofit/>
-            <a:spAutoFit/>
-          </a:bodyPr>
-          <a:lstStyle/>
-          <a:p>
-            <a:pPr algn="l" indent="0" marL="0">
-              <a:buNone/>
-            </a:pPr>
-            <a:r>
-              <a:rPr lang="en-US" sz="1100" b="1" spc="400" kern="0" dirty="0">
-                <a:solidFill>
-                  <a:srgbClr val="E8600A"/>
-                </a:solidFill>
-                <a:latin typeface="Trebuchet MS" pitchFamily="34" charset="0"/>
-                <a:ea typeface="Trebuchet MS" pitchFamily="34" charset="-122"/>
-                <a:cs typeface="Trebuchet MS" pitchFamily="34" charset="-120"/>
-              </a:rPr>
-              <a:t>INTERPRETATION</a:t>
-            </a:r>
-            <a:endParaRPr lang="en-US" sz="1100" dirty="0"/>
-          </a:p>
-        </p:txBody>
-      </p:sp>
-      <p:sp>
-        <p:nvSpPr>
-          <p:cNvPr id="13" name="Text 10"/>
-          <p:cNvSpPr txBox="1"/>
-          <p:nvPr/>
-        </p:nvSpPr>
-        <p:spPr>
-          <a:xfrm>
-            <a:off x="457200" y="4069080"/>
-            <a:ext cx="8275320" cy="182880"/>
-          </a:xfrm>
-          <a:prstGeom prst="rect">
-            <a:avLst/>
-          </a:prstGeom>
-          <a:noFill/>
-          <a:ln/>
-        </p:spPr>
-        <p:txBody>
-          <a:bodyPr wrap="square" lIns="508" tIns="508" rIns="508" bIns="508" rtlCol="0" anchor="t">
-            <a:normAutofit/>
-            <a:spAutoFit/>
-          </a:bodyPr>
-          <a:lstStyle/>
-          <a:p>
-            <a:pPr algn="l" indent="0" marL="0">
-              <a:buNone/>
-            </a:pPr>
-            <a:r>
-              <a:rPr lang="en-US" sz="1200" dirty="0">
-                <a:solidFill>
-                  <a:srgbClr val="334155"/>
-                </a:solidFill>
-                <a:latin typeface="Calibri" pitchFamily="34" charset="0"/>
-                <a:ea typeface="Calibri" pitchFamily="34" charset="-122"/>
-                <a:cs typeface="Calibri" pitchFamily="34" charset="-120"/>
-              </a:rPr>
-              <a:t>P/S suggests Peugeot is "cheapest" — but the discount reflects execution risk and thin historical margins. Toyota "expensive" multiple embeds decades of consistent returns. Always compare multiples with ROE / growth / risk — not in isolation.</a:t>
-            </a:r>
-            <a:endParaRPr lang="en-US" sz="1200" dirty="0"/>
-          </a:p>
-        </p:txBody>
-      </p:sp>
     </p:spTree>
   </p:cSld>
   <p:clrMapOvr>
@@ -28578,6 +29432,61 @@
         </p:nvSpPr>
         <p:spPr>
           <a:xfrm>
+            <a:off x="320040" y="4325112"/>
+            <a:ext cx="8503920" cy="338328"/>
+          </a:xfrm>
+          <a:prstGeom prst="rect">
+            <a:avLst/>
+          </a:prstGeom>
+          <a:noFill/>
+          <a:ln/>
+        </p:spPr>
+        <p:txBody>
+          <a:bodyPr wrap="square" lIns="254" tIns="254" rIns="254" bIns="254" rtlCol="0" anchor="t"/>
+          <a:lstStyle/>
+          <a:p>
+            <a:pPr indent="0" marL="0">
+              <a:buNone/>
+            </a:pPr>
+            <a:r>
+              <a:rPr lang="en-US" sz="1000" dirty="0">
+                <a:solidFill>
+                  <a:srgbClr val="6B7A8D"/>
+                </a:solidFill>
+                <a:latin typeface="Calibri" pitchFamily="34" charset="0"/>
+                <a:ea typeface="Calibri" pitchFamily="34" charset="-122"/>
+                <a:cs typeface="Calibri" pitchFamily="34" charset="-120"/>
+              </a:rPr>
+              <a:t>¹ EV is the cost of a takeover: the acquirer assumes the debt and receives the cash. That is why cash is subtracted.
+</a:t>
+            </a:r>
+            <a:pPr indent="0" marL="0">
+              <a:buNone/>
+            </a:pPr>
+            <a:r>
+              <a:rPr lang="en-US" sz="1000" dirty="0">
+                <a:solidFill>
+                  <a:srgbClr val="6B7A8D"/>
+                </a:solidFill>
+                <a:latin typeface="Calibri" pitchFamily="34" charset="0"/>
+                <a:ea typeface="Calibri" pitchFamily="34" charset="-122"/>
+                <a:cs typeface="Calibri" pitchFamily="34" charset="-120"/>
+              </a:rPr>
+              <a:t>² EV survives what P/E cannot — different leverage, different tax regimes, negative earnings. But EBITDA adds back D&amp;A, so it flatters capital-heavy firms.
+</a:t>
+            </a:r>
+            <a:endParaRPr lang="en-US" sz="1000" dirty="0"/>
+          </a:p>
+        </p:txBody>
+      </p:sp>
+      <p:sp>
+        <p:nvSpPr>
+          <p:cNvPr id="8" name="Text 6"/>
+          <p:cNvSpPr txBox="1"/>
+          <p:nvPr/>
+        </p:nvSpPr>
+        <p:spPr>
+          <a:xfrm>
             <a:off x="320040" y="4663440"/>
             <a:ext cx="8503920" cy="201168"/>
           </a:xfrm>
@@ -28606,7 +29515,7 @@
                 <a:ea typeface="Calibri" pitchFamily="34" charset="-122"/>
                 <a:cs typeface="Calibri" pitchFamily="34" charset="-120"/>
               </a:rPr>
-              <a:t>Source: CFA Institute, Curriculum Vol 5, Learning Module 8, §11 "Enterprise Value", Example 16, pp. 367–370.</a:t>
+              <a:t>Source: CFA Institute, Curriculum Vol 5, Learning Module 8, §11 "Enterprise Value", Example 16 and Exhibit 9, pp. 368–369.</a:t>
             </a:r>
             <a:endParaRPr lang="en-US" sz="750" dirty="0"/>
           </a:p>
@@ -28614,7 +29523,7 @@
       </p:sp>
       <p:sp>
         <p:nvSpPr>
-          <p:cNvPr id="8" name="Text 6"/>
+          <p:cNvPr id="9" name="Text 7"/>
           <p:cNvSpPr txBox="1"/>
           <p:nvPr/>
         </p:nvSpPr>
@@ -28648,7 +29557,7 @@
                 <a:ea typeface="Calibri" pitchFamily="34" charset="-122"/>
                 <a:cs typeface="Calibri" pitchFamily="34" charset="-120"/>
               </a:rPr>
-              <a:t>EV captures the whole capital stack the acquirer pays for — equity + debt − cash. EBITDA is pre-D&amp;A, pre-interest, pre-tax — the cash engine, before finance / accounting choices.</a:t>
+              <a:t>EV is the whole capital stack an acquirer pays for — equity + preferred + debt − cash. EBITDA is pre-D&amp;A, pre-interest, pre-tax: the cash engine, before financing and accounting choices.</a:t>
             </a:r>
             <a:endParaRPr lang="en-US" sz="1300" dirty="0"/>
           </a:p>
@@ -28656,14 +29565,14 @@
       </p:sp>
       <p:sp>
         <p:nvSpPr>
-          <p:cNvPr id="9" name="Shape 7"/>
+          <p:cNvPr id="10" name="Shape 8"/>
           <p:cNvSpPr/>
           <p:nvPr/>
         </p:nvSpPr>
         <p:spPr>
           <a:xfrm>
-            <a:off x="320040" y="1143000"/>
-            <a:ext cx="8503920" cy="658368"/>
+            <a:off x="320040" y="1097280"/>
+            <a:ext cx="8503920" cy="566928"/>
           </a:xfrm>
           <a:prstGeom prst="rect">
             <a:avLst/>
@@ -28676,14 +29585,14 @@
       </p:sp>
       <p:sp>
         <p:nvSpPr>
-          <p:cNvPr id="10" name="Text 8"/>
+          <p:cNvPr id="11" name="Text 9"/>
           <p:cNvSpPr txBox="1"/>
           <p:nvPr/>
         </p:nvSpPr>
         <p:spPr>
           <a:xfrm>
-            <a:off x="411480" y="1143000"/>
-            <a:ext cx="8321040" cy="658368"/>
+            <a:off x="411480" y="1097280"/>
+            <a:ext cx="8321040" cy="566928"/>
           </a:xfrm>
           <a:prstGeom prst="rect">
             <a:avLst/>
@@ -28710,7 +29619,7 @@
                 <a:ea typeface="Consolas" pitchFamily="34" charset="-122"/>
                 <a:cs typeface="Consolas" pitchFamily="34" charset="-120"/>
               </a:rPr>
-              <a:t>EV  =  Market cap  +  Preferred  +  Debt (market value)  −  Cash &amp; equivalents</a:t>
+              <a:t>EV  =  Market cap  +  Preferred  +  Debt  −  Cash</a:t>
             </a:r>
             <a:endParaRPr lang="en-US" sz="1800" dirty="0"/>
           </a:p>
@@ -28718,13 +29627,13 @@
       </p:sp>
       <p:sp>
         <p:nvSpPr>
-          <p:cNvPr id="11" name="Text 9"/>
+          <p:cNvPr id="12" name="Text 10"/>
           <p:cNvSpPr txBox="1"/>
           <p:nvPr/>
         </p:nvSpPr>
         <p:spPr>
           <a:xfrm>
-            <a:off x="320040" y="1828800"/>
+            <a:off x="320040" y="1691640"/>
             <a:ext cx="8503920" cy="256032"/>
           </a:xfrm>
           <a:prstGeom prst="rect">
@@ -28752,7 +29661,7 @@
                 <a:ea typeface="Calibri" pitchFamily="34" charset="-122"/>
                 <a:cs typeface="Calibri" pitchFamily="34" charset="-120"/>
               </a:rPr>
-              <a:t>where: Use market value of debt when available; book value is a rough fallback. Subtract excess cash because an acquirer can use it to retire debt.</a:t>
+              <a:t>where: Debt at MARKET value where available — book value is only a rough proxy, since rates and perceived credit risk move after issue. Cash includes short-term investments.</a:t>
             </a:r>
             <a:endParaRPr lang="en-US" sz="1100" dirty="0"/>
           </a:p>
@@ -28760,14 +29669,14 @@
       </p:sp>
       <p:sp>
         <p:nvSpPr>
-          <p:cNvPr id="12" name="Shape 10"/>
+          <p:cNvPr id="13" name="Shape 11"/>
           <p:cNvSpPr/>
           <p:nvPr/>
         </p:nvSpPr>
         <p:spPr>
           <a:xfrm>
-            <a:off x="320040" y="2240280"/>
-            <a:ext cx="8503920" cy="1417320"/>
+            <a:off x="320040" y="2011680"/>
+            <a:ext cx="4526280" cy="2103120"/>
           </a:xfrm>
           <a:prstGeom prst="rect">
             <a:avLst/>
@@ -28785,14 +29694,14 @@
       </p:sp>
       <p:sp>
         <p:nvSpPr>
-          <p:cNvPr id="13" name="Text 11"/>
+          <p:cNvPr id="14" name="Text 12"/>
           <p:cNvSpPr txBox="1"/>
           <p:nvPr/>
         </p:nvSpPr>
         <p:spPr>
           <a:xfrm>
-            <a:off x="457200" y="2286000"/>
-            <a:ext cx="8229600" cy="256032"/>
+            <a:off x="457200" y="2057400"/>
+            <a:ext cx="4251960" cy="256032"/>
           </a:xfrm>
           <a:prstGeom prst="rect">
             <a:avLst/>
@@ -28819,7 +29728,7 @@
                 <a:ea typeface="Trebuchet MS" pitchFamily="34" charset="-122"/>
                 <a:cs typeface="Trebuchet MS" pitchFamily="34" charset="-120"/>
               </a:rPr>
-              <a:t>CFA LM 8 EXAMPLE 16 — CAMECO CORPORATION (FY2017)</a:t>
+              <a:t>CFA EX. 16 — CAMECO (FY2017, CAD m)</a:t>
             </a:r>
             <a:endParaRPr lang="en-US" sz="1100" dirty="0"/>
           </a:p>
@@ -28827,14 +29736,14 @@
       </p:sp>
       <p:sp>
         <p:nvSpPr>
-          <p:cNvPr id="14" name="Text 12"/>
+          <p:cNvPr id="15" name="Text 13"/>
           <p:cNvSpPr txBox="1"/>
           <p:nvPr/>
         </p:nvSpPr>
         <p:spPr>
           <a:xfrm>
-            <a:off x="457200" y="2578608"/>
-            <a:ext cx="8229600" cy="457200"/>
+            <a:off x="457200" y="2350008"/>
+            <a:ext cx="4251960" cy="457200"/>
           </a:xfrm>
           <a:prstGeom prst="rect">
             <a:avLst/>
@@ -28861,7 +29770,7 @@
                 <a:ea typeface="Calibri" pitchFamily="34" charset="-122"/>
                 <a:cs typeface="Calibri" pitchFamily="34" charset="-120"/>
               </a:rPr>
-              <a:t>395.8 m shares at CAD 14.11 → equity 5,585. Book debt 1,905 → market debt 1,480 (discounted using risk-free + spread curve); other liabilities 1,014. Cash 592. EBITDA 606.</a:t>
+              <a:t>395.8 m shares at CAD 14.11. LT debt: book 1,905, market 1,480. Other liabilities 1,014. Cash 592. EBITDA 606.</a:t>
             </a:r>
             <a:endParaRPr lang="en-US" sz="1200" dirty="0"/>
           </a:p>
@@ -28869,14 +29778,14 @@
       </p:sp>
       <p:sp>
         <p:nvSpPr>
-          <p:cNvPr id="15" name="Text 13"/>
+          <p:cNvPr id="16" name="Text 14"/>
           <p:cNvSpPr txBox="1"/>
           <p:nvPr/>
         </p:nvSpPr>
         <p:spPr>
           <a:xfrm>
-            <a:off x="457200" y="3090672"/>
-            <a:ext cx="8229600" cy="274320"/>
+            <a:off x="457200" y="2862072"/>
+            <a:ext cx="4251960" cy="740664"/>
           </a:xfrm>
           <a:prstGeom prst="rect">
             <a:avLst/>
@@ -28898,7 +29807,7 @@
               <a:buNone/>
             </a:pPr>
             <a:r>
-              <a:rPr lang="en-US" sz="1050" b="1" dirty="0">
+              <a:rPr lang="en-US" sz="1100" b="1" dirty="0">
                 <a:solidFill>
                   <a:srgbClr val="1B2A4A"/>
                 </a:solidFill>
@@ -28915,7 +29824,7 @@
               <a:buNone/>
             </a:pPr>
             <a:r>
-              <a:rPr lang="en-US" sz="1050" dirty="0">
+              <a:rPr lang="en-US" sz="1100" dirty="0">
                 <a:solidFill>
                   <a:srgbClr val="334155"/>
                 </a:solidFill>
@@ -28923,7 +29832,7 @@
                 <a:ea typeface="Calibri" pitchFamily="34" charset="-122"/>
                 <a:cs typeface="Calibri" pitchFamily="34" charset="-120"/>
               </a:rPr>
-              <a:t>Market cap = 395.8 × 14.11 = CAD 5,585 m
+              <a:t>Market cap = 395.8 × 14.11 = 5,585
 </a:t>
             </a:r>
             <a:pPr indent="0" marL="0">
@@ -28933,7 +29842,7 @@
               <a:buNone/>
             </a:pPr>
             <a:r>
-              <a:rPr lang="en-US" sz="1050" b="1" dirty="0">
+              <a:rPr lang="en-US" sz="1100" b="1" dirty="0">
                 <a:solidFill>
                   <a:srgbClr val="1B2A4A"/>
                 </a:solidFill>
@@ -28950,7 +29859,7 @@
               <a:buNone/>
             </a:pPr>
             <a:r>
-              <a:rPr lang="en-US" sz="1050" dirty="0">
+              <a:rPr lang="en-US" sz="1100" dirty="0">
                 <a:solidFill>
                   <a:srgbClr val="334155"/>
                 </a:solidFill>
@@ -28958,7 +29867,7 @@
                 <a:ea typeface="Calibri" pitchFamily="34" charset="-122"/>
                 <a:cs typeface="Calibri" pitchFamily="34" charset="-120"/>
               </a:rPr>
-              <a:t>Market value of total debt &amp; liabilities ≈ 1,480 + 1,014 = CAD 2,494 m
+              <a:t>Debt &amp; other liabilities = 1,480 + 1,014 = 2,494
 </a:t>
             </a:r>
             <a:pPr indent="0" marL="0">
@@ -28968,7 +29877,7 @@
               <a:buNone/>
             </a:pPr>
             <a:r>
-              <a:rPr lang="en-US" sz="1050" b="1" dirty="0">
+              <a:rPr lang="en-US" sz="1100" b="1" dirty="0">
                 <a:solidFill>
                   <a:srgbClr val="1B2A4A"/>
                 </a:solidFill>
@@ -28985,7 +29894,7 @@
               <a:buNone/>
             </a:pPr>
             <a:r>
-              <a:rPr lang="en-US" sz="1050" dirty="0">
+              <a:rPr lang="en-US" sz="1100" dirty="0">
                 <a:solidFill>
                   <a:srgbClr val="334155"/>
                 </a:solidFill>
@@ -28993,7 +29902,7 @@
                 <a:ea typeface="Calibri" pitchFamily="34" charset="-122"/>
                 <a:cs typeface="Calibri" pitchFamily="34" charset="-120"/>
               </a:rPr>
-              <a:t>EV = 5,585 + 2,494 − 592 = CAD 7,487 m
+              <a:t>EV = 5,585 + 2,494 − 592 = 7,487
 </a:t>
             </a:r>
             <a:pPr indent="0" marL="0">
@@ -29003,7 +29912,7 @@
               <a:buNone/>
             </a:pPr>
             <a:r>
-              <a:rPr lang="en-US" sz="1050" b="1" dirty="0">
+              <a:rPr lang="en-US" sz="1100" b="1" dirty="0">
                 <a:solidFill>
                   <a:srgbClr val="1B2A4A"/>
                 </a:solidFill>
@@ -29020,7 +29929,7 @@
               <a:buNone/>
             </a:pPr>
             <a:r>
-              <a:rPr lang="en-US" sz="1050" dirty="0">
+              <a:rPr lang="en-US" sz="1100" dirty="0">
                 <a:solidFill>
                   <a:srgbClr val="334155"/>
                 </a:solidFill>
@@ -29028,22 +29937,22 @@
                 <a:ea typeface="Calibri" pitchFamily="34" charset="-122"/>
                 <a:cs typeface="Calibri" pitchFamily="34" charset="-120"/>
               </a:rPr>
-              <a:t>EV / EBITDA = 7,487 / 606 = 12.4×</a:t>
-            </a:r>
-            <a:endParaRPr lang="en-US" sz="1050" dirty="0"/>
+              <a:t>EV / EBITDA = 7,487 / 606</a:t>
+            </a:r>
+            <a:endParaRPr lang="en-US" sz="1100" dirty="0"/>
           </a:p>
         </p:txBody>
       </p:sp>
       <p:sp>
         <p:nvSpPr>
-          <p:cNvPr id="16" name="Shape 14"/>
+          <p:cNvPr id="17" name="Shape 15"/>
           <p:cNvSpPr/>
           <p:nvPr/>
         </p:nvSpPr>
         <p:spPr>
           <a:xfrm>
-            <a:off x="411480" y="3218688"/>
-            <a:ext cx="8321040" cy="365760"/>
+            <a:off x="411480" y="3675888"/>
+            <a:ext cx="4343400" cy="365760"/>
           </a:xfrm>
           <a:prstGeom prst="rect">
             <a:avLst/>
@@ -29056,14 +29965,14 @@
       </p:sp>
       <p:sp>
         <p:nvSpPr>
-          <p:cNvPr id="17" name="Text 15"/>
+          <p:cNvPr id="18" name="Text 16"/>
           <p:cNvSpPr txBox="1"/>
           <p:nvPr/>
         </p:nvSpPr>
         <p:spPr>
           <a:xfrm>
-            <a:off x="457200" y="3218688"/>
-            <a:ext cx="8229600" cy="365760"/>
+            <a:off x="457200" y="3675888"/>
+            <a:ext cx="4251960" cy="365760"/>
           </a:xfrm>
           <a:prstGeom prst="rect">
             <a:avLst/>
@@ -29090,31 +29999,11 @@
                 <a:ea typeface="Consolas" pitchFamily="34" charset="-122"/>
                 <a:cs typeface="Consolas" pitchFamily="34" charset="-120"/>
               </a:rPr>
-              <a:t>EV / EBITDA = 12.4× — benchmark against uranium peers; negative earnings years still computable (EBITDA usually positive).</a:t>
+              <a:t>EV / EBITDA  =  12.4×</a:t>
             </a:r>
             <a:endParaRPr lang="en-US" sz="1150" dirty="0"/>
           </a:p>
         </p:txBody>
-      </p:sp>
-      <p:sp>
-        <p:nvSpPr>
-          <p:cNvPr id="18" name="Shape 16"/>
-          <p:cNvSpPr/>
-          <p:nvPr/>
-        </p:nvSpPr>
-        <p:spPr>
-          <a:xfrm>
-            <a:off x="320040" y="3749040"/>
-            <a:ext cx="8503920" cy="548640"/>
-          </a:xfrm>
-          <a:prstGeom prst="rect">
-            <a:avLst/>
-          </a:prstGeom>
-          <a:solidFill>
-            <a:srgbClr val="FEF0E7"/>
-          </a:solidFill>
-          <a:ln/>
-        </p:spPr>
       </p:sp>
       <p:sp>
         <p:nvSpPr>
@@ -29124,28 +30013,48 @@
         </p:nvSpPr>
         <p:spPr>
           <a:xfrm>
-            <a:off x="320040" y="3749040"/>
-            <a:ext cx="73152" cy="548640"/>
+            <a:off x="5029200" y="2011680"/>
+            <a:ext cx="3794760" cy="2103120"/>
           </a:xfrm>
           <a:prstGeom prst="rect">
             <a:avLst/>
           </a:prstGeom>
           <a:solidFill>
-            <a:srgbClr val="E8600A"/>
+            <a:srgbClr val="F5F7FA"/>
           </a:solidFill>
           <a:ln/>
         </p:spPr>
       </p:sp>
       <p:sp>
         <p:nvSpPr>
-          <p:cNvPr id="20" name="Text 18"/>
+          <p:cNvPr id="20" name="Shape 18"/>
+          <p:cNvSpPr/>
+          <p:nvPr/>
+        </p:nvSpPr>
+        <p:spPr>
+          <a:xfrm>
+            <a:off x="5029200" y="2011680"/>
+            <a:ext cx="73152" cy="2103120"/>
+          </a:xfrm>
+          <a:prstGeom prst="rect">
+            <a:avLst/>
+          </a:prstGeom>
+          <a:solidFill>
+            <a:srgbClr val="1B2A4A"/>
+          </a:solidFill>
+          <a:ln/>
+        </p:spPr>
+      </p:sp>
+      <p:sp>
+        <p:nvSpPr>
+          <p:cNvPr id="21" name="Text 19"/>
           <p:cNvSpPr txBox="1"/>
           <p:nvPr/>
         </p:nvSpPr>
         <p:spPr>
           <a:xfrm>
-            <a:off x="457200" y="3794760"/>
-            <a:ext cx="8275320" cy="256032"/>
+            <a:off x="5166360" y="2057400"/>
+            <a:ext cx="3566160" cy="256032"/>
           </a:xfrm>
           <a:prstGeom prst="rect">
             <a:avLst/>
@@ -29166,13 +30075,13 @@
             <a:r>
               <a:rPr lang="en-US" sz="1100" b="1" spc="400" kern="0" dirty="0">
                 <a:solidFill>
-                  <a:srgbClr val="E8600A"/>
+                  <a:srgbClr val="1B2A4A"/>
                 </a:solidFill>
                 <a:latin typeface="Trebuchet MS" pitchFamily="34" charset="0"/>
                 <a:ea typeface="Trebuchet MS" pitchFamily="34" charset="-122"/>
                 <a:cs typeface="Trebuchet MS" pitchFamily="34" charset="-120"/>
               </a:rPr>
-              <a:t>WHEN EV BEATS MARKET CAP</a:t>
+              <a:t>THE CONSISTENCY RULE</a:t>
             </a:r>
             <a:endParaRPr lang="en-US" sz="1100" dirty="0"/>
           </a:p>
@@ -29180,14 +30089,14 @@
       </p:sp>
       <p:sp>
         <p:nvSpPr>
-          <p:cNvPr id="21" name="Text 19"/>
+          <p:cNvPr id="22" name="Text 20"/>
           <p:cNvSpPr txBox="1"/>
           <p:nvPr/>
         </p:nvSpPr>
         <p:spPr>
           <a:xfrm>
-            <a:off x="457200" y="4069080"/>
-            <a:ext cx="8275320" cy="182880"/>
+            <a:off x="5166360" y="2331720"/>
+            <a:ext cx="3566160" cy="1737360"/>
           </a:xfrm>
           <a:prstGeom prst="rect">
             <a:avLst/>
@@ -29214,7 +30123,76 @@
                 <a:ea typeface="Calibri" pitchFamily="34" charset="-122"/>
                 <a:cs typeface="Calibri" pitchFamily="34" charset="-120"/>
               </a:rPr>
-              <a:t>Comparing firms with different leverage · M&amp;A / LBO analysis · negative-earnings periods · cross-border with different tax regimes. Watch: EBITDA adds back non-cash D&amp;A — in capital-intensive industries, that overstates cash generation.</a:t>
+              <a:t>Numerator and denominator must describe the SAME claim.</a:t>
+            </a:r>
+            <a:endParaRPr lang="en-US" sz="1200" dirty="0"/>
+          </a:p>
+          <a:p>
+            <a:pPr algn="l" indent="0" marL="0">
+              <a:buNone/>
+            </a:pPr>
+            <a:endParaRPr lang="en-US" sz="1200" dirty="0"/>
+          </a:p>
+          <a:p>
+            <a:pPr algn="l" indent="0" marL="0">
+              <a:buNone/>
+            </a:pPr>
+            <a:r>
+              <a:rPr lang="en-US" sz="1200" dirty="0">
+                <a:solidFill>
+                  <a:srgbClr val="334155"/>
+                </a:solidFill>
+                <a:latin typeface="Calibri" pitchFamily="34" charset="0"/>
+                <a:ea typeface="Calibri" pitchFamily="34" charset="-122"/>
+                <a:cs typeface="Calibri" pitchFamily="34" charset="-120"/>
+              </a:rPr>
+              <a:t>EQUITY: price over EPS, book value, sales.</a:t>
+            </a:r>
+            <a:endParaRPr lang="en-US" sz="1200" dirty="0"/>
+          </a:p>
+          <a:p>
+            <a:pPr algn="l" indent="0" marL="0">
+              <a:buNone/>
+            </a:pPr>
+            <a:endParaRPr lang="en-US" sz="1200" dirty="0"/>
+          </a:p>
+          <a:p>
+            <a:pPr algn="l" indent="0" marL="0">
+              <a:buNone/>
+            </a:pPr>
+            <a:r>
+              <a:rPr lang="en-US" sz="1200" dirty="0">
+                <a:solidFill>
+                  <a:srgbClr val="334155"/>
+                </a:solidFill>
+                <a:latin typeface="Calibri" pitchFamily="34" charset="0"/>
+                <a:ea typeface="Calibri" pitchFamily="34" charset="-122"/>
+                <a:cs typeface="Calibri" pitchFamily="34" charset="-120"/>
+              </a:rPr>
+              <a:t>ENTERPRISE: EV over EBITDA, EBIT, revenue.</a:t>
+            </a:r>
+            <a:endParaRPr lang="en-US" sz="1200" dirty="0"/>
+          </a:p>
+          <a:p>
+            <a:pPr algn="l" indent="0" marL="0">
+              <a:buNone/>
+            </a:pPr>
+            <a:endParaRPr lang="en-US" sz="1200" dirty="0"/>
+          </a:p>
+          <a:p>
+            <a:pPr algn="l" indent="0" marL="0">
+              <a:buNone/>
+            </a:pPr>
+            <a:r>
+              <a:rPr lang="en-US" sz="1200" dirty="0">
+                <a:solidFill>
+                  <a:srgbClr val="334155"/>
+                </a:solidFill>
+                <a:latin typeface="Calibri" pitchFamily="34" charset="0"/>
+                <a:ea typeface="Calibri" pitchFamily="34" charset="-122"/>
+                <a:cs typeface="Calibri" pitchFamily="34" charset="-120"/>
+              </a:rPr>
+              <a:t>EV/EPS and price/EBITDA are the classic error. To cross over, subtract debt and preferred from EV.</a:t>
             </a:r>
             <a:endParaRPr lang="en-US" sz="1200" dirty="0"/>
           </a:p>
@@ -29478,7 +30456,7 @@
                 <a:ea typeface="Calibri" pitchFamily="34" charset="-122"/>
                 <a:cs typeface="Calibri" pitchFamily="34" charset="-120"/>
               </a:rPr>
-              <a:t>Describe the structure and elements of an initial equity research report, and evaluate a company's business model, revenue drivers, and operating/financial leverage.
+              <a:t>Describe the eight elements of an initial equity research report, and evaluate a company's business model, revenue drivers, and operating/financial leverage.
 </a:t>
             </a:r>
             <a:pPr indent="0" marL="0">
@@ -29594,7 +30572,7 @@
                 <a:ea typeface="Calibri" pitchFamily="34" charset="-122"/>
                 <a:cs typeface="Calibri" pitchFamily="34" charset="-120"/>
               </a:rPr>
-              <a:t>Compute and interpret P/E, P/S, P/B, EV/EBITDA and asset-based valuations — and understand why a low multiple demands a "why" before a "buy".
+              <a:t>Compute and interpret P/E, P/S, P/B, EV/EBITDA and asset-based valuations — keeping numerator and denominator on the same claim — and understand why a low multiple demands a "why" before a "buy".
 </a:t>
             </a:r>
             <a:endParaRPr lang="en-US" sz="1200" dirty="0"/>
@@ -29778,6 +30756,46 @@
         </p:nvSpPr>
         <p:spPr>
           <a:xfrm>
+            <a:off x="320040" y="4471416"/>
+            <a:ext cx="8503920" cy="192024"/>
+          </a:xfrm>
+          <a:prstGeom prst="rect">
+            <a:avLst/>
+          </a:prstGeom>
+          <a:noFill/>
+          <a:ln/>
+        </p:spPr>
+        <p:txBody>
+          <a:bodyPr wrap="square" lIns="254" tIns="254" rIns="254" bIns="254" rtlCol="0" anchor="t"/>
+          <a:lstStyle/>
+          <a:p>
+            <a:pPr indent="0" marL="0">
+              <a:buNone/>
+            </a:pPr>
+            <a:r>
+              <a:rPr lang="en-US" sz="1000" dirty="0">
+                <a:solidFill>
+                  <a:srgbClr val="6B7A8D"/>
+                </a:solidFill>
+                <a:latin typeface="Calibri" pitchFamily="34" charset="0"/>
+                <a:ea typeface="Calibri" pitchFamily="34" charset="-122"/>
+                <a:cs typeface="Calibri" pitchFamily="34" charset="-120"/>
+              </a:rPr>
+              <a:t>¹ Hardest where it is most needed: firms with heavy PP&amp;E that has no observable market price, and any hyper-inflationary environment.
+</a:t>
+            </a:r>
+            <a:endParaRPr lang="en-US" sz="1000" dirty="0"/>
+          </a:p>
+        </p:txBody>
+      </p:sp>
+      <p:sp>
+        <p:nvSpPr>
+          <p:cNvPr id="8" name="Text 6"/>
+          <p:cNvSpPr txBox="1"/>
+          <p:nvPr/>
+        </p:nvSpPr>
+        <p:spPr>
+          <a:xfrm>
             <a:off x="320040" y="4663440"/>
             <a:ext cx="8503920" cy="201168"/>
           </a:xfrm>
@@ -29806,7 +30824,7 @@
                 <a:ea typeface="Calibri" pitchFamily="34" charset="-122"/>
                 <a:cs typeface="Calibri" pitchFamily="34" charset="-120"/>
               </a:rPr>
-              <a:t>Source: CFA Institute, Curriculum Vol 5, Learning Module 8, §12 "Asset-Based Valuation", Examples 18–20, pp. 371–374.</a:t>
+              <a:t>Source: CFA Institute, Curriculum Vol 5, Learning Module 8, §12 "Asset-Based Valuation", Examples 18–20, pp. 371–372.</a:t>
             </a:r>
             <a:endParaRPr lang="en-US" sz="750" dirty="0"/>
           </a:p>
@@ -29814,7 +30832,7 @@
       </p:sp>
       <p:sp>
         <p:nvSpPr>
-          <p:cNvPr id="8" name="Text 6"/>
+          <p:cNvPr id="9" name="Text 7"/>
           <p:cNvSpPr txBox="1"/>
           <p:nvPr/>
         </p:nvSpPr>
@@ -29848,7 +30866,7 @@
                 <a:ea typeface="Calibri" pitchFamily="34" charset="-122"/>
                 <a:cs typeface="Calibri" pitchFamily="34" charset="-120"/>
               </a:rPr>
-              <a:t>Value = fair value of assets − fair value of liabilities − preferred. In practice, book-to-market adjustment is the hardest step.</a:t>
+              <a:t>Value = fair value of assets − fair value of liabilities − preferred. Getting from book to fair value is the whole difficulty, and excluded intangibles make the answer a floor.</a:t>
             </a:r>
             <a:endParaRPr lang="en-US" sz="1300" dirty="0"/>
           </a:p>
@@ -29856,7 +30874,7 @@
       </p:sp>
       <p:sp>
         <p:nvSpPr>
-          <p:cNvPr id="9" name="Shape 7"/>
+          <p:cNvPr id="10" name="Shape 8"/>
           <p:cNvSpPr/>
           <p:nvPr/>
         </p:nvSpPr>
@@ -29876,7 +30894,7 @@
       </p:sp>
       <p:sp>
         <p:nvSpPr>
-          <p:cNvPr id="10" name="Shape 8"/>
+          <p:cNvPr id="11" name="Shape 9"/>
           <p:cNvSpPr/>
           <p:nvPr/>
         </p:nvSpPr>
@@ -29896,7 +30914,7 @@
       </p:sp>
       <p:sp>
         <p:nvSpPr>
-          <p:cNvPr id="11" name="Text 9"/>
+          <p:cNvPr id="12" name="Text 10"/>
           <p:cNvSpPr txBox="1"/>
           <p:nvPr/>
         </p:nvSpPr>
@@ -29930,7 +30948,7 @@
                 <a:ea typeface="Trebuchet MS" pitchFamily="34" charset="-122"/>
                 <a:cs typeface="Trebuchet MS" pitchFamily="34" charset="-120"/>
               </a:rPr>
-              <a:t>WORKS — FAMILY LAUNDRY</a:t>
+              <a:t>MOST TRACTABLE — FAMILY LAUNDRY</a:t>
             </a:r>
             <a:endParaRPr lang="en-US" sz="1000" dirty="0"/>
           </a:p>
@@ -29938,7 +30956,7 @@
       </p:sp>
       <p:sp>
         <p:nvSpPr>
-          <p:cNvPr id="12" name="Text 10"/>
+          <p:cNvPr id="13" name="Text 11"/>
           <p:cNvSpPr txBox="1"/>
           <p:nvPr/>
         </p:nvSpPr>
@@ -29972,7 +30990,7 @@
                 <a:ea typeface="Calibri" pitchFamily="34" charset="-122"/>
                 <a:cs typeface="Calibri" pitchFamily="34" charset="-120"/>
               </a:rPr>
-              <a:t>Tangible assets dominate: the building, land, washers &amp; dryers, inventory. Each has a verifiable market value (real-estate appraisal, used-equipment dealer).</a:t>
+              <a:t>Tangibles dominate: building, land, washers and dryers, inventory. Take two market appraisals on the property and cost the used machines at replacement.</a:t>
             </a:r>
             <a:endParaRPr lang="en-US" sz="1100" dirty="0"/>
           </a:p>
@@ -29995,15 +31013,38 @@
                 <a:ea typeface="Calibri" pitchFamily="34" charset="-122"/>
                 <a:cs typeface="Calibri" pitchFamily="34" charset="-120"/>
               </a:rPr>
-              <a:t>Intangibles (location, marketing) are small. Asset-based approach yields a defensible number.</a:t>
+              <a:t>Deduct the USD 100,000 loan.</a:t>
             </a:r>
             <a:endParaRPr lang="en-US" sz="1100" dirty="0"/>
           </a:p>
+          <a:p>
+            <a:pPr algn="l" indent="0" marL="0">
+              <a:buNone/>
+            </a:pPr>
+            <a:endParaRPr lang="en-US" sz="1100" dirty="0"/>
+          </a:p>
+          <a:p>
+            <a:pPr algn="l" indent="0" marL="0">
+              <a:buNone/>
+            </a:pPr>
+            <a:r>
+              <a:rPr lang="en-US" sz="1100" dirty="0">
+                <a:solidFill>
+                  <a:srgbClr val="334155"/>
+                </a:solidFill>
+                <a:latin typeface="Calibri" pitchFamily="34" charset="0"/>
+                <a:ea typeface="Calibri" pitchFamily="34" charset="-122"/>
+                <a:cs typeface="Calibri" pitchFamily="34" charset="-120"/>
+              </a:rPr>
+              <a:t>But CFA is blunt: any intangible value — prime location, clever marketing — is excluded, which makes even this valuation inaccurate.</a:t>
+            </a:r>
+            <a:endParaRPr lang="en-US" sz="1100" dirty="0"/>
+          </a:p>
         </p:txBody>
       </p:sp>
       <p:sp>
         <p:nvSpPr>
-          <p:cNvPr id="13" name="Shape 11"/>
+          <p:cNvPr id="14" name="Shape 12"/>
           <p:cNvSpPr/>
           <p:nvPr/>
         </p:nvSpPr>
@@ -30023,7 +31064,7 @@
       </p:sp>
       <p:sp>
         <p:nvSpPr>
-          <p:cNvPr id="14" name="Shape 12"/>
+          <p:cNvPr id="15" name="Shape 13"/>
           <p:cNvSpPr/>
           <p:nvPr/>
         </p:nvSpPr>
@@ -30043,7 +31084,7 @@
       </p:sp>
       <p:sp>
         <p:nvSpPr>
-          <p:cNvPr id="15" name="Text 13"/>
+          <p:cNvPr id="16" name="Text 14"/>
           <p:cNvSpPr txBox="1"/>
           <p:nvPr/>
         </p:nvSpPr>
@@ -30077,7 +31118,7 @@
                 <a:ea typeface="Trebuchet MS" pitchFamily="34" charset="-122"/>
                 <a:cs typeface="Trebuchet MS" pitchFamily="34" charset="-120"/>
               </a:rPr>
-              <a:t>FLOOR — SECRET-RECIPE RESTAURANT</a:t>
+              <a:t>FLOOR ONLY — SECRET-RECIPE RESTAURANT</a:t>
             </a:r>
             <a:endParaRPr lang="en-US" sz="1000" dirty="0"/>
           </a:p>
@@ -30085,7 +31126,7 @@
       </p:sp>
       <p:sp>
         <p:nvSpPr>
-          <p:cNvPr id="16" name="Text 14"/>
+          <p:cNvPr id="17" name="Text 15"/>
           <p:cNvSpPr txBox="1"/>
           <p:nvPr/>
         </p:nvSpPr>
@@ -30119,7 +31160,7 @@
                 <a:ea typeface="Calibri" pitchFamily="34" charset="-122"/>
                 <a:cs typeface="Calibri" pitchFamily="34" charset="-120"/>
               </a:rPr>
-              <a:t>Kitchen equipment + inventory − liabilities produces a baseline.</a:t>
+              <a:t>Equipment plus inventory, less liabilities, gives a baseline — and the space is rented, so there is no property to appraise.</a:t>
             </a:r>
             <a:endParaRPr lang="en-US" sz="1100" dirty="0"/>
           </a:p>
@@ -30142,7 +31183,7 @@
                 <a:ea typeface="Calibri" pitchFamily="34" charset="-122"/>
                 <a:cs typeface="Calibri" pitchFamily="34" charset="-120"/>
               </a:rPr>
-              <a:t>But the "secret recipe" and the chef's reputation are intangibles that walk out with the owner.</a:t>
+              <a:t>The secret recipes and the owner's cooking are the business, and the owner is retiring. Some or all of the intangibles vanish on sale.</a:t>
             </a:r>
             <a:endParaRPr lang="en-US" sz="1100" dirty="0"/>
           </a:p>
@@ -30165,7 +31206,7 @@
                 <a:ea typeface="Calibri" pitchFamily="34" charset="-122"/>
                 <a:cs typeface="Calibri" pitchFamily="34" charset="-120"/>
               </a:rPr>
-              <a:t>Asset-based = floor; going-concern value requires multiple or DCF.</a:t>
+              <a:t>A minimum valuation, nothing more.</a:t>
             </a:r>
             <a:endParaRPr lang="en-US" sz="1100" dirty="0"/>
           </a:p>
@@ -30173,7 +31214,7 @@
       </p:sp>
       <p:sp>
         <p:nvSpPr>
-          <p:cNvPr id="17" name="Shape 15"/>
+          <p:cNvPr id="18" name="Shape 16"/>
           <p:cNvSpPr/>
           <p:nvPr/>
         </p:nvSpPr>
@@ -30193,7 +31234,7 @@
       </p:sp>
       <p:sp>
         <p:nvSpPr>
-          <p:cNvPr id="18" name="Shape 16"/>
+          <p:cNvPr id="19" name="Shape 17"/>
           <p:cNvSpPr/>
           <p:nvPr/>
         </p:nvSpPr>
@@ -30213,7 +31254,7 @@
       </p:sp>
       <p:sp>
         <p:nvSpPr>
-          <p:cNvPr id="19" name="Text 17"/>
+          <p:cNvPr id="20" name="Text 18"/>
           <p:cNvSpPr txBox="1"/>
           <p:nvPr/>
         </p:nvSpPr>
@@ -30247,7 +31288,7 @@
                 <a:ea typeface="Trebuchet MS" pitchFamily="34" charset="-122"/>
                 <a:cs typeface="Trebuchet MS" pitchFamily="34" charset="-120"/>
               </a:rPr>
-              <a:t>REVIVES — LEGACY AIRLINE</a:t>
+              <a:t>RIGHT LENS — LOSS-MAKING AIRLINE</a:t>
             </a:r>
             <a:endParaRPr lang="en-US" sz="1000" dirty="0"/>
           </a:p>
@@ -30255,7 +31296,7 @@
       </p:sp>
       <p:sp>
         <p:nvSpPr>
-          <p:cNvPr id="20" name="Text 18"/>
+          <p:cNvPr id="21" name="Text 19"/>
           <p:cNvSpPr txBox="1"/>
           <p:nvPr/>
         </p:nvSpPr>
@@ -30289,7 +31330,7 @@
                 <a:ea typeface="Calibri" pitchFamily="34" charset="-122"/>
                 <a:cs typeface="Calibri" pitchFamily="34" charset="-120"/>
               </a:rPr>
-              <a:t>The going concern is losing money, so DCF produces a negative value.</a:t>
+              <a:t>Few routes, high labour costs, no dividend, losing millions a year. Most valuation approaches return a negative number.</a:t>
             </a:r>
             <a:endParaRPr lang="en-US" sz="1100" dirty="0"/>
           </a:p>
@@ -30312,7 +31353,7 @@
                 <a:ea typeface="Calibri" pitchFamily="34" charset="-122"/>
                 <a:cs typeface="Calibri" pitchFamily="34" charset="-120"/>
               </a:rPr>
-              <a:t>But landing slots at congested hubs, aircraft, gate leases, and frequent-flier program are worth a lot to a competitor.</a:t>
+              <a:t>But the routes, landing rights, airport facility leases, ground equipment and aircraft are worth a great deal to a competitor.</a:t>
             </a:r>
             <a:endParaRPr lang="en-US" sz="1100" dirty="0"/>
           </a:p>
@@ -30335,7 +31376,7 @@
                 <a:ea typeface="Calibri" pitchFamily="34" charset="-122"/>
                 <a:cs typeface="Calibri" pitchFamily="34" charset="-120"/>
               </a:rPr>
-              <a:t>Asset-based approach is the RIGHT lens for an acquirer.</a:t>
+              <a:t>Value the assets apart from the business losing money with them.</a:t>
             </a:r>
             <a:endParaRPr lang="en-US" sz="1100" dirty="0"/>
           </a:p>
@@ -30566,7 +31607,7 @@
                 <a:ea typeface="Calibri" pitchFamily="34" charset="-122"/>
                 <a:cs typeface="Calibri" pitchFamily="34" charset="-120"/>
               </a:rPr>
-              <a:t>An initial research report is built on three blocks: company (past &amp; present), industry &amp; competitive analysis, and forecasts — all feeding valuation and a recommendation.</a:t>
+              <a:t>An initial research report has eight elements, built on three analytical blocks — company, industry, forecast — with valuation and a recommendation on top.</a:t>
             </a:r>
             <a:endParaRPr lang="en-US" sz="1150" dirty="0"/>
           </a:p>
@@ -30648,7 +31689,7 @@
                 <a:ea typeface="Calibri" pitchFamily="34" charset="-122"/>
                 <a:cs typeface="Calibri" pitchFamily="34" charset="-120"/>
               </a:rPr>
-              <a:t>Business model = who buys × what we sell × how we make money × the competitive strategy. Decompose revenue into volume × price × mix × FX — pricing power is the decisive lever.</a:t>
+              <a:t>Business model = five questions: what is sold, to whom, through which channel, at what price, bought from whom. Then split revenue into volume × price × mix × FX.</a:t>
             </a:r>
             <a:endParaRPr lang="en-US" sz="1150" dirty="0"/>
           </a:p>
@@ -30730,7 +31771,7 @@
                 <a:ea typeface="Calibri" pitchFamily="34" charset="-122"/>
                 <a:cs typeface="Calibri" pitchFamily="34" charset="-120"/>
               </a:rPr>
-              <a:t>Porter's Five Forces sets the long-run industry profitability ceiling. PESTLE captures the external growth-and-share tides. Rank the forces — one or two always dominate.</a:t>
+              <a:t>Porter sets the long-run profitability ceiling; PESTLE drives growth and share. Rank the forces — one or two always dominate, and those are what you monitor.</a:t>
             </a:r>
             <a:endParaRPr lang="en-US" sz="1150" dirty="0"/>
           </a:p>
@@ -30812,7 +31853,7 @@
                 <a:ea typeface="Calibri" pitchFamily="34" charset="-122"/>
                 <a:cs typeface="Calibri" pitchFamily="34" charset="-120"/>
               </a:rPr>
-              <a:t>Four forecast approaches: historical, base-rate convergence, management guidance, analyst discretionary. Triangulate top-down (market × share) with bottom-up (volume × price).</a:t>
+              <a:t>Four forecast approaches, four forecast objects. Triangulate top-down (market × share) against bottom-up (units × price): the gap is an implied share assumption.</a:t>
             </a:r>
             <a:endParaRPr lang="en-US" sz="1150" dirty="0"/>
           </a:p>
@@ -30894,7 +31935,7 @@
                 <a:ea typeface="Calibri" pitchFamily="34" charset="-122"/>
                 <a:cs typeface="Calibri" pitchFamily="34" charset="-120"/>
               </a:rPr>
-              <a:t>A bear / base / bull scenario triangle quantifies the risks identified in Porter and PESTLE — the iPad-vs-PC case shows a USD 2.2bn FY+1 base-case revenue hit to Microsoft.</a:t>
+              <a:t>Bear / base / bull prices the risks Porter and PESTLE found. CFA's iPad case: USD 2.2 bn of FY12 Microsoft revenue, and USD 0.25 of EPS by FY14.</a:t>
             </a:r>
             <a:endParaRPr lang="en-US" sz="1150" dirty="0"/>
           </a:p>
@@ -30976,7 +32017,7 @@
                 <a:ea typeface="Calibri" pitchFamily="34" charset="-122"/>
                 <a:cs typeface="Calibri" pitchFamily="34" charset="-120"/>
               </a:rPr>
-              <a:t>Gordon growth DDM (Siemens, V₀ = €185.70) and two-stage DDM (IBM, V₀ = USD 147.52) are the workhorses for dividend-paying companies. FCFE replaces dividends with dividend-paying capacity.</a:t>
+              <a:t>Gordon uses D₁, not D₀ — Siemens €185.70. Two-stage bolts a Gordon tail on: IBM USD 147.52, 92% of it terminal, discounted n periods and never n+1.</a:t>
             </a:r>
             <a:endParaRPr lang="en-US" sz="1150" dirty="0"/>
           </a:p>
@@ -31058,7 +32099,7 @@
                 <a:ea typeface="Calibri" pitchFamily="34" charset="-122"/>
                 <a:cs typeface="Calibri" pitchFamily="34" charset="-120"/>
               </a:rPr>
-              <a:t>Justified forward P/E = payout / (r − g). Nestlé: 0.68 / (0.09 − 0.069) = 32.4× — and very sensitive to ROE and payout inputs.</a:t>
+              <a:t>FCFE is dividend-paying capacity, discounted at the cost of equity for equity value. FCFF goes at WACC to enterprise value. Never cross the two rates.</a:t>
             </a:r>
             <a:endParaRPr lang="en-US" sz="1150" dirty="0"/>
           </a:p>
@@ -31140,7 +32181,7 @@
                 <a:ea typeface="Calibri" pitchFamily="34" charset="-122"/>
                 <a:cs typeface="Calibri" pitchFamily="34" charset="-120"/>
               </a:rPr>
-              <a:t>EV / EBITDA (Cameco = 12.4×) beats P/E across capital structures and negative-earnings years. Asset-based valuation sets a floor — useful when intangibles are small or the going concern is gone.</a:t>
+              <a:t>Justified forward P/E = payout/(r − g): Nestlé 32.4×. EV/EBITDA (Cameco 12.4×) survives leverage. Keep numerator and denominator on the same claim.</a:t>
             </a:r>
             <a:endParaRPr lang="en-US" sz="1150" dirty="0"/>
           </a:p>
@@ -31621,7 +32662,7 @@
                 <a:ea typeface="Calibri" pitchFamily="34" charset="-122"/>
                 <a:cs typeface="Calibri" pitchFamily="34" charset="-120"/>
               </a:rPr>
-              <a:t>Source: CFA Institute, Curriculum Vol 5, Learning Module 5, Exhibits 1–2, pp. 198–204.</a:t>
+              <a:t>Source: CFA Institute, Curriculum Vol 5, Learning Module 5, §2 "Company Research Reports", Exhibits 1–2, pp. 202–203.</a:t>
             </a:r>
             <a:endParaRPr lang="en-US" sz="750" dirty="0"/>
           </a:p>
@@ -31663,7 +32704,7 @@
                 <a:ea typeface="Calibri" pitchFamily="34" charset="-122"/>
                 <a:cs typeface="Calibri" pitchFamily="34" charset="-120"/>
               </a:rPr>
-              <a:t>Initial reports cover all eight elements below. Subsequent reports revisit only the ones that have changed — usually financials and valuation.</a:t>
+              <a:t>Initial reports cover all eight elements below. Subsequent reports are shorter and revisit only what changed — usually the financial model and the valuation.</a:t>
             </a:r>
             <a:endParaRPr lang="en-US" sz="1300" dirty="0"/>
           </a:p>
@@ -31740,7 +32781,7 @@
         <p:spPr>
           <a:xfrm>
             <a:off x="457200" y="1508760"/>
-            <a:ext cx="3886200" cy="640080"/>
+            <a:ext cx="3886200" cy="841248"/>
           </a:xfrm>
           <a:prstGeom prst="rect">
             <a:avLst/>
@@ -31760,7 +32801,7 @@
         <p:spPr>
           <a:xfrm>
             <a:off x="457200" y="1508760"/>
-            <a:ext cx="73152" cy="640080"/>
+            <a:ext cx="73152" cy="841248"/>
           </a:xfrm>
           <a:prstGeom prst="rect">
             <a:avLst/>
@@ -31822,7 +32863,7 @@
         <p:spPr>
           <a:xfrm>
             <a:off x="594360" y="1764792"/>
-            <a:ext cx="3703320" cy="347472"/>
+            <a:ext cx="3703320" cy="548640"/>
           </a:xfrm>
           <a:prstGeom prst="rect">
             <a:avLst/>
@@ -31849,7 +32890,7 @@
                 <a:ea typeface="Calibri" pitchFamily="34" charset="-122"/>
                 <a:cs typeface="Calibri" pitchFamily="34" charset="-120"/>
               </a:rPr>
-              <a:t>Revenue, profitability, working capital, capex, capital structure, risks</a:t>
+              <a:t>Forecast objects &amp; approaches · revenue · profitability &amp; working capital · capital investments &amp; structure · key risks</a:t>
             </a:r>
             <a:endParaRPr lang="en-US" sz="1100" dirty="0"/>
           </a:p>
@@ -31863,8 +32904,8 @@
         </p:nvSpPr>
         <p:spPr>
           <a:xfrm>
-            <a:off x="457200" y="2203704"/>
-            <a:ext cx="3886200" cy="640080"/>
+            <a:off x="457200" y="2441448"/>
+            <a:ext cx="3886200" cy="841248"/>
           </a:xfrm>
           <a:prstGeom prst="rect">
             <a:avLst/>
@@ -31883,8 +32924,8 @@
         </p:nvSpPr>
         <p:spPr>
           <a:xfrm>
-            <a:off x="457200" y="2203704"/>
-            <a:ext cx="73152" cy="640080"/>
+            <a:off x="457200" y="2441448"/>
+            <a:ext cx="73152" cy="841248"/>
           </a:xfrm>
           <a:prstGeom prst="rect">
             <a:avLst/>
@@ -31903,7 +32944,7 @@
         </p:nvSpPr>
         <p:spPr>
           <a:xfrm>
-            <a:off x="594360" y="2249424"/>
+            <a:off x="594360" y="2487168"/>
             <a:ext cx="3703320" cy="219456"/>
           </a:xfrm>
           <a:prstGeom prst="rect">
@@ -31945,8 +32986,8 @@
         </p:nvSpPr>
         <p:spPr>
           <a:xfrm>
-            <a:off x="594360" y="2459736"/>
-            <a:ext cx="3703320" cy="347472"/>
+            <a:off x="594360" y="2697480"/>
+            <a:ext cx="3703320" cy="548640"/>
           </a:xfrm>
           <a:prstGeom prst="rect">
             <a:avLst/>
@@ -31973,7 +33014,7 @@
                 <a:ea typeface="Calibri" pitchFamily="34" charset="-122"/>
                 <a:cs typeface="Calibri" pitchFamily="34" charset="-120"/>
               </a:rPr>
-              <a:t>Classification · size/growth/margins · Porter Five Forces · PESTLE · position</a:t>
+              <a:t>Define industry · size, growth, profitability, share · structure (Porter) &amp; external influences (PESTLE) · position</a:t>
             </a:r>
             <a:endParaRPr lang="en-US" sz="1100" dirty="0"/>
           </a:p>
@@ -31987,8 +33028,8 @@
         </p:nvSpPr>
         <p:spPr>
           <a:xfrm>
-            <a:off x="457200" y="2898648"/>
-            <a:ext cx="3886200" cy="640080"/>
+            <a:off x="457200" y="3374136"/>
+            <a:ext cx="3886200" cy="841248"/>
           </a:xfrm>
           <a:prstGeom prst="rect">
             <a:avLst/>
@@ -32007,8 +33048,8 @@
         </p:nvSpPr>
         <p:spPr>
           <a:xfrm>
-            <a:off x="457200" y="2898648"/>
-            <a:ext cx="73152" cy="640080"/>
+            <a:off x="457200" y="3374136"/>
+            <a:ext cx="73152" cy="841248"/>
           </a:xfrm>
           <a:prstGeom prst="rect">
             <a:avLst/>
@@ -32027,7 +33068,7 @@
         </p:nvSpPr>
         <p:spPr>
           <a:xfrm>
-            <a:off x="594360" y="2944368"/>
+            <a:off x="594360" y="3419856"/>
             <a:ext cx="3703320" cy="219456"/>
           </a:xfrm>
           <a:prstGeom prst="rect">
@@ -32069,8 +33110,8 @@
         </p:nvSpPr>
         <p:spPr>
           <a:xfrm>
-            <a:off x="594360" y="3154680"/>
-            <a:ext cx="3703320" cy="347472"/>
+            <a:off x="594360" y="3630168"/>
+            <a:ext cx="3703320" cy="548640"/>
           </a:xfrm>
           <a:prstGeom prst="rect">
             <a:avLst/>
@@ -32097,7 +33138,7 @@
                 <a:ea typeface="Calibri" pitchFamily="34" charset="-122"/>
                 <a:cs typeface="Calibri" pitchFamily="34" charset="-120"/>
               </a:rPr>
-              <a:t>Business model · revenue drivers · operating margins · capital structure</a:t>
+              <a:t>Business model · revenue &amp; revenue drivers · operating profitability &amp; working capital · capital investments &amp; structure</a:t>
             </a:r>
             <a:endParaRPr lang="en-US" sz="1100" dirty="0"/>
           </a:p>
@@ -32207,9 +33248,6 @@
           <a:lstStyle/>
           <a:p>
             <a:pPr indent="0" marL="0">
-              <a:spcAft>
-                <a:spcPts val="200"/>
-              </a:spcAft>
               <a:buNone/>
             </a:pPr>
             <a:r>
@@ -32224,9 +33262,6 @@
               <a:t>1. </a:t>
             </a:r>
             <a:pPr indent="0" marL="0">
-              <a:spcAft>
-                <a:spcPts val="200"/>
-              </a:spcAft>
               <a:buNone/>
             </a:pPr>
             <a:r>
@@ -32238,13 +33273,10 @@
                 <a:ea typeface="Calibri" pitchFamily="34" charset="-122"/>
                 <a:cs typeface="Calibri" pitchFamily="34" charset="-120"/>
               </a:rPr>
-              <a:t>Recommendation (buy / hold / sell) + target price
+              <a:t>Front matter — identifiers, rating, disclosures
 </a:t>
             </a:r>
             <a:pPr indent="0" marL="0">
-              <a:spcAft>
-                <a:spcPts val="200"/>
-              </a:spcAft>
               <a:buNone/>
             </a:pPr>
             <a:r>
@@ -32259,9 +33291,6 @@
               <a:t>2. </a:t>
             </a:r>
             <a:pPr indent="0" marL="0">
-              <a:spcAft>
-                <a:spcPts val="200"/>
-              </a:spcAft>
               <a:buNone/>
             </a:pPr>
             <a:r>
@@ -32273,13 +33302,10 @@
                 <a:ea typeface="Calibri" pitchFamily="34" charset="-122"/>
                 <a:cs typeface="Calibri" pitchFamily="34" charset="-120"/>
               </a:rPr>
-              <a:t>Company description &amp; business model
+              <a:t>Recommendation + target price, and why
 </a:t>
             </a:r>
             <a:pPr indent="0" marL="0">
-              <a:spcAft>
-                <a:spcPts val="200"/>
-              </a:spcAft>
               <a:buNone/>
             </a:pPr>
             <a:r>
@@ -32294,9 +33320,6 @@
               <a:t>3. </a:t>
             </a:r>
             <a:pPr indent="0" marL="0">
-              <a:spcAft>
-                <a:spcPts val="200"/>
-              </a:spcAft>
               <a:buNone/>
             </a:pPr>
             <a:r>
@@ -32308,13 +33331,10 @@
                 <a:ea typeface="Calibri" pitchFamily="34" charset="-122"/>
                 <a:cs typeface="Calibri" pitchFamily="34" charset="-120"/>
               </a:rPr>
-              <a:t>Industry overview &amp; competitive positioning
+              <a:t>Company description &amp; business model
 </a:t>
             </a:r>
             <a:pPr indent="0" marL="0">
-              <a:spcAft>
-                <a:spcPts val="200"/>
-              </a:spcAft>
               <a:buNone/>
             </a:pPr>
             <a:r>
@@ -32329,9 +33349,6 @@
               <a:t>4. </a:t>
             </a:r>
             <a:pPr indent="0" marL="0">
-              <a:spcAft>
-                <a:spcPts val="200"/>
-              </a:spcAft>
               <a:buNone/>
             </a:pPr>
             <a:r>
@@ -32343,13 +33360,10 @@
                 <a:ea typeface="Calibri" pitchFamily="34" charset="-122"/>
                 <a:cs typeface="Calibri" pitchFamily="34" charset="-120"/>
               </a:rPr>
-              <a:t>Financial analysis &amp; model
+              <a:t>Industry overview &amp; competitive positioning
 </a:t>
             </a:r>
             <a:pPr indent="0" marL="0">
-              <a:spcAft>
-                <a:spcPts val="200"/>
-              </a:spcAft>
               <a:buNone/>
             </a:pPr>
             <a:r>
@@ -32364,9 +33378,6 @@
               <a:t>5. </a:t>
             </a:r>
             <a:pPr indent="0" marL="0">
-              <a:spcAft>
-                <a:spcPts val="200"/>
-              </a:spcAft>
               <a:buNone/>
             </a:pPr>
             <a:r>
@@ -32378,13 +33389,10 @@
                 <a:ea typeface="Calibri" pitchFamily="34" charset="-122"/>
                 <a:cs typeface="Calibri" pitchFamily="34" charset="-120"/>
               </a:rPr>
-              <a:t>Valuation (present-value + multiples)
+              <a:t>Financial analysis &amp; model
 </a:t>
             </a:r>
             <a:pPr indent="0" marL="0">
-              <a:spcAft>
-                <a:spcPts val="200"/>
-              </a:spcAft>
               <a:buNone/>
             </a:pPr>
             <a:r>
@@ -32399,9 +33407,6 @@
               <a:t>6. </a:t>
             </a:r>
             <a:pPr indent="0" marL="0">
-              <a:spcAft>
-                <a:spcPts val="200"/>
-              </a:spcAft>
               <a:buNone/>
             </a:pPr>
             <a:r>
@@ -32413,13 +33418,10 @@
                 <a:ea typeface="Calibri" pitchFamily="34" charset="-122"/>
                 <a:cs typeface="Calibri" pitchFamily="34" charset="-120"/>
               </a:rPr>
-              <a:t>ESG considerations
+              <a:t>Valuation — relative and present-value
 </a:t>
             </a:r>
             <a:pPr indent="0" marL="0">
-              <a:spcAft>
-                <a:spcPts val="200"/>
-              </a:spcAft>
               <a:buNone/>
             </a:pPr>
             <a:r>
@@ -32434,9 +33436,6 @@
               <a:t>7. </a:t>
             </a:r>
             <a:pPr indent="0" marL="0">
-              <a:spcAft>
-                <a:spcPts val="200"/>
-              </a:spcAft>
               <a:buNone/>
             </a:pPr>
             <a:r>
@@ -32448,13 +33447,10 @@
                 <a:ea typeface="Calibri" pitchFamily="34" charset="-122"/>
                 <a:cs typeface="Calibri" pitchFamily="34" charset="-120"/>
               </a:rPr>
-              <a:t>Ownership &amp; management
+              <a:t>ESG — incl. ownership, management, pay
 </a:t>
             </a:r>
             <a:pPr indent="0" marL="0">
-              <a:spcAft>
-                <a:spcPts val="200"/>
-              </a:spcAft>
               <a:buNone/>
             </a:pPr>
             <a:r>
@@ -32469,9 +33465,6 @@
               <a:t>8. </a:t>
             </a:r>
             <a:pPr indent="0" marL="0">
-              <a:spcAft>
-                <a:spcPts val="200"/>
-              </a:spcAft>
               <a:buNone/>
             </a:pPr>
             <a:r>
@@ -32483,8 +33476,7 @@
                 <a:ea typeface="Calibri" pitchFamily="34" charset="-122"/>
                 <a:cs typeface="Calibri" pitchFamily="34" charset="-120"/>
               </a:rPr>
-              <a:t>Material upside / downside risks
-</a:t>
+              <a:t>Material upside / downside risks</a:t>
             </a:r>
             <a:endParaRPr lang="en-US" sz="1100" dirty="0"/>
           </a:p>
@@ -32591,7 +33583,7 @@
                 <a:ea typeface="Trebuchet MS" pitchFamily="34" charset="-122"/>
                 <a:cs typeface="Trebuchet MS" pitchFamily="34" charset="-120"/>
               </a:rPr>
-              <a:t>A company's business model answers four simple questions — nail these before touching the spreadsheet</a:t>
+              <a:t>A business model is five questions — what, to whom, through which channel, at what price, and bought from whom</a:t>
             </a:r>
             <a:endParaRPr lang="en-US" sz="1700" dirty="0"/>
           </a:p>
@@ -32667,6 +33659,46 @@
         </p:nvSpPr>
         <p:spPr>
           <a:xfrm>
+            <a:off x="320040" y="4471416"/>
+            <a:ext cx="8503920" cy="192024"/>
+          </a:xfrm>
+          <a:prstGeom prst="rect">
+            <a:avLst/>
+          </a:prstGeom>
+          <a:noFill/>
+          <a:ln/>
+        </p:spPr>
+        <p:txBody>
+          <a:bodyPr wrap="square" lIns="254" tIns="254" rIns="254" bIns="254" rtlCol="0" anchor="t"/>
+          <a:lstStyle/>
+          <a:p>
+            <a:pPr indent="0" marL="0">
+              <a:buNone/>
+            </a:pPr>
+            <a:r>
+              <a:rPr lang="en-US" sz="1000" dirty="0">
+                <a:solidFill>
+                  <a:srgbClr val="6B7A8D"/>
+                </a:solidFill>
+                <a:latin typeface="Calibri" pitchFamily="34" charset="0"/>
+                <a:ea typeface="Calibri" pitchFamily="34" charset="-122"/>
+                <a:cs typeface="Calibri" pitchFamily="34" charset="-120"/>
+              </a:rPr>
+              <a:t>¹ Competitive strategy is not one of the five elements — it belongs to industry analysis (LM 6, §6). Describe first, judge later.
+</a:t>
+            </a:r>
+            <a:endParaRPr lang="en-US" sz="1000" dirty="0"/>
+          </a:p>
+        </p:txBody>
+      </p:sp>
+      <p:sp>
+        <p:nvSpPr>
+          <p:cNvPr id="8" name="Text 6"/>
+          <p:cNvSpPr txBox="1"/>
+          <p:nvPr/>
+        </p:nvSpPr>
+        <p:spPr>
+          <a:xfrm>
             <a:off x="320040" y="4663440"/>
             <a:ext cx="8503920" cy="201168"/>
           </a:xfrm>
@@ -32695,7 +33727,7 @@
                 <a:ea typeface="Calibri" pitchFamily="34" charset="-122"/>
                 <a:cs typeface="Calibri" pitchFamily="34" charset="-120"/>
               </a:rPr>
-              <a:t>Source: CFA Institute, Curriculum Vol 5, Learning Module 5, §3 "Business Model", pp. 204–220.</a:t>
+              <a:t>Source: CFA Institute, Curriculum Vol 5, Learning Module 5, §3 "Determining the Business Model", pp. 205–206.</a:t>
             </a:r>
             <a:endParaRPr lang="en-US" sz="750" dirty="0"/>
           </a:p>
@@ -32703,7 +33735,7 @@
       </p:sp>
       <p:sp>
         <p:nvSpPr>
-          <p:cNvPr id="8" name="Text 6"/>
+          <p:cNvPr id="9" name="Text 7"/>
           <p:cNvSpPr txBox="1"/>
           <p:nvPr/>
         </p:nvSpPr>
@@ -32737,7 +33769,7 @@
                 <a:ea typeface="Calibri" pitchFamily="34" charset="-122"/>
                 <a:cs typeface="Calibri" pitchFamily="34" charset="-120"/>
               </a:rPr>
-              <a:t>Rigorous analysts verify answers with regulatory filings, investor events, site visits, and customer/supplier interviews — never management alone.</a:t>
+              <a:t>Verify answers against filings, earnings calls, investor events, site visits and third-party research — never management alone.</a:t>
             </a:r>
             <a:endParaRPr lang="en-US" sz="1300" dirty="0"/>
           </a:p>
@@ -32745,14 +33777,14 @@
       </p:sp>
       <p:sp>
         <p:nvSpPr>
-          <p:cNvPr id="9" name="Shape 7"/>
+          <p:cNvPr id="10" name="Shape 8"/>
           <p:cNvSpPr/>
           <p:nvPr/>
         </p:nvSpPr>
         <p:spPr>
           <a:xfrm>
-            <a:off x="320040" y="1143000"/>
-            <a:ext cx="8503920" cy="841248"/>
+            <a:off x="320040" y="1051560"/>
+            <a:ext cx="8503920" cy="640080"/>
           </a:xfrm>
           <a:prstGeom prst="rect">
             <a:avLst/>
@@ -32765,14 +33797,14 @@
       </p:sp>
       <p:sp>
         <p:nvSpPr>
-          <p:cNvPr id="10" name="Shape 8"/>
+          <p:cNvPr id="11" name="Shape 9"/>
           <p:cNvSpPr/>
           <p:nvPr/>
         </p:nvSpPr>
         <p:spPr>
           <a:xfrm>
-            <a:off x="320040" y="1143000"/>
-            <a:ext cx="91440" cy="841248"/>
+            <a:off x="320040" y="1051560"/>
+            <a:ext cx="91440" cy="640080"/>
           </a:xfrm>
           <a:prstGeom prst="rect">
             <a:avLst/>
@@ -32785,14 +33817,14 @@
       </p:sp>
       <p:sp>
         <p:nvSpPr>
-          <p:cNvPr id="11" name="Text 9"/>
+          <p:cNvPr id="12" name="Text 10"/>
           <p:cNvSpPr txBox="1"/>
           <p:nvPr/>
         </p:nvSpPr>
         <p:spPr>
           <a:xfrm>
-            <a:off x="502920" y="1143000"/>
-            <a:ext cx="365760" cy="841248"/>
+            <a:off x="502920" y="1051560"/>
+            <a:ext cx="365760" cy="640080"/>
           </a:xfrm>
           <a:prstGeom prst="rect">
             <a:avLst/>
@@ -32827,14 +33859,14 @@
       </p:sp>
       <p:sp>
         <p:nvSpPr>
-          <p:cNvPr id="12" name="Text 10"/>
+          <p:cNvPr id="13" name="Text 11"/>
           <p:cNvSpPr txBox="1"/>
           <p:nvPr/>
         </p:nvSpPr>
         <p:spPr>
           <a:xfrm>
-            <a:off x="868680" y="1179576"/>
-            <a:ext cx="7863840" cy="378562"/>
+            <a:off x="868680" y="1088136"/>
+            <a:ext cx="7863840" cy="288036"/>
           </a:xfrm>
           <a:prstGeom prst="rect">
             <a:avLst/>
@@ -32861,7 +33893,7 @@
                 <a:ea typeface="Trebuchet MS" pitchFamily="34" charset="-122"/>
                 <a:cs typeface="Trebuchet MS" pitchFamily="34" charset="-120"/>
               </a:rPr>
-              <a:t>WHO BUYS?</a:t>
+              <a:t>WHAT IS THE FIRM SELLING?</a:t>
             </a:r>
             <a:endParaRPr lang="en-US" sz="1200" dirty="0"/>
           </a:p>
@@ -32869,14 +33901,14 @@
       </p:sp>
       <p:sp>
         <p:nvSpPr>
-          <p:cNvPr id="13" name="Text 11"/>
+          <p:cNvPr id="14" name="Text 12"/>
           <p:cNvSpPr txBox="1"/>
           <p:nvPr/>
         </p:nvSpPr>
         <p:spPr>
           <a:xfrm>
-            <a:off x="868680" y="1521562"/>
-            <a:ext cx="7863840" cy="462686"/>
+            <a:off x="868680" y="1339596"/>
+            <a:ext cx="7863840" cy="352044"/>
           </a:xfrm>
           <a:prstGeom prst="rect">
             <a:avLst/>
@@ -32903,7 +33935,7 @@
                 <a:ea typeface="Calibri" pitchFamily="34" charset="-122"/>
                 <a:cs typeface="Calibri" pitchFamily="34" charset="-120"/>
               </a:rPr>
-              <a:t>Customer segments, geographic footprint, concentration. Is it one large customer (Apple → TSMC), many small ones (retail shopper), or a captive government buyer (defense)?</a:t>
+              <a:t>Products and services; recurring vs one-off; single-segment (Warehouse Club Inc.) or a conglomerate. Most firms fit a conventional model — analyse the differences.</a:t>
             </a:r>
             <a:endParaRPr lang="en-US" sz="1200" dirty="0"/>
           </a:p>
@@ -32911,14 +33943,14 @@
       </p:sp>
       <p:sp>
         <p:nvSpPr>
-          <p:cNvPr id="14" name="Shape 12"/>
+          <p:cNvPr id="15" name="Shape 13"/>
           <p:cNvSpPr/>
           <p:nvPr/>
         </p:nvSpPr>
         <p:spPr>
           <a:xfrm>
-            <a:off x="320040" y="2029968"/>
-            <a:ext cx="8503920" cy="841248"/>
+            <a:off x="320040" y="1719072"/>
+            <a:ext cx="8503920" cy="640080"/>
           </a:xfrm>
           <a:prstGeom prst="rect">
             <a:avLst/>
@@ -32931,14 +33963,14 @@
       </p:sp>
       <p:sp>
         <p:nvSpPr>
-          <p:cNvPr id="15" name="Shape 13"/>
+          <p:cNvPr id="16" name="Shape 14"/>
           <p:cNvSpPr/>
           <p:nvPr/>
         </p:nvSpPr>
         <p:spPr>
           <a:xfrm>
-            <a:off x="320040" y="2029968"/>
-            <a:ext cx="91440" cy="841248"/>
+            <a:off x="320040" y="1719072"/>
+            <a:ext cx="91440" cy="640080"/>
           </a:xfrm>
           <a:prstGeom prst="rect">
             <a:avLst/>
@@ -32951,14 +33983,14 @@
       </p:sp>
       <p:sp>
         <p:nvSpPr>
-          <p:cNvPr id="16" name="Text 14"/>
+          <p:cNvPr id="17" name="Text 15"/>
           <p:cNvSpPr txBox="1"/>
           <p:nvPr/>
         </p:nvSpPr>
         <p:spPr>
           <a:xfrm>
-            <a:off x="502920" y="2029968"/>
-            <a:ext cx="365760" cy="841248"/>
+            <a:off x="502920" y="1719072"/>
+            <a:ext cx="365760" cy="640080"/>
           </a:xfrm>
           <a:prstGeom prst="rect">
             <a:avLst/>
@@ -32993,14 +34025,14 @@
       </p:sp>
       <p:sp>
         <p:nvSpPr>
-          <p:cNvPr id="17" name="Text 15"/>
+          <p:cNvPr id="18" name="Text 16"/>
           <p:cNvSpPr txBox="1"/>
           <p:nvPr/>
         </p:nvSpPr>
         <p:spPr>
           <a:xfrm>
-            <a:off x="868680" y="2066544"/>
-            <a:ext cx="7863840" cy="378562"/>
+            <a:off x="868680" y="1755648"/>
+            <a:ext cx="7863840" cy="288036"/>
           </a:xfrm>
           <a:prstGeom prst="rect">
             <a:avLst/>
@@ -33027,7 +34059,7 @@
                 <a:ea typeface="Trebuchet MS" pitchFamily="34" charset="-122"/>
                 <a:cs typeface="Trebuchet MS" pitchFamily="34" charset="-120"/>
               </a:rPr>
-              <a:t>WHAT DO WE SELL?</a:t>
+              <a:t>TO WHOM DOES IT SELL?</a:t>
             </a:r>
             <a:endParaRPr lang="en-US" sz="1200" dirty="0"/>
           </a:p>
@@ -33035,14 +34067,14 @@
       </p:sp>
       <p:sp>
         <p:nvSpPr>
-          <p:cNvPr id="18" name="Text 16"/>
+          <p:cNvPr id="19" name="Text 17"/>
           <p:cNvSpPr txBox="1"/>
           <p:nvPr/>
         </p:nvSpPr>
         <p:spPr>
           <a:xfrm>
-            <a:off x="868680" y="2408530"/>
-            <a:ext cx="7863840" cy="462686"/>
+            <a:off x="868680" y="2007108"/>
+            <a:ext cx="7863840" cy="352044"/>
           </a:xfrm>
           <a:prstGeom prst="rect">
             <a:avLst/>
@@ -33069,7 +34101,7 @@
                 <a:ea typeface="Calibri" pitchFamily="34" charset="-122"/>
                 <a:cs typeface="Calibri" pitchFamily="34" charset="-120"/>
               </a:rPr>
-              <a:t>Products &amp; services, recurring vs one-off, discretionary vs staple, single-product vs multi-segment. Warehouse Club Inc. is single-segment; conglomerates are the other extreme.</a:t>
+              <a:t>Customers and key customer groups: one dominant buyer, a fragmented consumer base, or a captive government buyer. Concentration is the number to find.</a:t>
             </a:r>
             <a:endParaRPr lang="en-US" sz="1200" dirty="0"/>
           </a:p>
@@ -33077,14 +34109,14 @@
       </p:sp>
       <p:sp>
         <p:nvSpPr>
-          <p:cNvPr id="19" name="Shape 17"/>
+          <p:cNvPr id="20" name="Shape 18"/>
           <p:cNvSpPr/>
           <p:nvPr/>
         </p:nvSpPr>
         <p:spPr>
           <a:xfrm>
-            <a:off x="320040" y="2916936"/>
-            <a:ext cx="8503920" cy="841248"/>
+            <a:off x="320040" y="2386584"/>
+            <a:ext cx="8503920" cy="640080"/>
           </a:xfrm>
           <a:prstGeom prst="rect">
             <a:avLst/>
@@ -33097,14 +34129,14 @@
       </p:sp>
       <p:sp>
         <p:nvSpPr>
-          <p:cNvPr id="20" name="Shape 18"/>
+          <p:cNvPr id="21" name="Shape 19"/>
           <p:cNvSpPr/>
           <p:nvPr/>
         </p:nvSpPr>
         <p:spPr>
           <a:xfrm>
-            <a:off x="320040" y="2916936"/>
-            <a:ext cx="91440" cy="841248"/>
+            <a:off x="320040" y="2386584"/>
+            <a:ext cx="91440" cy="640080"/>
           </a:xfrm>
           <a:prstGeom prst="rect">
             <a:avLst/>
@@ -33117,14 +34149,14 @@
       </p:sp>
       <p:sp>
         <p:nvSpPr>
-          <p:cNvPr id="21" name="Text 19"/>
+          <p:cNvPr id="22" name="Text 20"/>
           <p:cNvSpPr txBox="1"/>
           <p:nvPr/>
         </p:nvSpPr>
         <p:spPr>
           <a:xfrm>
-            <a:off x="502920" y="2916936"/>
-            <a:ext cx="365760" cy="841248"/>
+            <a:off x="502920" y="2386584"/>
+            <a:ext cx="365760" cy="640080"/>
           </a:xfrm>
           <a:prstGeom prst="rect">
             <a:avLst/>
@@ -33159,14 +34191,14 @@
       </p:sp>
       <p:sp>
         <p:nvSpPr>
-          <p:cNvPr id="22" name="Text 20"/>
+          <p:cNvPr id="23" name="Text 21"/>
           <p:cNvSpPr txBox="1"/>
           <p:nvPr/>
         </p:nvSpPr>
         <p:spPr>
           <a:xfrm>
-            <a:off x="868680" y="2953512"/>
-            <a:ext cx="7863840" cy="378562"/>
+            <a:off x="868680" y="2423160"/>
+            <a:ext cx="7863840" cy="288036"/>
           </a:xfrm>
           <a:prstGeom prst="rect">
             <a:avLst/>
@@ -33193,7 +34225,7 @@
                 <a:ea typeface="Trebuchet MS" pitchFamily="34" charset="-122"/>
                 <a:cs typeface="Trebuchet MS" pitchFamily="34" charset="-120"/>
               </a:rPr>
-              <a:t>HOW DO WE MAKE MONEY?</a:t>
+              <a:t>HOW DOES IT REACH THEM?</a:t>
             </a:r>
             <a:endParaRPr lang="en-US" sz="1200" dirty="0"/>
           </a:p>
@@ -33201,14 +34233,14 @@
       </p:sp>
       <p:sp>
         <p:nvSpPr>
-          <p:cNvPr id="23" name="Text 21"/>
+          <p:cNvPr id="24" name="Text 22"/>
           <p:cNvSpPr txBox="1"/>
           <p:nvPr/>
         </p:nvSpPr>
         <p:spPr>
           <a:xfrm>
-            <a:off x="868680" y="3295498"/>
-            <a:ext cx="7863840" cy="462686"/>
+            <a:off x="868680" y="2674620"/>
+            <a:ext cx="7863840" cy="352044"/>
           </a:xfrm>
           <a:prstGeom prst="rect">
             <a:avLst/>
@@ -33235,7 +34267,7 @@
                 <a:ea typeface="Calibri" pitchFamily="34" charset="-122"/>
                 <a:cs typeface="Calibri" pitchFamily="34" charset="-120"/>
               </a:rPr>
-              <a:t>Unit economics: price × volume, margin structure, fixed vs variable cost split, working-capital cycle, required capital intensity. Drives operating leverage and returns on capital.</a:t>
+              <a:t>Sales channels: customer acquisition and delivery. Own stores, wholesale, direct-to-consumer, marketplace, distributor — each carries a different cost and margin.</a:t>
             </a:r>
             <a:endParaRPr lang="en-US" sz="1200" dirty="0"/>
           </a:p>
@@ -33243,14 +34275,14 @@
       </p:sp>
       <p:sp>
         <p:nvSpPr>
-          <p:cNvPr id="24" name="Shape 22"/>
+          <p:cNvPr id="25" name="Shape 23"/>
           <p:cNvSpPr/>
           <p:nvPr/>
         </p:nvSpPr>
         <p:spPr>
           <a:xfrm>
-            <a:off x="320040" y="3803904"/>
-            <a:ext cx="8503920" cy="841248"/>
+            <a:off x="320040" y="3054096"/>
+            <a:ext cx="8503920" cy="640080"/>
           </a:xfrm>
           <a:prstGeom prst="rect">
             <a:avLst/>
@@ -33263,14 +34295,14 @@
       </p:sp>
       <p:sp>
         <p:nvSpPr>
-          <p:cNvPr id="25" name="Shape 23"/>
+          <p:cNvPr id="26" name="Shape 24"/>
           <p:cNvSpPr/>
           <p:nvPr/>
         </p:nvSpPr>
         <p:spPr>
           <a:xfrm>
-            <a:off x="320040" y="3803904"/>
-            <a:ext cx="91440" cy="841248"/>
+            <a:off x="320040" y="3054096"/>
+            <a:ext cx="91440" cy="640080"/>
           </a:xfrm>
           <a:prstGeom prst="rect">
             <a:avLst/>
@@ -33283,14 +34315,14 @@
       </p:sp>
       <p:sp>
         <p:nvSpPr>
-          <p:cNvPr id="26" name="Text 24"/>
+          <p:cNvPr id="27" name="Text 25"/>
           <p:cNvSpPr txBox="1"/>
           <p:nvPr/>
         </p:nvSpPr>
         <p:spPr>
           <a:xfrm>
-            <a:off x="502920" y="3803904"/>
-            <a:ext cx="365760" cy="841248"/>
+            <a:off x="502920" y="3054096"/>
+            <a:ext cx="365760" cy="640080"/>
           </a:xfrm>
           <a:prstGeom prst="rect">
             <a:avLst/>
@@ -33325,14 +34357,14 @@
       </p:sp>
       <p:sp>
         <p:nvSpPr>
-          <p:cNvPr id="27" name="Text 25"/>
+          <p:cNvPr id="28" name="Text 26"/>
           <p:cNvSpPr txBox="1"/>
           <p:nvPr/>
         </p:nvSpPr>
         <p:spPr>
           <a:xfrm>
-            <a:off x="868680" y="3840480"/>
-            <a:ext cx="7863840" cy="378562"/>
+            <a:off x="868680" y="3090672"/>
+            <a:ext cx="7863840" cy="288036"/>
           </a:xfrm>
           <a:prstGeom prst="rect">
             <a:avLst/>
@@ -33359,7 +34391,7 @@
                 <a:ea typeface="Trebuchet MS" pitchFamily="34" charset="-122"/>
                 <a:cs typeface="Trebuchet MS" pitchFamily="34" charset="-120"/>
               </a:rPr>
-              <a:t>WHAT IS THE STRATEGY?</a:t>
+              <a:t>HOW IS IT PRICED AND PAID?</a:t>
             </a:r>
             <a:endParaRPr lang="en-US" sz="1200" dirty="0"/>
           </a:p>
@@ -33367,14 +34399,14 @@
       </p:sp>
       <p:sp>
         <p:nvSpPr>
-          <p:cNvPr id="28" name="Text 26"/>
+          <p:cNvPr id="29" name="Text 27"/>
           <p:cNvSpPr txBox="1"/>
           <p:nvPr/>
         </p:nvSpPr>
         <p:spPr>
           <a:xfrm>
-            <a:off x="868680" y="4182466"/>
-            <a:ext cx="7863840" cy="462686"/>
+            <a:off x="868680" y="3342132"/>
+            <a:ext cx="7863840" cy="352044"/>
           </a:xfrm>
           <a:prstGeom prst="rect">
             <a:avLst/>
@@ -33401,7 +34433,173 @@
                 <a:ea typeface="Calibri" pitchFamily="34" charset="-122"/>
                 <a:cs typeface="Calibri" pitchFamily="34" charset="-120"/>
               </a:rPr>
-              <a:t>Cost leadership, differentiation or focus. Intentional strategy with measurement and feedback beats unintentional drift — and is usually only visible in hindsight.</a:t>
+              <a:t>Price levels and structure, payment terms, subscriptions vs transactions. Sets the revenue line and the working-capital cycle at the same time.</a:t>
+            </a:r>
+            <a:endParaRPr lang="en-US" sz="1200" dirty="0"/>
+          </a:p>
+        </p:txBody>
+      </p:sp>
+      <p:sp>
+        <p:nvSpPr>
+          <p:cNvPr id="30" name="Shape 28"/>
+          <p:cNvSpPr/>
+          <p:nvPr/>
+        </p:nvSpPr>
+        <p:spPr>
+          <a:xfrm>
+            <a:off x="320040" y="3721608"/>
+            <a:ext cx="8503920" cy="640080"/>
+          </a:xfrm>
+          <a:prstGeom prst="rect">
+            <a:avLst/>
+          </a:prstGeom>
+          <a:solidFill>
+            <a:srgbClr val="FFFFFF"/>
+          </a:solidFill>
+          <a:ln/>
+        </p:spPr>
+      </p:sp>
+      <p:sp>
+        <p:nvSpPr>
+          <p:cNvPr id="31" name="Shape 29"/>
+          <p:cNvSpPr/>
+          <p:nvPr/>
+        </p:nvSpPr>
+        <p:spPr>
+          <a:xfrm>
+            <a:off x="320040" y="3721608"/>
+            <a:ext cx="91440" cy="640080"/>
+          </a:xfrm>
+          <a:prstGeom prst="rect">
+            <a:avLst/>
+          </a:prstGeom>
+          <a:solidFill>
+            <a:srgbClr val="E8600A"/>
+          </a:solidFill>
+          <a:ln/>
+        </p:spPr>
+      </p:sp>
+      <p:sp>
+        <p:nvSpPr>
+          <p:cNvPr id="32" name="Text 30"/>
+          <p:cNvSpPr txBox="1"/>
+          <p:nvPr/>
+        </p:nvSpPr>
+        <p:spPr>
+          <a:xfrm>
+            <a:off x="502920" y="3721608"/>
+            <a:ext cx="365760" cy="640080"/>
+          </a:xfrm>
+          <a:prstGeom prst="rect">
+            <a:avLst/>
+          </a:prstGeom>
+          <a:noFill/>
+          <a:ln/>
+        </p:spPr>
+        <p:txBody>
+          <a:bodyPr wrap="square" lIns="508" tIns="508" rIns="508" bIns="508" rtlCol="0" anchor="ctr">
+            <a:normAutofit/>
+            <a:spAutoFit/>
+          </a:bodyPr>
+          <a:lstStyle/>
+          <a:p>
+            <a:pPr algn="l" indent="0" marL="0">
+              <a:buNone/>
+            </a:pPr>
+            <a:r>
+              <a:rPr lang="en-US" sz="1300" b="1" dirty="0">
+                <a:solidFill>
+                  <a:srgbClr val="1B2A4A"/>
+                </a:solidFill>
+                <a:latin typeface="Trebuchet MS" pitchFamily="34" charset="0"/>
+                <a:ea typeface="Trebuchet MS" pitchFamily="34" charset="-122"/>
+                <a:cs typeface="Trebuchet MS" pitchFamily="34" charset="-120"/>
+              </a:rPr>
+              <a:t>5</a:t>
+            </a:r>
+            <a:endParaRPr lang="en-US" sz="1300" dirty="0"/>
+          </a:p>
+        </p:txBody>
+      </p:sp>
+      <p:sp>
+        <p:nvSpPr>
+          <p:cNvPr id="33" name="Text 31"/>
+          <p:cNvSpPr txBox="1"/>
+          <p:nvPr/>
+        </p:nvSpPr>
+        <p:spPr>
+          <a:xfrm>
+            <a:off x="868680" y="3758184"/>
+            <a:ext cx="7863840" cy="288036"/>
+          </a:xfrm>
+          <a:prstGeom prst="rect">
+            <a:avLst/>
+          </a:prstGeom>
+          <a:noFill/>
+          <a:ln/>
+        </p:spPr>
+        <p:txBody>
+          <a:bodyPr wrap="square" lIns="508" tIns="508" rIns="508" bIns="508" rtlCol="0" anchor="ctr">
+            <a:normAutofit/>
+            <a:spAutoFit/>
+          </a:bodyPr>
+          <a:lstStyle/>
+          <a:p>
+            <a:pPr algn="l" indent="0" marL="0">
+              <a:buNone/>
+            </a:pPr>
+            <a:r>
+              <a:rPr lang="en-US" sz="1200" b="1" dirty="0">
+                <a:solidFill>
+                  <a:srgbClr val="1B2A4A"/>
+                </a:solidFill>
+                <a:latin typeface="Trebuchet MS" pitchFamily="34" charset="0"/>
+                <a:ea typeface="Trebuchet MS" pitchFamily="34" charset="-122"/>
+                <a:cs typeface="Trebuchet MS" pitchFamily="34" charset="-120"/>
+              </a:rPr>
+              <a:t>WHAT DOES IT BUY AND RELY ON?</a:t>
+            </a:r>
+            <a:endParaRPr lang="en-US" sz="1200" dirty="0"/>
+          </a:p>
+        </p:txBody>
+      </p:sp>
+      <p:sp>
+        <p:nvSpPr>
+          <p:cNvPr id="34" name="Text 32"/>
+          <p:cNvSpPr txBox="1"/>
+          <p:nvPr/>
+        </p:nvSpPr>
+        <p:spPr>
+          <a:xfrm>
+            <a:off x="868680" y="4009644"/>
+            <a:ext cx="7863840" cy="352044"/>
+          </a:xfrm>
+          <a:prstGeom prst="rect">
+            <a:avLst/>
+          </a:prstGeom>
+          <a:noFill/>
+          <a:ln/>
+        </p:spPr>
+        <p:txBody>
+          <a:bodyPr wrap="square" lIns="508" tIns="508" rIns="508" bIns="508" rtlCol="0" anchor="t">
+            <a:normAutofit/>
+            <a:spAutoFit/>
+          </a:bodyPr>
+          <a:lstStyle/>
+          <a:p>
+            <a:pPr algn="l" indent="0" marL="0">
+              <a:buNone/>
+            </a:pPr>
+            <a:r>
+              <a:rPr lang="en-US" sz="1200" dirty="0">
+                <a:solidFill>
+                  <a:srgbClr val="334155"/>
+                </a:solidFill>
+                <a:latin typeface="Calibri" pitchFamily="34" charset="0"/>
+                <a:ea typeface="Calibri" pitchFamily="34" charset="-122"/>
+                <a:cs typeface="Calibri" pitchFamily="34" charset="-120"/>
+              </a:rPr>
+              <a:t>Resources, suppliers and partners. Are inputs specialised or hard to replace? This is where supplier power and single points of failure hide.</a:t>
             </a:r>
             <a:endParaRPr lang="en-US" sz="1200" dirty="0"/>
           </a:p>
@@ -33612,7 +34810,7 @@
                 <a:ea typeface="Calibri" pitchFamily="34" charset="-122"/>
                 <a:cs typeface="Calibri" pitchFamily="34" charset="-120"/>
               </a:rPr>
-              <a:t>Source: CFA Institute, Curriculum Vol 5, Learning Module 5, self-assessment Q4 and §3 "Revenue Analysis", pp. 200, 204–212.</a:t>
+              <a:t>Source: CFA Institute, Curriculum Vol 5, Learning Module 5, self-assessment Q4 (p. 199) and §4 "Revenue Analysis", pp. 217–223.</a:t>
             </a:r>
             <a:endParaRPr lang="en-US" sz="750" dirty="0"/>
           </a:p>
@@ -33716,7 +34914,7 @@
                 <a:ea typeface="Consolas" pitchFamily="34" charset="-122"/>
                 <a:cs typeface="Consolas" pitchFamily="34" charset="-120"/>
               </a:rPr>
-              <a:t>Revenue  =  Volume × Price        ΔRev  ≈  %ΔVolume  +  %ΔPrice  +  Mix  +  FX</a:t>
+              <a:t>Revenue = Volume × Price    ΔRev ≈ %ΔVolume + %ΔPrice + Mix + FX</a:t>
             </a:r>
             <a:endParaRPr lang="en-US" sz="1800" dirty="0"/>
           </a:p>
@@ -33772,8 +34970,8 @@
         </p:nvSpPr>
         <p:spPr>
           <a:xfrm>
-            <a:off x="320040" y="2377440"/>
-            <a:ext cx="8503920" cy="1920240"/>
+            <a:off x="320040" y="2240280"/>
+            <a:ext cx="8503920" cy="2194560"/>
           </a:xfrm>
           <a:prstGeom prst="rect">
             <a:avLst/>
@@ -33797,7 +34995,7 @@
         </p:nvSpPr>
         <p:spPr>
           <a:xfrm>
-            <a:off x="457200" y="2423160"/>
+            <a:off x="457200" y="2286000"/>
             <a:ext cx="8229600" cy="256032"/>
           </a:xfrm>
           <a:prstGeom prst="rect">
@@ -33839,7 +35037,7 @@
         </p:nvSpPr>
         <p:spPr>
           <a:xfrm>
-            <a:off x="457200" y="2715768"/>
+            <a:off x="457200" y="2578608"/>
             <a:ext cx="8229600" cy="457200"/>
           </a:xfrm>
           <a:prstGeom prst="rect">
@@ -33881,8 +35079,8 @@
         </p:nvSpPr>
         <p:spPr>
           <a:xfrm>
-            <a:off x="457200" y="3227832"/>
-            <a:ext cx="8229600" cy="557784"/>
+            <a:off x="457200" y="3090672"/>
+            <a:ext cx="8229600" cy="832104"/>
           </a:xfrm>
           <a:prstGeom prst="rect">
             <a:avLst/>
@@ -33904,7 +35102,7 @@
               <a:buNone/>
             </a:pPr>
             <a:r>
-              <a:rPr lang="en-US" sz="1050" b="1" dirty="0">
+              <a:rPr lang="en-US" sz="1150" b="1" dirty="0">
                 <a:solidFill>
                   <a:srgbClr val="1B2A4A"/>
                 </a:solidFill>
@@ -33921,7 +35119,7 @@
               <a:buNone/>
             </a:pPr>
             <a:r>
-              <a:rPr lang="en-US" sz="1050" dirty="0">
+              <a:rPr lang="en-US" sz="1150" dirty="0">
                 <a:solidFill>
                   <a:srgbClr val="334155"/>
                 </a:solidFill>
@@ -33939,7 +35137,7 @@
               <a:buNone/>
             </a:pPr>
             <a:r>
-              <a:rPr lang="en-US" sz="1050" b="1" dirty="0">
+              <a:rPr lang="en-US" sz="1150" b="1" dirty="0">
                 <a:solidFill>
                   <a:srgbClr val="1B2A4A"/>
                 </a:solidFill>
@@ -33956,7 +35154,7 @@
               <a:buNone/>
             </a:pPr>
             <a:r>
-              <a:rPr lang="en-US" sz="1050" dirty="0">
+              <a:rPr lang="en-US" sz="1150" dirty="0">
                 <a:solidFill>
                   <a:srgbClr val="334155"/>
                 </a:solidFill>
@@ -33974,7 +35172,7 @@
               <a:buNone/>
             </a:pPr>
             <a:r>
-              <a:rPr lang="en-US" sz="1050" b="1" dirty="0">
+              <a:rPr lang="en-US" sz="1150" b="1" dirty="0">
                 <a:solidFill>
                   <a:srgbClr val="1B2A4A"/>
                 </a:solidFill>
@@ -33991,7 +35189,7 @@
               <a:buNone/>
             </a:pPr>
             <a:r>
-              <a:rPr lang="en-US" sz="1050" dirty="0">
+              <a:rPr lang="en-US" sz="1150" dirty="0">
                 <a:solidFill>
                   <a:srgbClr val="334155"/>
                 </a:solidFill>
@@ -34009,7 +35207,7 @@
               <a:buNone/>
             </a:pPr>
             <a:r>
-              <a:rPr lang="en-US" sz="1050" b="1" dirty="0">
+              <a:rPr lang="en-US" sz="1150" b="1" dirty="0">
                 <a:solidFill>
                   <a:srgbClr val="1B2A4A"/>
                 </a:solidFill>
@@ -34026,7 +35224,7 @@
               <a:buNone/>
             </a:pPr>
             <a:r>
-              <a:rPr lang="en-US" sz="1050" dirty="0">
+              <a:rPr lang="en-US" sz="1150" dirty="0">
                 <a:solidFill>
                   <a:srgbClr val="334155"/>
                 </a:solidFill>
@@ -34036,7 +35234,7 @@
               </a:rPr>
               <a:t>Growth: 63 / 40 − 1 = +57.5%, rounded to 58%</a:t>
             </a:r>
-            <a:endParaRPr lang="en-US" sz="1050" dirty="0"/>
+            <a:endParaRPr lang="en-US" sz="1150" dirty="0"/>
           </a:p>
         </p:txBody>
       </p:sp>
@@ -34048,7 +35246,7 @@
         </p:nvSpPr>
         <p:spPr>
           <a:xfrm>
-            <a:off x="411480" y="3858768"/>
+            <a:off x="411480" y="3995928"/>
             <a:ext cx="8321040" cy="365760"/>
           </a:xfrm>
           <a:prstGeom prst="rect">
@@ -34068,7 +35266,7 @@
         </p:nvSpPr>
         <p:spPr>
           <a:xfrm>
-            <a:off x="457200" y="3858768"/>
+            <a:off x="457200" y="3995928"/>
             <a:ext cx="8229600" cy="365760"/>
           </a:xfrm>
           <a:prstGeom prst="rect">
@@ -34096,7 +35294,7 @@
                 <a:ea typeface="Consolas" pitchFamily="34" charset="-122"/>
                 <a:cs typeface="Consolas" pitchFamily="34" charset="-120"/>
               </a:rPr>
-              <a:t>Growth = +58%. Volume effect +50%, price effect +5%, interaction +2.5% — all three matter at once.</a:t>
+              <a:t>Growth = +58%. Volume effect +50%, price effect +5%, interaction +2.5% — all three at once.</a:t>
             </a:r>
             <a:endParaRPr lang="en-US" sz="1150" dirty="0"/>
           </a:p>
@@ -34307,7 +35505,7 @@
                 <a:ea typeface="Calibri" pitchFamily="34" charset="-122"/>
                 <a:cs typeface="Calibri" pitchFamily="34" charset="-120"/>
               </a:rPr>
-              <a:t>Source: CFA Institute, Curriculum Vol 5, Learning Module 5, self-assessment Q6 &amp; Q8 and §4 "Cost &amp; Leverage", pp. 200–201, 221–245.</a:t>
+              <a:t>Source: CFA Institute, Curriculum Vol 5, Learning Module 5, self-assessment Q6 &amp; Q8 (pp. 200–201); DOL §5 p. 226; DFL §6 p. 237; DTL p. 244.</a:t>
             </a:r>
             <a:endParaRPr lang="en-US" sz="750" dirty="0"/>
           </a:p>
@@ -34411,7 +35609,7 @@
                 <a:ea typeface="Consolas" pitchFamily="34" charset="-122"/>
                 <a:cs typeface="Consolas" pitchFamily="34" charset="-120"/>
               </a:rPr>
-              <a:t>DOL  =  %ΔEBIT / %ΔSales        DFL  =  %ΔNI / %ΔEBIT        DTL  =  DOL × DFL</a:t>
+              <a:t>DOL = %ΔEBIT/%ΔSales    DFL = %ΔNI/%ΔEBIT    DTL = DOL × DFL</a:t>
             </a:r>
             <a:endParaRPr lang="en-US" sz="1800" dirty="0"/>
           </a:p>
@@ -34467,8 +35665,8 @@
         </p:nvSpPr>
         <p:spPr>
           <a:xfrm>
-            <a:off x="320040" y="2377440"/>
-            <a:ext cx="8503920" cy="1920240"/>
+            <a:off x="320040" y="2240280"/>
+            <a:ext cx="8503920" cy="2194560"/>
           </a:xfrm>
           <a:prstGeom prst="rect">
             <a:avLst/>
@@ -34492,7 +35690,7 @@
         </p:nvSpPr>
         <p:spPr>
           <a:xfrm>
-            <a:off x="457200" y="2423160"/>
+            <a:off x="457200" y="2286000"/>
             <a:ext cx="8229600" cy="256032"/>
           </a:xfrm>
           <a:prstGeom prst="rect">
@@ -34534,7 +35732,7 @@
         </p:nvSpPr>
         <p:spPr>
           <a:xfrm>
-            <a:off x="457200" y="2715768"/>
+            <a:off x="457200" y="2578608"/>
             <a:ext cx="8229600" cy="457200"/>
           </a:xfrm>
           <a:prstGeom prst="rect">
@@ -34576,8 +35774,8 @@
         </p:nvSpPr>
         <p:spPr>
           <a:xfrm>
-            <a:off x="457200" y="3227832"/>
-            <a:ext cx="8229600" cy="557784"/>
+            <a:off x="457200" y="3090672"/>
+            <a:ext cx="8229600" cy="832104"/>
           </a:xfrm>
           <a:prstGeom prst="rect">
             <a:avLst/>
@@ -34599,7 +35797,7 @@
               <a:buNone/>
             </a:pPr>
             <a:r>
-              <a:rPr lang="en-US" sz="1100" b="1" dirty="0">
+              <a:rPr lang="en-US" sz="1200" b="1" dirty="0">
                 <a:solidFill>
                   <a:srgbClr val="1B2A4A"/>
                 </a:solidFill>
@@ -34616,7 +35814,7 @@
               <a:buNone/>
             </a:pPr>
             <a:r>
-              <a:rPr lang="en-US" sz="1100" dirty="0">
+              <a:rPr lang="en-US" sz="1200" dirty="0">
                 <a:solidFill>
                   <a:srgbClr val="334155"/>
                 </a:solidFill>
@@ -34634,7 +35832,7 @@
               <a:buNone/>
             </a:pPr>
             <a:r>
-              <a:rPr lang="en-US" sz="1100" b="1" dirty="0">
+              <a:rPr lang="en-US" sz="1200" b="1" dirty="0">
                 <a:solidFill>
                   <a:srgbClr val="1B2A4A"/>
                 </a:solidFill>
@@ -34651,7 +35849,7 @@
               <a:buNone/>
             </a:pPr>
             <a:r>
-              <a:rPr lang="en-US" sz="1100" dirty="0">
+              <a:rPr lang="en-US" sz="1200" dirty="0">
                 <a:solidFill>
                   <a:srgbClr val="334155"/>
                 </a:solidFill>
@@ -34669,7 +35867,7 @@
               <a:buNone/>
             </a:pPr>
             <a:r>
-              <a:rPr lang="en-US" sz="1100" b="1" dirty="0">
+              <a:rPr lang="en-US" sz="1200" b="1" dirty="0">
                 <a:solidFill>
                   <a:srgbClr val="1B2A4A"/>
                 </a:solidFill>
@@ -34686,7 +35884,7 @@
               <a:buNone/>
             </a:pPr>
             <a:r>
-              <a:rPr lang="en-US" sz="1100" dirty="0">
+              <a:rPr lang="en-US" sz="1200" dirty="0">
                 <a:solidFill>
                   <a:srgbClr val="334155"/>
                 </a:solidFill>
@@ -34696,7 +35894,7 @@
               </a:rPr>
               <a:t>DOL      =  9.56% / 4.87%     =  1.96×</a:t>
             </a:r>
-            <a:endParaRPr lang="en-US" sz="1100" dirty="0"/>
+            <a:endParaRPr lang="en-US" sz="1200" dirty="0"/>
           </a:p>
         </p:txBody>
       </p:sp>
@@ -34708,7 +35906,7 @@
         </p:nvSpPr>
         <p:spPr>
           <a:xfrm>
-            <a:off x="411480" y="3858768"/>
+            <a:off x="411480" y="3995928"/>
             <a:ext cx="8321040" cy="365760"/>
           </a:xfrm>
           <a:prstGeom prst="rect">
@@ -34728,7 +35926,7 @@
         </p:nvSpPr>
         <p:spPr>
           <a:xfrm>
-            <a:off x="457200" y="3858768"/>
+            <a:off x="457200" y="3995928"/>
             <a:ext cx="8229600" cy="365760"/>
           </a:xfrm>
           <a:prstGeom prst="rect">
@@ -34756,7 +35954,7 @@
                 <a:ea typeface="Consolas" pitchFamily="34" charset="-122"/>
                 <a:cs typeface="Consolas" pitchFamily="34" charset="-120"/>
               </a:rPr>
-              <a:t>DOL = 1.96× — a 1% sales move becomes a 1.96% EBIT move. Any DFL on top amplifies the swing at the equity line.</a:t>
+              <a:t>DOL = 1.96× — a 1% sales move becomes a 1.96% EBIT move. DFL on top amplifies it again at the equity line.</a:t>
             </a:r>
             <a:endParaRPr lang="en-US" sz="1150" dirty="0"/>
           </a:p>
